--- a/Challenge-III-Ice-Truck-Cloud/Praesentation/ice-truck-in-der-cloud.pptx
+++ b/Challenge-III-Ice-Truck-Cloud/Praesentation/ice-truck-in-der-cloud.pptx
@@ -4,6 +4,9 @@
   <p:sldMasterIdLst>
     <p:sldMasterId id="2147483648" r:id="rId1"/>
   </p:sldMasterIdLst>
+  <p:notesMasterIdLst>
+    <p:notesMasterId r:id="rId15"/>
+  </p:notesMasterIdLst>
   <p:sldIdLst>
     <p:sldId id="256" r:id="rId2"/>
     <p:sldId id="257" r:id="rId3"/>
@@ -19,9 +22,6 @@
     <p:sldId id="267" r:id="rId13"/>
     <p:sldId id="268" r:id="rId14"/>
   </p:sldIdLst>
-  <p:notesMasterIdLst>
-    <p:notesMasterId r:id="rId15"/>
-  </p:notesMasterIdLst>
   <p:sldSz cx="12192000" cy="6858000"/>
   <p:notesSz cx="6858000" cy="12192000"/>
   <p:defaultTextStyle>
@@ -119,7 +119,7 @@
   <p:extLst>
     <p:ext uri="{521415D9-36F7-43E2-AB2F-B90AF26B5E84}">
       <p14:sectionLst xmlns:p14="http://schemas.microsoft.com/office/powerpoint/2010/main">
-        <p14:section name="Einleitung" id="{718c6b61-c949-65d6-0f22-1b752d93840a}">
+        <p14:section name="Einleitung" id="{718C6B61-C949-65D6-0F22-1B752D93840A}">
           <p14:sldIdLst>
             <p14:sldId id="256"/>
             <p14:sldId id="257"/>
@@ -127,7 +127,7 @@
             <p14:sldId id="259"/>
           </p14:sldIdLst>
         </p14:section>
-        <p14:section name="Auswahl und Einordnung" id="{753b803a-480c-7316-93bd-fcf5394ec5a8}">
+        <p14:section name="Auswahl und Einordnung" id="{753B803A-480C-7316-93BD-FCF5394EC5A8}">
           <p14:sldIdLst>
             <p14:sldId id="260"/>
             <p14:sldId id="261"/>
@@ -135,13 +135,13 @@
             <p14:sldId id="263"/>
           </p14:sldIdLst>
         </p14:section>
-        <p14:section name="Datenschutz und Sicherheit" id="{7bddd0be-f429-96c0-9707-f1f221bbfae0}">
+        <p14:section name="Datenschutz und Sicherheit" id="{7BDDD0BE-F429-96C0-9707-F1F221BBFAE0}">
           <p14:sldIdLst>
             <p14:sldId id="264"/>
             <p14:sldId id="265"/>
           </p14:sldIdLst>
         </p14:section>
-        <p14:section name="Ergebnis" id="{45e8288f-2223-12a4-ab1f-2b4307fd1b75}">
+        <p14:section name="Ergebnis" id="{45E8288F-2223-12A4-AB1F-2B4307FD1B75}">
           <p14:sldIdLst>
             <p14:sldId id="266"/>
             <p14:sldId id="267"/>
@@ -179,234 +179,10 @@
           <a:chExt cx="0" cy="0"/>
         </a:xfrm>
       </p:grpSpPr>
-      <p:sp>
-        <p:nvSpPr>
-          <p:cNvPr id="2" name="Header Placeholder 1"/>
-          <p:cNvSpPr>
-            <a:spLocks noGrp="1"/>
-          </p:cNvSpPr>
-          <p:nvPr>
-            <p:ph type="hdr" sz="quarter"/>
-          </p:nvPr>
-        </p:nvSpPr>
-        <p:spPr>
-          <a:xfrm>
-            <a:off x="0" y="0"/>
-            <a:ext cx="2971800" cy="458788"/>
-          </a:xfrm>
-          <a:prstGeom prst="rect">
-            <a:avLst/>
-          </a:prstGeom>
-        </p:spPr>
-        <p:txBody>
-          <a:bodyPr vert="horz" lIns="91440" tIns="45720" rIns="91440" bIns="45720" rtlCol="0"/>
-          <a:lstStyle>
-            <a:lvl1pPr algn="l">
-              <a:defRPr sz="1200"/>
-            </a:lvl1pPr>
-          </a:lstStyle>
-          <a:p>
-            <a:endParaRPr lang="en-US"/>
-          </a:p>
-        </p:txBody>
-      </p:sp>
-      <p:sp>
-        <p:nvSpPr>
-          <p:cNvPr id="3" name="Date Placeholder 2"/>
-          <p:cNvSpPr>
-            <a:spLocks noGrp="1"/>
-          </p:cNvSpPr>
-          <p:nvPr>
-            <p:ph type="dt" idx="1"/>
-          </p:nvPr>
-        </p:nvSpPr>
-        <p:spPr>
-          <a:xfrm>
-            <a:off x="3884613" y="0"/>
-            <a:ext cx="2971800" cy="458788"/>
-          </a:xfrm>
-          <a:prstGeom prst="rect">
-            <a:avLst/>
-          </a:prstGeom>
-        </p:spPr>
-        <p:txBody>
-          <a:bodyPr vert="horz" lIns="91440" tIns="45720" rIns="91440" bIns="45720" rtlCol="0"/>
-          <a:lstStyle>
-            <a:lvl1pPr algn="r">
-              <a:defRPr sz="1200"/>
-            </a:lvl1pPr>
-          </a:lstStyle>
-          <a:p>
-            <a:fld id="{5282F153-3F37-0F45-9E97-73ACFA13230C}" type="datetimeFigureOut">
-              <a:rPr lang="en-US"/>
-              <a:t>7/23/19</a:t>
-            </a:fld>
-            <a:endParaRPr lang="en-US"/>
-          </a:p>
-        </p:txBody>
-      </p:sp>
-      <p:sp>
-        <p:nvSpPr>
-          <p:cNvPr id="4" name="Slide Image Placeholder 3"/>
-          <p:cNvSpPr>
-            <a:spLocks noGrp="1" noRot="1" noChangeAspect="1"/>
-          </p:cNvSpPr>
-          <p:nvPr>
-            <p:ph type="sldImg" idx="2"/>
-          </p:nvPr>
-        </p:nvSpPr>
-        <p:spPr>
-          <a:xfrm>
-            <a:off x="685800" y="1143000"/>
-            <a:ext cx="5486400" cy="3086100"/>
-          </a:xfrm>
-          <a:prstGeom prst="rect">
-            <a:avLst/>
-          </a:prstGeom>
-          <a:noFill/>
-          <a:ln w="12700">
-            <a:solidFill>
-              <a:prstClr val="black"/>
-            </a:solidFill>
-          </a:ln>
-        </p:spPr>
-        <p:txBody>
-          <a:bodyPr vert="horz" lIns="91440" tIns="45720" rIns="91440" bIns="45720" rtlCol="0" anchor="ctr"/>
-          <a:lstStyle/>
-          <a:p>
-            <a:endParaRPr lang="en-US"/>
-          </a:p>
-        </p:txBody>
-      </p:sp>
-      <p:sp>
-        <p:nvSpPr>
-          <p:cNvPr id="5" name="Notes Placeholder 4"/>
-          <p:cNvSpPr>
-            <a:spLocks noGrp="1"/>
-          </p:cNvSpPr>
-          <p:nvPr>
-            <p:ph type="body" sz="quarter" idx="3"/>
-          </p:nvPr>
-        </p:nvSpPr>
-        <p:spPr>
-          <a:xfrm>
-            <a:off x="685800" y="4400550"/>
-            <a:ext cx="5486400" cy="3600450"/>
-          </a:xfrm>
-          <a:prstGeom prst="rect">
-            <a:avLst/>
-          </a:prstGeom>
-        </p:spPr>
-        <p:txBody>
-          <a:bodyPr vert="horz" lIns="91440" tIns="45720" rIns="91440" bIns="45720" rtlCol="0"/>
-          <a:lstStyle/>
-          <a:p>
-            <a:pPr lvl="0"/>
-            <a:r>
-              <a:rPr lang="en-US"/>
-              <a:t>Click to edit Master text styles</a:t>
-            </a:r>
-          </a:p>
-          <a:p>
-            <a:pPr lvl="1"/>
-            <a:r>
-              <a:rPr lang="en-US"/>
-              <a:t>Second level</a:t>
-            </a:r>
-          </a:p>
-          <a:p>
-            <a:pPr lvl="2"/>
-            <a:r>
-              <a:rPr lang="en-US"/>
-              <a:t>Third level</a:t>
-            </a:r>
-          </a:p>
-          <a:p>
-            <a:pPr lvl="3"/>
-            <a:r>
-              <a:rPr lang="en-US"/>
-              <a:t>Fourth level</a:t>
-            </a:r>
-          </a:p>
-          <a:p>
-            <a:pPr lvl="4"/>
-            <a:r>
-              <a:rPr lang="en-US"/>
-              <a:t>Fifth level</a:t>
-            </a:r>
-          </a:p>
-        </p:txBody>
-      </p:sp>
-      <p:sp>
-        <p:nvSpPr>
-          <p:cNvPr id="6" name="Footer Placeholder 5"/>
-          <p:cNvSpPr>
-            <a:spLocks noGrp="1"/>
-          </p:cNvSpPr>
-          <p:nvPr>
-            <p:ph type="ftr" sz="quarter" idx="4"/>
-          </p:nvPr>
-        </p:nvSpPr>
-        <p:spPr>
-          <a:xfrm>
-            <a:off x="0" y="8685213"/>
-            <a:ext cx="2971800" cy="458787"/>
-          </a:xfrm>
-          <a:prstGeom prst="rect">
-            <a:avLst/>
-          </a:prstGeom>
-        </p:spPr>
-        <p:txBody>
-          <a:bodyPr vert="horz" lIns="91440" tIns="45720" rIns="91440" bIns="45720" rtlCol="0" anchor="b"/>
-          <a:lstStyle>
-            <a:lvl1pPr algn="l">
-              <a:defRPr sz="1200"/>
-            </a:lvl1pPr>
-          </a:lstStyle>
-          <a:p>
-            <a:endParaRPr lang="en-US"/>
-          </a:p>
-        </p:txBody>
-      </p:sp>
-      <p:sp>
-        <p:nvSpPr>
-          <p:cNvPr id="7" name="Slide Number Placeholder 6"/>
-          <p:cNvSpPr>
-            <a:spLocks noGrp="1"/>
-          </p:cNvSpPr>
-          <p:nvPr>
-            <p:ph type="sldNum" sz="quarter" idx="5"/>
-          </p:nvPr>
-        </p:nvSpPr>
-        <p:spPr>
-          <a:xfrm>
-            <a:off x="3884613" y="8685213"/>
-            <a:ext cx="2971800" cy="458787"/>
-          </a:xfrm>
-          <a:prstGeom prst="rect">
-            <a:avLst/>
-          </a:prstGeom>
-        </p:spPr>
-        <p:txBody>
-          <a:bodyPr vert="horz" lIns="91440" tIns="45720" rIns="91440" bIns="45720" rtlCol="0" anchor="b"/>
-          <a:lstStyle>
-            <a:lvl1pPr algn="r">
-              <a:defRPr sz="1200"/>
-            </a:lvl1pPr>
-          </a:lstStyle>
-          <a:p>
-            <a:fld id="{CE5E9CC1-C706-0F49-92D6-E571CC5EEA8F}" type="slidenum">
-              <a:rPr lang="en-US"/>
-              <a:t>‹#›</a:t>
-            </a:fld>
-            <a:endParaRPr lang="en-US"/>
-          </a:p>
-        </p:txBody>
-      </p:sp>
     </p:spTree>
     <p:extLst>
       <p:ext uri="{BB962C8B-B14F-4D97-AF65-F5344CB8AC3E}">
-        <p14:creationId xmlns:p14="http://schemas.microsoft.com/office/powerpoint/2010/main" val="1024086991"/>
+        <p14:creationId xmlns:p14="http://schemas.microsoft.com/office/powerpoint/2010/main" val="1526590098"/>
       </p:ext>
     </p:extLst>
   </p:cSld>
@@ -554,7 +330,6 @@
               <a:rPr lang="en-US" dirty="0"/>
               <a:t>SPRECHER: Anton · RICHTZEIT: 0:30 min — Guten Tag zusammen, wir sind Team 13-1. In Challenge III ging es darum, die Temperaturdaten vom Ice Truck automatisch in eine Cloud zu bringen. Ich beginne mit Problem und Lösung. Danach stellt Dogan die Cloud-Auswahl vor, Erik erklärt Datenschutz und Sicherheit, und Felix zeigt das Ergebnis, die Zusatzfunktionen und das Fazit. ÜBERGABE: Weiter mit Problem und Lösung (Anton bleibt).</a:t>
             </a:r>
-            <a:endParaRPr lang="en-US" dirty="0"/>
           </a:p>
         </p:txBody>
       </p:sp>
@@ -642,7 +417,6 @@
               <a:rPr lang="en-US" dirty="0"/>
               <a:t>SPRECHER: Erik · RICHTZEIT: 1:30 min — Unser Konzept in sechs Punkten. Verschlüsselung: nur HTTPS. Authentifizierung: Der Write Key liegt nur auf dem Pi, und wir haben die Keys bereits einmal erneuert. Geheimnisse: in einer .env-Datei mit eingeschränkten Rechten, nie im Git-Repository. Vollständigkeit: Jede Messung hat eine lokale ID, der Cursor rückt erst nach erfolgreichem Upload weiter, nach einem Funkloch wird nachgeholt. Nachweisbarkeit: UTC-Zeitstempel, Pi-Zeit per NTP. Minimale Rechte: Die Bridge liest die Datenbank nur und läuft ohne Zusatzrechte. Nachweise zeigen: curl auf ThingSpeak für TLS, ls -l der .env, git check-ignore. Ehrlich benannte Grenzen: Das Web-Terminal des Pi hat noch keine eigene Anmeldung, die Pi-Uhr hat keine Batterie, und der Free-Tarif bietet keinen Löschschutz, deshalb bleibt das Original in der lokalen Datenbank. Details stehen im SICHERHEITSKONZEPT.md. ÜBERGABE: Ich übergebe an Felix: Ergebnis, Zusatzfunktionen und Fazit.</a:t>
             </a:r>
-            <a:endParaRPr lang="en-US" dirty="0"/>
           </a:p>
         </p:txBody>
       </p:sp>
@@ -730,7 +504,6 @@
               <a:rPr lang="en-US" dirty="0"/>
               <a:t>SPRECHER: Felix · RICHTZEIT: 1:30 min — Hier zeigen wir die Ergebnisse. LIVE-DEMO oder Screenshot: ThingSpeak-Kanal mit Temperaturverlauf, Lüfter und Ventil. Die Messung läuft alle 5 Sekunden. Der Upload wird wegen der Free-Grenze alle 15 Sekunden gebündelt, jede Messung behält ihre eigene Uhrzeit. Es gibt 8 Felder, und der CSV-Export dient als Nachweis für Kontrollen. Der Kanal ist öffentlich, deshalb kann jeder ohne Anmeldung zuschauen. VOR DEM VORTRAG: Den Platzhalter durch einen echten Screenshot ersetzen und prüfen, dass die Punkte im 5-Sekunden-Abstand ankommen. ÜBERGABE: Weiter mit den Zusatzfunktionen (Felix bleibt).</a:t>
             </a:r>
-            <a:endParaRPr lang="en-US" dirty="0"/>
           </a:p>
         </p:txBody>
       </p:sp>
@@ -818,7 +591,6 @@
               <a:rPr lang="en-US" dirty="0"/>
               <a:t>SPRECHER: Felix · RICHTZEIT: 1:00 min — Store and Forward: Bei einem Funkloch werden fehlende Messungen später mit ihrer Originalzeit nachgeliefert. Health-Flags: Die Bridge warnt schon am Truck bei zu hoher Temperatur, abweichenden Sensoren oder einem eingefrorenen Sensor. Alarm: Sobald Field 3 über 30 Grad steigt, startet ThingSpeak React eine MATLAB-Analyse, die eine Nachricht an unseren Discord-Server und eine E-Mail schickt. Die Zugangsdaten liegen nur in ThingSpeak. Laut My Account sind 800 Alarm-Mails im Jahr erlaubt. Als Nächstes das Sensor-Drift-Diagramm als Beispiel für Predictive Maintenance. VOR DEM VORTRAG: Wenn das Diagramm läuft, die Karte auf UMGESETZT setzen, sonst die Karte löschen. ÜBERGABE: Weiter mit dem Fazit (Felix bleibt).</a:t>
             </a:r>
-            <a:endParaRPr lang="en-US" dirty="0"/>
           </a:p>
         </p:txBody>
       </p:sp>
@@ -906,7 +678,6 @@
               <a:rPr lang="en-US" dirty="0"/>
               <a:t>SPRECHER: Felix · RICHTZEIT: 1:00 min — Wir erfüllen die Nachweispflicht deutlich besser: Die Daten kommen automatisch und zeitnah in die Cloud und sind von überall abrufbar. Sie sind doppelt gesichert, lokal im Pi und in der Cloud. Ausblick: Für den echten Flottenbetrieb würden wir Azure IoT Hub mit EU-Region wählen, die Alarme ausbauen und die Sensor-Drift für Predictive Maintenance nutzen. Gelernt: Unsere Bridge trennt Logik und Sender, der Anbieter lässt sich austauschen. ThingSpeak jetzt, Azure für die Flotte. Vielen Dank, wir freuen uns auf eure Fragen. ÜBERGABE: Fragen beantwortet, wer fachlich dran ist (siehe Rückfragen im Redemanuskript).</a:t>
             </a:r>
-            <a:endParaRPr lang="en-US" dirty="0"/>
           </a:p>
         </p:txBody>
       </p:sp>
@@ -994,7 +765,6 @@
               <a:rPr lang="en-US" dirty="0"/>
               <a:t>SPRECHER: Anton · RICHTZEIT: 1:00 min — Die Ausgangslage: Die Messwerte liegen bisher nur auf dem Raspberry Pi im Truck und werden erst in der Zentrale von Hand gesichert. Gleichzeitig verlangen die EU-Verordnungen 178/2002 und 37/2005 einen Nachweis der Temperaturen. Kontrolliert wird bisher nur stichprobenartig, und Sensoren oder Kühlaggregate fallen trotz Wartung immer wieder aus. Unser Ziel: Die Daten sollen automatisch in die Cloud, damit sie jederzeit und überall abrufbar sind und auch bei einem Ausfall des Pi erhalten bleiben. ÜBERGABE: Weiter mit unserer Lösung (Anton bleibt).</a:t>
             </a:r>
-            <a:endParaRPr lang="en-US" dirty="0"/>
           </a:p>
         </p:txBody>
       </p:sp>
@@ -1082,7 +852,6 @@
               <a:rPr lang="en-US" dirty="0"/>
               <a:t>SPRECHER: Anton · RICHTZEIT: 1:00 min — So läuft es: Die Arduinos messen, der Raspberry Pi regelt und speichert jede Messung in einer SQLite-Datenbank. Unsere Cloud-Bridge, ein kleines Python-Programm, liest nur neue Messungen und schickt sie per HTTPS an ThingSpeak. Die Datenbank ist zugleich der Puffer: Fällt das Netz aus, wird später nachgeholt. In der Cloud gibt es Diagramme, Alarme und einen CSV-Export. Wir messen alle 5 Sekunden, jede Messung hat 8 Datenfelder, und der Free-Tarif kostet nichts. ÜBERGABE: Weiter mit dem Überblick zum Bewertungsbogen (Anton bleibt).</a:t>
             </a:r>
-            <a:endParaRPr lang="en-US" dirty="0"/>
           </a:p>
         </p:txBody>
       </p:sp>
@@ -1170,7 +939,6 @@
               <a:rPr lang="en-US" dirty="0"/>
               <a:t>SPRECHER: Anton · RICHTZEIT: 0:30 min — Wir haben die Präsentation entlang des Bewertungsbogens aufgebaut. Jede Folie von 5 bis 12 beantwortet genau ein Kriterium, oben rechts steht die Punktzahl. So könnt ihr direkt mitbewerten. Die größten Blöcke sind die sichere Datenübertragung und die Messdaten mit je 10 Punkten. ÜBERGABE: Ich übergebe an Dogan, er stellt die Clouddienste vor.</a:t>
             </a:r>
-            <a:endParaRPr lang="en-US" dirty="0"/>
           </a:p>
         </p:txBody>
       </p:sp>
@@ -1258,7 +1026,6 @@
               <a:rPr lang="en-US" dirty="0"/>
               <a:t>SPRECHER: Dogan · RICHTZEIT: 1:00 min — Wir haben mehrere Dienste angeschaut und stellen zwei im Detail vor: Azure IoT Hub von Microsoft und ThingSpeak von MathWorks. Verglichen haben wir nach den Kriterien aus der Aufgabe: Protokolle, Speicherung, Visualisierung, Kosten und Datenschutz. Azure ist eine Plattform mit MQTT, Archiv im Blob Storage und EU-Regionen. ThingSpeak ist eine fertige Anwendung mit HTTP und MQTT, eingebauten Diagrammen und Servern in den USA. Zusätzlich geprüft: AWS IoT Core braucht eine Kreditkarte, die Arduino Cloud speichert im Free-Tarif nur einen Tag, und eine eigene VM wäre IaaS mit viel Betriebsaufwand. ÜBERGABE: Weiter mit unserer Entscheidung (Dogan bleibt).</a:t>
             </a:r>
-            <a:endParaRPr lang="en-US" dirty="0"/>
           </a:p>
         </p:txBody>
       </p:sp>
@@ -1346,7 +1113,6 @@
               <a:rPr lang="en-US" dirty="0"/>
               <a:t>SPRECHER: Dogan · RICHTZEIT: 1:30 min — Wir haben uns für ThingSpeak entschieden. Azure IoT Hub hatten wir ebenfalls vorbereitet, mit Einrichtungsskript und Auswertung. Am Ende hat uns ThingSpeak für unseren Prototyp aber besser gefallen, aus vier Gründen. Kosten: Es ist kostenlos und braucht keine Kreditkarte. Protokolle: Die HTTPS-Schnittstelle passt zu unserer Bridge und nimmt viele Messungen mit eigenem Zeitstempel an, MQTT wäre auch möglich. Speicherung und Visualisierung: Kanal, Diagramme und MATLAB sind eingebaut, wir brauchen keinen eigenen Server und waren in Minuten startklar. Datenschutz: Wir übertragen keine Personendaten, deshalb ist ein US-Anbieter vertretbar. Für eine ganze Flotte würden wir Azure empfehlen. FALLS GEFRAGT, warum nicht Azure: ehrlich antworten, dass der Zugang zu unserem Azure-Schülerkonto zum Start nicht verfügbar war und ThingSpeak dann alle Anforderungen erfüllt hat und uns besser gefallen hat. ÜBERGABE: Weiter mit den NIST-Merkmalen (Dogan bleibt).</a:t>
             </a:r>
-            <a:endParaRPr lang="en-US" dirty="0"/>
           </a:p>
         </p:txBody>
       </p:sp>
@@ -1434,7 +1200,6 @@
               <a:rPr lang="en-US" dirty="0"/>
               <a:t>SPRECHER: Dogan · RICHTZEIT: 1:00 min — Die fünf NIST-Merkmale. Self-Service: Wir haben Konto und Kanal in Minuten selbst angelegt. Broad Network Access: HTTPS aus jedem Netz, Diagramme im Browser. Resource Pooling: Die Plattform bedient viele Kunden gemeinsam, das können wir aber nicht selbst überprüfen. Rapid Elasticity: Weitere Einheiten lassen sich jederzeit zukaufen, eine Einheit sind 33 Millionen Nachrichten im Jahr, im Free-Tarif gelten aber feste Limits und es gibt kein automatisches Skalieren. Measured Service: Auf der Seite My Account sehen wir Verbrauch und Restkontingent, dazu den Screenshot zeigen. Ein privater Server zu Hause wäre keine Cloud, weil Pooling, Elastizität und Abrechnung fehlen. ÜBERGABE: Ich übergebe an Erik: Einordnung, Datenschutz und Sicherheit.</a:t>
             </a:r>
-            <a:endParaRPr lang="en-US" dirty="0"/>
           </a:p>
         </p:txBody>
       </p:sp>
@@ -1522,7 +1287,6 @@
               <a:rPr lang="en-US" dirty="0"/>
               <a:t>SPRECHER: Erik · RICHTZEIT: 1:00 min — Die Einordnung hängt davon ab, wer was verwaltet. Bei einer eigenen VM wäre es IaaS: Wir müssten Betriebssystem, Broker und Datenbank selbst betreiben. Azure IoT Hub ist PaaS: Die Plattform gehört dem Anbieter, wir betreiben nur Geräte, Routing und Auswertung. ThingSpeak ist SaaS: Wir konfigurieren nur einen Kanal in einer fertigen Anwendung und liefern Daten. Die MATLAB-Skripte sind ein Zusatz innerhalb dieser Anwendung, kein eigener Plattformbetrieb. ÜBERGABE: Weiter mit Datensicherheit und DSGVO (Erik bleibt).</a:t>
             </a:r>
-            <a:endParaRPr lang="en-US" dirty="0"/>
           </a:p>
         </p:txBody>
       </p:sp>
@@ -1610,7 +1374,6 @@
               <a:rPr lang="en-US" dirty="0"/>
               <a:t>SPRECHER: Erik · RICHTZEIT: 1:30 min — Was wir übertragen: Truck-ID, Temperaturen, Aktorwerte und Zeitstempel. In den Messdaten steckt kein Personenbezug, personenbezogen sind nur die Kontodaten des Teams bei MathWorks. Risiken: Laut MathWorks werden Daten dort gespeichert, wo MathWorks oder seine Dienstleister arbeiten, also auch in den USA. Das wäre eine Drittlandübermittlung. Wir haben im Verzeichnis nachgesehen: MathWorks ist im EU-US Data Privacy Framework aktiv gelistet, zertifiziert seit 2016. Das gilt aber nur für Nicht-Beschäftigtendaten, bei Fahrerdaten wäre es keine Grundlage. Der Kanal ist bewusst öffentlich, weil er nur nicht-sensible Messdaten enthält und Prüfer den Verlauf ohne Anmeldung sehen können. Geschrieben werden kann nur mit dem geheimen Write Key. Aufbewahrung: 12 Monate als unsere Festlegung, dazu monatlich ein CSV-Export. Im Realbetrieb wäre der Kanal privat, mit EU-Hosting und Auftragsverarbeitungsvertrag. Details stehen in DATENSCHUTZ.md. ÜBERGABE: Weiter mit der sicheren Datenübertragung (Erik bleibt).</a:t>
             </a:r>
-            <a:endParaRPr lang="en-US" dirty="0"/>
           </a:p>
         </p:txBody>
       </p:sp>
@@ -1688,6 +1451,7 @@
         <a:solidFill>
           <a:schemeClr val="bg1"/>
         </a:solidFill>
+        <a:effectLst/>
       </p:bgPr>
     </p:bg>
     <p:spTree>
@@ -1707,9 +1471,11 @@
       <p:sp>
         <p:nvSpPr>
           <p:cNvPr id="2" name="Text 0"/>
-          <p:cNvSpPr/>
+          <p:cNvSpPr>
+            <a:spLocks noGrp="1"/>
+          </p:cNvSpPr>
           <p:nvPr>
-            <p:ph idx="100" type="title" hasCustomPrompt="1"/>
+            <p:ph type="title" idx="100" hasCustomPrompt="1"/>
           </p:nvPr>
         </p:nvSpPr>
         <p:spPr>
@@ -1726,7 +1492,7 @@
         <p:txBody>
           <a:bodyPr wrap="square" rtlCol="0"/>
           <a:lstStyle>
-            <a:lvl1pPr algn="l" indent="0" marL="0">
+            <a:lvl1pPr marL="0" indent="0" algn="l">
               <a:buNone/>
               <a:defRPr lang="en-US" sz="3600" b="1" dirty="0">
                 <a:solidFill>
@@ -1739,7 +1505,7 @@
             </a:lvl1pPr>
           </a:lstStyle>
           <a:p>
-            <a:pPr algn="l" indent="0" marL="0">
+            <a:pPr marL="0" indent="0" algn="l">
               <a:buNone/>
             </a:pPr>
             <a:endParaRPr lang="en-US" sz="3600" dirty="0"/>
@@ -1767,7 +1533,7 @@
           <a:bodyPr wrap="square" lIns="0" tIns="0" rIns="0" bIns="0" rtlCol="0" anchor="ctr"/>
           <a:lstStyle/>
           <a:p>
-            <a:pPr indent="0" marL="0">
+            <a:pPr marL="0" indent="0">
               <a:buNone/>
             </a:pPr>
             <a:r>
@@ -1805,7 +1571,7 @@
           </a:prstGeom>
           <a:extLst>
             <a:ext uri="{C572A759-6A51-4108-AA02-DFA0A04FC94B}">
-              <ma14:wrappingTextBoxFlag xmlns:ma14="http://schemas.microsoft.com/office/mac/drawingml/2011/main" val="0"/>
+              <ma14:wrappingTextBoxFlag xmlns:ma14="http://schemas.microsoft.com/office/mac/drawingml/2011/main" xmlns="" val="0"/>
             </a:ext>
           </a:extLst>
         </p:spPr>
@@ -1826,8 +1592,8 @@
           <a:p>
             <a:pPr algn="r"/>
             <a:fld id="{F7021451-1387-4CA6-816F-3879F97B5CBC}" type="slidenum">
-              <a:rPr b="0" lang="en-US"/>
-              <a:t>1002</a:t>
+              <a:rPr lang="en-US" b="0"/>
+              <a:t>‹Nr.›</a:t>
             </a:fld>
             <a:endParaRPr lang="en-US"/>
           </a:p>
@@ -1849,6 +1615,7 @@
         <a:solidFill>
           <a:schemeClr val="bg2"/>
         </a:solidFill>
+        <a:effectLst/>
       </p:bgPr>
     </p:bg>
     <p:spTree>
@@ -1868,9 +1635,11 @@
       <p:sp>
         <p:nvSpPr>
           <p:cNvPr id="2" name="Text 0"/>
-          <p:cNvSpPr/>
+          <p:cNvSpPr>
+            <a:spLocks noGrp="1"/>
+          </p:cNvSpPr>
           <p:nvPr>
-            <p:ph idx="100" type="title" hasCustomPrompt="1"/>
+            <p:ph type="title" idx="100" hasCustomPrompt="1"/>
           </p:nvPr>
         </p:nvSpPr>
         <p:spPr>
@@ -1887,7 +1656,7 @@
         <p:txBody>
           <a:bodyPr wrap="square" rtlCol="0"/>
           <a:lstStyle>
-            <a:lvl1pPr algn="l" indent="0" marL="0">
+            <a:lvl1pPr marL="0" indent="0" algn="l">
               <a:buNone/>
               <a:defRPr lang="en-US" sz="3600" b="1" dirty="0">
                 <a:solidFill>
@@ -1900,7 +1669,7 @@
             </a:lvl1pPr>
           </a:lstStyle>
           <a:p>
-            <a:pPr algn="l" indent="0" marL="0">
+            <a:pPr marL="0" indent="0" algn="l">
               <a:buNone/>
             </a:pPr>
             <a:endParaRPr lang="en-US" sz="3600" dirty="0"/>
@@ -1928,7 +1697,7 @@
           <a:bodyPr wrap="square" lIns="0" tIns="0" rIns="0" bIns="0" rtlCol="0" anchor="ctr"/>
           <a:lstStyle/>
           <a:p>
-            <a:pPr indent="0" marL="0">
+            <a:pPr marL="0" indent="0">
               <a:buNone/>
             </a:pPr>
             <a:r>
@@ -1966,7 +1735,7 @@
           </a:prstGeom>
           <a:extLst>
             <a:ext uri="{C572A759-6A51-4108-AA02-DFA0A04FC94B}">
-              <ma14:wrappingTextBoxFlag xmlns:ma14="http://schemas.microsoft.com/office/mac/drawingml/2011/main" val="0"/>
+              <ma14:wrappingTextBoxFlag xmlns:ma14="http://schemas.microsoft.com/office/mac/drawingml/2011/main" xmlns="" val="0"/>
             </a:ext>
           </a:extLst>
         </p:spPr>
@@ -1987,8 +1756,8 @@
           <a:p>
             <a:pPr algn="r"/>
             <a:fld id="{F7021451-1387-4CA6-816F-3879F97B5CBC}" type="slidenum">
-              <a:rPr b="0" lang="en-US"/>
-              <a:t>1003</a:t>
+              <a:rPr lang="en-US" b="0"/>
+              <a:t>‹Nr.›</a:t>
             </a:fld>
             <a:endParaRPr lang="en-US"/>
           </a:p>
@@ -2010,6 +1779,7 @@
         <a:solidFill>
           <a:schemeClr val="tx1"/>
         </a:solidFill>
+        <a:effectLst/>
       </p:bgPr>
     </p:bg>
     <p:spTree>
@@ -2029,9 +1799,11 @@
       <p:sp>
         <p:nvSpPr>
           <p:cNvPr id="2" name="Text 0"/>
-          <p:cNvSpPr/>
+          <p:cNvSpPr>
+            <a:spLocks noGrp="1"/>
+          </p:cNvSpPr>
           <p:nvPr>
-            <p:ph idx="100" type="title" hasCustomPrompt="1"/>
+            <p:ph type="title" idx="100" hasCustomPrompt="1"/>
           </p:nvPr>
         </p:nvSpPr>
         <p:spPr>
@@ -2048,7 +1820,7 @@
         <p:txBody>
           <a:bodyPr wrap="square" rtlCol="0"/>
           <a:lstStyle>
-            <a:lvl1pPr algn="l" indent="0" marL="0">
+            <a:lvl1pPr marL="0" indent="0" algn="l">
               <a:buNone/>
               <a:defRPr lang="en-US" sz="3600" b="1" dirty="0">
                 <a:solidFill>
@@ -2061,7 +1833,7 @@
             </a:lvl1pPr>
           </a:lstStyle>
           <a:p>
-            <a:pPr algn="l" indent="0" marL="0">
+            <a:pPr marL="0" indent="0" algn="l">
               <a:buNone/>
             </a:pPr>
             <a:endParaRPr lang="en-US" sz="3600" dirty="0"/>
@@ -2089,7 +1861,7 @@
           <a:bodyPr wrap="square" lIns="0" tIns="0" rIns="0" bIns="0" rtlCol="0" anchor="ctr"/>
           <a:lstStyle/>
           <a:p>
-            <a:pPr indent="0" marL="0">
+            <a:pPr marL="0" indent="0">
               <a:buNone/>
             </a:pPr>
             <a:r>
@@ -2127,7 +1899,7 @@
           </a:prstGeom>
           <a:extLst>
             <a:ext uri="{C572A759-6A51-4108-AA02-DFA0A04FC94B}">
-              <ma14:wrappingTextBoxFlag xmlns:ma14="http://schemas.microsoft.com/office/mac/drawingml/2011/main" val="0"/>
+              <ma14:wrappingTextBoxFlag xmlns:ma14="http://schemas.microsoft.com/office/mac/drawingml/2011/main" xmlns="" val="0"/>
             </a:ext>
           </a:extLst>
         </p:spPr>
@@ -2148,8 +1920,8 @@
           <a:p>
             <a:pPr algn="r"/>
             <a:fld id="{F7021451-1387-4CA6-816F-3879F97B5CBC}" type="slidenum">
-              <a:rPr b="0" lang="en-US"/>
-              <a:t>1004</a:t>
+              <a:rPr lang="en-US" b="0"/>
+              <a:t>‹Nr.›</a:t>
             </a:fld>
             <a:endParaRPr lang="en-US"/>
           </a:p>
@@ -2171,6 +1943,7 @@
         <a:solidFill>
           <a:schemeClr val="tx1"/>
         </a:solidFill>
+        <a:effectLst/>
       </p:bgPr>
     </p:bg>
     <p:spTree>
@@ -2190,9 +1963,11 @@
       <p:sp>
         <p:nvSpPr>
           <p:cNvPr id="2" name="Text 0"/>
-          <p:cNvSpPr/>
+          <p:cNvSpPr>
+            <a:spLocks noGrp="1"/>
+          </p:cNvSpPr>
           <p:nvPr>
-            <p:ph idx="100" type="title" hasCustomPrompt="1"/>
+            <p:ph type="title" idx="100" hasCustomPrompt="1"/>
           </p:nvPr>
         </p:nvSpPr>
         <p:spPr>
@@ -2209,7 +1984,7 @@
         <p:txBody>
           <a:bodyPr wrap="square" rtlCol="0"/>
           <a:lstStyle>
-            <a:lvl1pPr algn="l" indent="0" marL="0">
+            <a:lvl1pPr marL="0" indent="0" algn="l">
               <a:buNone/>
               <a:defRPr lang="en-US" sz="5400" b="1" dirty="0">
                 <a:solidFill>
@@ -2222,7 +1997,7 @@
             </a:lvl1pPr>
           </a:lstStyle>
           <a:p>
-            <a:pPr algn="l" indent="0" marL="0">
+            <a:pPr marL="0" indent="0" algn="l">
               <a:buNone/>
             </a:pPr>
             <a:endParaRPr lang="en-US" sz="5400" dirty="0"/>
@@ -2250,7 +2025,7 @@
           <a:bodyPr wrap="square" lIns="0" tIns="0" rIns="0" bIns="0" rtlCol="0" anchor="ctr"/>
           <a:lstStyle/>
           <a:p>
-            <a:pPr indent="0" marL="0">
+            <a:pPr marL="0" indent="0">
               <a:buNone/>
             </a:pPr>
             <a:r>
@@ -2288,7 +2063,7 @@
           </a:prstGeom>
           <a:extLst>
             <a:ext uri="{C572A759-6A51-4108-AA02-DFA0A04FC94B}">
-              <ma14:wrappingTextBoxFlag xmlns:ma14="http://schemas.microsoft.com/office/mac/drawingml/2011/main" val="0"/>
+              <ma14:wrappingTextBoxFlag xmlns:ma14="http://schemas.microsoft.com/office/mac/drawingml/2011/main" xmlns="" val="0"/>
             </a:ext>
           </a:extLst>
         </p:spPr>
@@ -2309,8 +2084,8 @@
           <a:p>
             <a:pPr algn="r"/>
             <a:fld id="{F7021451-1387-4CA6-816F-3879F97B5CBC}" type="slidenum">
-              <a:rPr b="0" lang="en-US"/>
-              <a:t>1005</a:t>
+              <a:rPr lang="en-US" b="0"/>
+              <a:t>‹Nr.›</a:t>
             </a:fld>
             <a:endParaRPr lang="en-US"/>
           </a:p>
@@ -2327,6 +2102,11 @@
 <file path=ppt/slideMasters/slideMaster1.xml><?xml version="1.0" encoding="utf-8"?>
 <p:sldMaster xmlns:a="http://schemas.openxmlformats.org/drawingml/2006/main" xmlns:r="http://schemas.openxmlformats.org/officeDocument/2006/relationships" xmlns:p="http://schemas.openxmlformats.org/presentationml/2006/main">
   <p:cSld>
+    <p:bg>
+      <p:bgRef idx="1001">
+        <a:schemeClr val="bg1"/>
+      </p:bgRef>
+    </p:bg>
     <p:spTree>
       <p:nvGrpSpPr>
         <p:cNvPr id="1" name=""/>
@@ -2361,7 +2141,7 @@
           </a:prstGeom>
           <a:extLst>
             <a:ext uri="{C572A759-6A51-4108-AA02-DFA0A04FC94B}">
-              <ma14:wrappingTextBoxFlag xmlns:ma14="http://schemas.microsoft.com/office/mac/drawingml/2011/main" val="0"/>
+              <ma14:wrappingTextBoxFlag xmlns:ma14="http://schemas.microsoft.com/office/mac/drawingml/2011/main" xmlns="" val="0"/>
             </a:ext>
           </a:extLst>
         </p:spPr>
@@ -2382,8 +2162,8 @@
           <a:p>
             <a:pPr algn="r"/>
             <a:fld id="{F7021451-1387-4CA6-816F-3879F97B5CBC}" type="slidenum">
-              <a:rPr b="0" lang="en-US"/>
-              <a:t>null</a:t>
+              <a:rPr lang="en-US" b="0"/>
+              <a:t>‹Nr.›</a:t>
             </a:fld>
             <a:endParaRPr lang="en-US"/>
           </a:p>
@@ -2696,6 +2476,13 @@
             <a:prstDash val="solid"/>
           </a:ln>
         </p:spPr>
+        <p:txBody>
+          <a:bodyPr/>
+          <a:lstStyle/>
+          <a:p>
+            <a:endParaRPr lang="de-DE"/>
+          </a:p>
+        </p:txBody>
       </p:sp>
       <p:sp>
         <p:nvSpPr>
@@ -2723,17 +2510,24 @@
             <a:prstDash val="solid"/>
           </a:ln>
         </p:spPr>
+        <p:txBody>
+          <a:bodyPr/>
+          <a:lstStyle/>
+          <a:p>
+            <a:endParaRPr lang="de-DE"/>
+          </a:p>
+        </p:txBody>
       </p:sp>
       <p:pic>
         <p:nvPicPr>
-          <p:cNvPr id="4" name="Image 0" descr="Cloud">    </p:cNvPr>
+          <p:cNvPr id="4" name="Image 0" descr="Cloud"/>
           <p:cNvPicPr>
             <a:picLocks noChangeAspect="1"/>
           </p:cNvPicPr>
           <p:nvPr/>
         </p:nvPicPr>
         <p:blipFill>
-          <a:blip r:embed="rId1"/>
+          <a:blip r:embed="rId3"/>
           <a:stretch>
             <a:fillRect/>
           </a:stretch>
@@ -2769,11 +2563,11 @@
           <a:bodyPr wrap="square" lIns="0" tIns="0" rIns="0" bIns="0" rtlCol="0" anchor="ctr"/>
           <a:lstStyle/>
           <a:p>
-            <a:pPr indent="0" marL="0">
+            <a:pPr marL="0" indent="0">
               <a:buNone/>
             </a:pPr>
             <a:r>
-              <a:rPr lang="en-US" sz="1200" b="1" spc="200" kern="0" dirty="0">
+              <a:rPr lang="en-US" sz="1200" b="1" kern="0" spc="200" dirty="0">
                 <a:solidFill>
                   <a:schemeClr val="accent2"/>
                 </a:solidFill>
@@ -2790,9 +2584,11 @@
       <p:sp>
         <p:nvSpPr>
           <p:cNvPr id="6" name="Text 0"/>
-          <p:cNvSpPr/>
+          <p:cNvSpPr>
+            <a:spLocks noGrp="1"/>
+          </p:cNvSpPr>
           <p:nvPr>
-            <p:ph idx="100" type="title" hasCustomPrompt="1"/>
+            <p:ph type="title" idx="100" hasCustomPrompt="1"/>
           </p:nvPr>
         </p:nvSpPr>
         <p:spPr>
@@ -2810,7 +2606,7 @@
           <a:bodyPr wrap="square" lIns="0" tIns="0" rIns="0" bIns="0" rtlCol="0" anchor="t"/>
           <a:lstStyle/>
           <a:p>
-            <a:pPr algn="l" indent="0" marL="0">
+            <a:pPr marL="0" indent="0" algn="l">
               <a:buNone/>
             </a:pPr>
             <a:r>
@@ -2849,7 +2645,7 @@
           <a:bodyPr wrap="square" lIns="0" tIns="0" rIns="0" bIns="0" rtlCol="0" anchor="t"/>
           <a:lstStyle/>
           <a:p>
-            <a:pPr indent="0" marL="0">
+            <a:pPr marL="0" indent="0">
               <a:buNone/>
             </a:pPr>
             <a:r>
@@ -2892,7 +2688,7 @@
           <a:bodyPr wrap="square" lIns="0" tIns="0" rIns="0" bIns="0" rtlCol="0" anchor="ctr"/>
           <a:lstStyle/>
           <a:p>
-            <a:pPr algn="ctr" indent="0" marL="0">
+            <a:pPr marL="0" indent="0" algn="ctr">
               <a:buNone/>
             </a:pPr>
             <a:r>
@@ -2931,7 +2727,7 @@
           <a:bodyPr wrap="square" lIns="0" tIns="0" rIns="0" bIns="0" rtlCol="0" anchor="t"/>
           <a:lstStyle/>
           <a:p>
-            <a:pPr indent="0" marL="0">
+            <a:pPr marL="0" indent="0">
               <a:buNone/>
             </a:pPr>
             <a:r>
@@ -2969,7 +2765,7 @@
           </a:prstGeom>
           <a:extLst>
             <a:ext uri="{C572A759-6A51-4108-AA02-DFA0A04FC94B}">
-              <ma14:wrappingTextBoxFlag xmlns:ma14="http://schemas.microsoft.com/office/mac/drawingml/2011/main" val="0"/>
+              <ma14:wrappingTextBoxFlag xmlns:ma14="http://schemas.microsoft.com/office/mac/drawingml/2011/main" xmlns="" val="0"/>
             </a:ext>
           </a:extLst>
         </p:spPr>
@@ -2990,7 +2786,7 @@
           <a:p>
             <a:pPr algn="r"/>
             <a:fld id="{F7021451-1387-4CA6-816F-3879F97B5CBC}" type="slidenum">
-              <a:rPr b="0" lang="en-US"/>
+              <a:rPr lang="en-US" b="0"/>
               <a:t>1</a:t>
             </a:fld>
             <a:endParaRPr lang="en-US"/>
@@ -3043,11 +2839,11 @@
           <a:bodyPr wrap="square" lIns="0" tIns="0" rIns="0" bIns="0" rtlCol="0" anchor="ctr"/>
           <a:lstStyle/>
           <a:p>
-            <a:pPr indent="0" marL="0">
+            <a:pPr marL="0" indent="0">
               <a:buNone/>
             </a:pPr>
             <a:r>
-              <a:rPr lang="en-US" sz="1200" b="1" spc="200" kern="0" dirty="0">
+              <a:rPr lang="en-US" sz="1200" b="1" kern="0" spc="200" dirty="0">
                 <a:solidFill>
                   <a:schemeClr val="accent2"/>
                 </a:solidFill>
@@ -3086,7 +2882,7 @@
           <a:bodyPr wrap="square" lIns="0" tIns="0" rIns="0" bIns="0" rtlCol="0" anchor="ctr"/>
           <a:lstStyle/>
           <a:p>
-            <a:pPr algn="ctr" indent="0" marL="0">
+            <a:pPr marL="0" indent="0" algn="ctr">
               <a:buNone/>
             </a:pPr>
             <a:r>
@@ -3125,7 +2921,7 @@
           <a:bodyPr wrap="square" lIns="0" tIns="0" rIns="0" bIns="0" rtlCol="0" anchor="ctr"/>
           <a:lstStyle/>
           <a:p>
-            <a:pPr algn="r" indent="0" marL="0">
+            <a:pPr marL="0" indent="0" algn="r">
               <a:buNone/>
             </a:pPr>
             <a:r>
@@ -3146,9 +2942,11 @@
       <p:sp>
         <p:nvSpPr>
           <p:cNvPr id="5" name="Text 0"/>
-          <p:cNvSpPr/>
+          <p:cNvSpPr>
+            <a:spLocks noGrp="1"/>
+          </p:cNvSpPr>
           <p:nvPr>
-            <p:ph idx="100" type="title" hasCustomPrompt="1"/>
+            <p:ph type="title" idx="100" hasCustomPrompt="1"/>
           </p:nvPr>
         </p:nvSpPr>
         <p:spPr>
@@ -3166,7 +2964,7 @@
           <a:bodyPr wrap="square" lIns="0" tIns="0" rIns="0" bIns="0" rtlCol="0" anchor="t"/>
           <a:lstStyle/>
           <a:p>
-            <a:pPr algn="l" indent="0" marL="0">
+            <a:pPr marL="0" indent="0" algn="l">
               <a:buNone/>
             </a:pPr>
             <a:r>
@@ -3210,17 +3008,24 @@
             <a:prstDash val="solid"/>
           </a:ln>
         </p:spPr>
+        <p:txBody>
+          <a:bodyPr/>
+          <a:lstStyle/>
+          <a:p>
+            <a:endParaRPr lang="de-DE"/>
+          </a:p>
+        </p:txBody>
       </p:sp>
       <p:pic>
         <p:nvPicPr>
-          <p:cNvPr id="7" name="Image 0" descr="Verschlüsselt">    </p:cNvPr>
+          <p:cNvPr id="7" name="Image 0" descr="Verschlüsselt"/>
           <p:cNvPicPr>
             <a:picLocks noChangeAspect="1"/>
           </p:cNvPicPr>
           <p:nvPr/>
         </p:nvPicPr>
         <p:blipFill>
-          <a:blip r:embed="rId1"/>
+          <a:blip r:embed="rId3"/>
           <a:stretch>
             <a:fillRect/>
           </a:stretch>
@@ -3256,7 +3061,7 @@
           <a:bodyPr wrap="square" lIns="0" tIns="0" rIns="0" bIns="0" rtlCol="0" anchor="t"/>
           <a:lstStyle/>
           <a:p>
-            <a:pPr indent="0" marL="0">
+            <a:pPr marL="0" indent="0">
               <a:buNone/>
             </a:pPr>
             <a:r>
@@ -3295,7 +3100,7 @@
           <a:bodyPr wrap="square" lIns="0" tIns="0" rIns="0" bIns="0" rtlCol="0" anchor="t"/>
           <a:lstStyle/>
           <a:p>
-            <a:pPr indent="0" marL="0">
+            <a:pPr marL="0" indent="0">
               <a:buNone/>
             </a:pPr>
             <a:r>
@@ -3339,17 +3144,24 @@
             <a:prstDash val="solid"/>
           </a:ln>
         </p:spPr>
+        <p:txBody>
+          <a:bodyPr/>
+          <a:lstStyle/>
+          <a:p>
+            <a:endParaRPr lang="de-DE"/>
+          </a:p>
+        </p:txBody>
       </p:sp>
       <p:pic>
         <p:nvPicPr>
-          <p:cNvPr id="11" name="Image 1" descr="Authentifiziert">    </p:cNvPr>
+          <p:cNvPr id="11" name="Image 1" descr="Authentifiziert"/>
           <p:cNvPicPr>
             <a:picLocks noChangeAspect="1"/>
           </p:cNvPicPr>
           <p:nvPr/>
         </p:nvPicPr>
         <p:blipFill>
-          <a:blip r:embed="rId2"/>
+          <a:blip r:embed="rId4"/>
           <a:stretch>
             <a:fillRect/>
           </a:stretch>
@@ -3385,7 +3197,7 @@
           <a:bodyPr wrap="square" lIns="0" tIns="0" rIns="0" bIns="0" rtlCol="0" anchor="t"/>
           <a:lstStyle/>
           <a:p>
-            <a:pPr indent="0" marL="0">
+            <a:pPr marL="0" indent="0">
               <a:buNone/>
             </a:pPr>
             <a:r>
@@ -3424,7 +3236,7 @@
           <a:bodyPr wrap="square" lIns="0" tIns="0" rIns="0" bIns="0" rtlCol="0" anchor="t"/>
           <a:lstStyle/>
           <a:p>
-            <a:pPr indent="0" marL="0">
+            <a:pPr marL="0" indent="0">
               <a:buNone/>
             </a:pPr>
             <a:r>
@@ -3436,7 +3248,7 @@
                 <a:ea typeface="Calibri" pitchFamily="34" charset="-122"/>
                 <a:cs typeface="Calibri" pitchFamily="34" charset="-120"/>
               </a:rPr>
-              <a:t>Write API Key nur auf dem Pi, Keys bereits erneuert</a:t>
+              <a:t>Write API Key nur auf dem Pi</a:t>
             </a:r>
             <a:endParaRPr lang="en-US" sz="1400" dirty="0"/>
           </a:p>
@@ -3468,17 +3280,24 @@
             <a:prstDash val="solid"/>
           </a:ln>
         </p:spPr>
+        <p:txBody>
+          <a:bodyPr/>
+          <a:lstStyle/>
+          <a:p>
+            <a:endParaRPr lang="de-DE"/>
+          </a:p>
+        </p:txBody>
       </p:sp>
       <p:pic>
         <p:nvPicPr>
-          <p:cNvPr id="15" name="Image 2" descr="Geheimnisse geschützt">    </p:cNvPr>
+          <p:cNvPr id="15" name="Image 2" descr="Geheimnisse geschützt"/>
           <p:cNvPicPr>
             <a:picLocks noChangeAspect="1"/>
           </p:cNvPicPr>
           <p:nvPr/>
         </p:nvPicPr>
         <p:blipFill>
-          <a:blip r:embed="rId3"/>
+          <a:blip r:embed="rId5"/>
           <a:stretch>
             <a:fillRect/>
           </a:stretch>
@@ -3514,7 +3333,7 @@
           <a:bodyPr wrap="square" lIns="0" tIns="0" rIns="0" bIns="0" rtlCol="0" anchor="t"/>
           <a:lstStyle/>
           <a:p>
-            <a:pPr indent="0" marL="0">
+            <a:pPr marL="0" indent="0">
               <a:buNone/>
             </a:pPr>
             <a:r>
@@ -3553,7 +3372,7 @@
           <a:bodyPr wrap="square" lIns="0" tIns="0" rIns="0" bIns="0" rtlCol="0" anchor="t"/>
           <a:lstStyle/>
           <a:p>
-            <a:pPr indent="0" marL="0">
+            <a:pPr marL="0" indent="0">
               <a:buNone/>
             </a:pPr>
             <a:r>
@@ -3597,17 +3416,24 @@
             <a:prstDash val="solid"/>
           </a:ln>
         </p:spPr>
+        <p:txBody>
+          <a:bodyPr/>
+          <a:lstStyle/>
+          <a:p>
+            <a:endParaRPr lang="de-DE"/>
+          </a:p>
+        </p:txBody>
       </p:sp>
       <p:pic>
         <p:nvPicPr>
-          <p:cNvPr id="19" name="Image 3" descr="Vollständig">    </p:cNvPr>
+          <p:cNvPr id="19" name="Image 3" descr="Vollständig"/>
           <p:cNvPicPr>
             <a:picLocks noChangeAspect="1"/>
           </p:cNvPicPr>
           <p:nvPr/>
         </p:nvPicPr>
         <p:blipFill>
-          <a:blip r:embed="rId4"/>
+          <a:blip r:embed="rId6"/>
           <a:stretch>
             <a:fillRect/>
           </a:stretch>
@@ -3643,7 +3469,7 @@
           <a:bodyPr wrap="square" lIns="0" tIns="0" rIns="0" bIns="0" rtlCol="0" anchor="t"/>
           <a:lstStyle/>
           <a:p>
-            <a:pPr indent="0" marL="0">
+            <a:pPr marL="0" indent="0">
               <a:buNone/>
             </a:pPr>
             <a:r>
@@ -3682,7 +3508,7 @@
           <a:bodyPr wrap="square" lIns="0" tIns="0" rIns="0" bIns="0" rtlCol="0" anchor="t"/>
           <a:lstStyle/>
           <a:p>
-            <a:pPr indent="0" marL="0">
+            <a:pPr marL="0" indent="0">
               <a:buNone/>
             </a:pPr>
             <a:r>
@@ -3726,17 +3552,24 @@
             <a:prstDash val="solid"/>
           </a:ln>
         </p:spPr>
+        <p:txBody>
+          <a:bodyPr/>
+          <a:lstStyle/>
+          <a:p>
+            <a:endParaRPr lang="de-DE"/>
+          </a:p>
+        </p:txBody>
       </p:sp>
       <p:pic>
         <p:nvPicPr>
-          <p:cNvPr id="23" name="Image 4" descr="Nachweisbar">    </p:cNvPr>
+          <p:cNvPr id="23" name="Image 4" descr="Nachweisbar"/>
           <p:cNvPicPr>
             <a:picLocks noChangeAspect="1"/>
           </p:cNvPicPr>
           <p:nvPr/>
         </p:nvPicPr>
         <p:blipFill>
-          <a:blip r:embed="rId5"/>
+          <a:blip r:embed="rId7"/>
           <a:stretch>
             <a:fillRect/>
           </a:stretch>
@@ -3772,7 +3605,7 @@
           <a:bodyPr wrap="square" lIns="0" tIns="0" rIns="0" bIns="0" rtlCol="0" anchor="t"/>
           <a:lstStyle/>
           <a:p>
-            <a:pPr indent="0" marL="0">
+            <a:pPr marL="0" indent="0">
               <a:buNone/>
             </a:pPr>
             <a:r>
@@ -3811,7 +3644,7 @@
           <a:bodyPr wrap="square" lIns="0" tIns="0" rIns="0" bIns="0" rtlCol="0" anchor="t"/>
           <a:lstStyle/>
           <a:p>
-            <a:pPr indent="0" marL="0">
+            <a:pPr marL="0" indent="0">
               <a:buNone/>
             </a:pPr>
             <a:r>
@@ -3855,17 +3688,24 @@
             <a:prstDash val="solid"/>
           </a:ln>
         </p:spPr>
+        <p:txBody>
+          <a:bodyPr/>
+          <a:lstStyle/>
+          <a:p>
+            <a:endParaRPr lang="de-DE"/>
+          </a:p>
+        </p:txBody>
       </p:sp>
       <p:pic>
         <p:nvPicPr>
-          <p:cNvPr id="27" name="Image 5" descr="Minimale Rechte">    </p:cNvPr>
+          <p:cNvPr id="27" name="Image 5" descr="Minimale Rechte"/>
           <p:cNvPicPr>
             <a:picLocks noChangeAspect="1"/>
           </p:cNvPicPr>
           <p:nvPr/>
         </p:nvPicPr>
         <p:blipFill>
-          <a:blip r:embed="rId6"/>
+          <a:blip r:embed="rId8"/>
           <a:stretch>
             <a:fillRect/>
           </a:stretch>
@@ -3901,7 +3741,7 @@
           <a:bodyPr wrap="square" lIns="0" tIns="0" rIns="0" bIns="0" rtlCol="0" anchor="t"/>
           <a:lstStyle/>
           <a:p>
-            <a:pPr indent="0" marL="0">
+            <a:pPr marL="0" indent="0">
               <a:buNone/>
             </a:pPr>
             <a:r>
@@ -3940,7 +3780,7 @@
           <a:bodyPr wrap="square" lIns="0" tIns="0" rIns="0" bIns="0" rtlCol="0" anchor="t"/>
           <a:lstStyle/>
           <a:p>
-            <a:pPr indent="0" marL="0">
+            <a:pPr marL="0" indent="0">
               <a:buNone/>
             </a:pPr>
             <a:r>
@@ -3979,7 +3819,7 @@
           <a:bodyPr wrap="square" lIns="0" tIns="0" rIns="0" bIns="0" rtlCol="0" anchor="t"/>
           <a:lstStyle/>
           <a:p>
-            <a:pPr indent="0" marL="0">
+            <a:pPr marL="0" indent="0">
               <a:buNone/>
             </a:pPr>
             <a:r>
@@ -3993,9 +3833,6 @@
               </a:rPr>
               <a:t>Grenzen: </a:t>
             </a:r>
-            <a:pPr indent="0" marL="0">
-              <a:buNone/>
-            </a:pPr>
             <a:r>
               <a:rPr lang="en-US" sz="1600" dirty="0">
                 <a:solidFill>
@@ -4013,7 +3850,7 @@
       </p:sp>
       <p:sp>
         <p:nvSpPr>
-          <p:cNvPr id="25" name="Slide Number Placeholder 0"/>
+          <p:cNvPr id="31" name="Slide Number Placeholder 0"/>
           <p:cNvSpPr>
             <a:spLocks noGrp="1"/>
           </p:cNvSpPr>
@@ -4031,7 +3868,7 @@
           </a:prstGeom>
           <a:extLst>
             <a:ext uri="{C572A759-6A51-4108-AA02-DFA0A04FC94B}">
-              <ma14:wrappingTextBoxFlag xmlns:ma14="http://schemas.microsoft.com/office/mac/drawingml/2011/main" val="0"/>
+              <ma14:wrappingTextBoxFlag xmlns:ma14="http://schemas.microsoft.com/office/mac/drawingml/2011/main" xmlns="" val="0"/>
             </a:ext>
           </a:extLst>
         </p:spPr>
@@ -4052,7 +3889,7 @@
           <a:p>
             <a:pPr algn="r"/>
             <a:fld id="{F7021451-1387-4CA6-816F-3879F97B5CBC}" type="slidenum">
-              <a:rPr b="0" lang="en-US"/>
+              <a:rPr lang="en-US" b="0"/>
               <a:t>10</a:t>
             </a:fld>
             <a:endParaRPr lang="en-US"/>
@@ -4105,11 +3942,11 @@
           <a:bodyPr wrap="square" lIns="0" tIns="0" rIns="0" bIns="0" rtlCol="0" anchor="ctr"/>
           <a:lstStyle/>
           <a:p>
-            <a:pPr indent="0" marL="0">
+            <a:pPr marL="0" indent="0">
               <a:buNone/>
             </a:pPr>
             <a:r>
-              <a:rPr lang="en-US" sz="1200" b="1" spc="200" kern="0" dirty="0">
+              <a:rPr lang="en-US" sz="1200" b="1" kern="0" spc="200" dirty="0">
                 <a:solidFill>
                   <a:schemeClr val="accent1"/>
                 </a:solidFill>
@@ -4148,7 +3985,7 @@
           <a:bodyPr wrap="square" lIns="0" tIns="0" rIns="0" bIns="0" rtlCol="0" anchor="ctr"/>
           <a:lstStyle/>
           <a:p>
-            <a:pPr algn="ctr" indent="0" marL="0">
+            <a:pPr marL="0" indent="0" algn="ctr">
               <a:buNone/>
             </a:pPr>
             <a:r>
@@ -4187,7 +4024,7 @@
           <a:bodyPr wrap="square" lIns="0" tIns="0" rIns="0" bIns="0" rtlCol="0" anchor="ctr"/>
           <a:lstStyle/>
           <a:p>
-            <a:pPr algn="r" indent="0" marL="0">
+            <a:pPr marL="0" indent="0" algn="r">
               <a:buNone/>
             </a:pPr>
             <a:r>
@@ -4208,9 +4045,11 @@
       <p:sp>
         <p:nvSpPr>
           <p:cNvPr id="5" name="Text 0"/>
-          <p:cNvSpPr/>
+          <p:cNvSpPr>
+            <a:spLocks noGrp="1"/>
+          </p:cNvSpPr>
           <p:nvPr>
-            <p:ph idx="100" type="title" hasCustomPrompt="1"/>
+            <p:ph type="title" idx="100" hasCustomPrompt="1"/>
           </p:nvPr>
         </p:nvSpPr>
         <p:spPr>
@@ -4228,7 +4067,7 @@
           <a:bodyPr wrap="square" lIns="0" tIns="0" rIns="0" bIns="0" rtlCol="0" anchor="t"/>
           <a:lstStyle/>
           <a:p>
-            <a:pPr algn="l" indent="0" marL="0">
+            <a:pPr marL="0" indent="0" algn="l">
               <a:buNone/>
             </a:pPr>
             <a:r>
@@ -4272,17 +4111,24 @@
             <a:prstDash val="dash"/>
           </a:ln>
         </p:spPr>
+        <p:txBody>
+          <a:bodyPr/>
+          <a:lstStyle/>
+          <a:p>
+            <a:endParaRPr lang="de-DE"/>
+          </a:p>
+        </p:txBody>
       </p:sp>
       <p:pic>
         <p:nvPicPr>
-          <p:cNvPr id="7" name="Image 0" descr="Diagramm">    </p:cNvPr>
+          <p:cNvPr id="7" name="Image 0" descr="Diagramm"/>
           <p:cNvPicPr>
             <a:picLocks noChangeAspect="1"/>
           </p:cNvPicPr>
           <p:nvPr/>
         </p:nvPicPr>
         <p:blipFill>
-          <a:blip r:embed="rId1"/>
+          <a:blip r:embed="rId3"/>
           <a:stretch>
             <a:fillRect/>
           </a:stretch>
@@ -4318,7 +4164,7 @@
           <a:bodyPr wrap="square" lIns="0" tIns="0" rIns="0" bIns="0" rtlCol="0" anchor="t"/>
           <a:lstStyle/>
           <a:p>
-            <a:pPr algn="ctr" indent="0" marL="0">
+            <a:pPr marL="0" indent="0" algn="ctr">
               <a:buNone/>
             </a:pPr>
             <a:r>
@@ -4357,7 +4203,7 @@
           <a:bodyPr wrap="square" lIns="0" tIns="0" rIns="0" bIns="0" rtlCol="0" anchor="t"/>
           <a:lstStyle/>
           <a:p>
-            <a:pPr algn="ctr" indent="0" marL="0">
+            <a:pPr marL="0" indent="0" algn="ctr">
               <a:buNone/>
             </a:pPr>
             <a:r>
@@ -4399,17 +4245,24 @@
             <a:prstDash val="solid"/>
           </a:ln>
         </p:spPr>
+        <p:txBody>
+          <a:bodyPr/>
+          <a:lstStyle/>
+          <a:p>
+            <a:endParaRPr lang="de-DE"/>
+          </a:p>
+        </p:txBody>
       </p:sp>
       <p:pic>
         <p:nvPicPr>
-          <p:cNvPr id="11" name="Image 1" descr="FaClock">    </p:cNvPr>
+          <p:cNvPr id="11" name="Image 1" descr="FaClock"/>
           <p:cNvPicPr>
             <a:picLocks noChangeAspect="1"/>
           </p:cNvPicPr>
           <p:nvPr/>
         </p:nvPicPr>
         <p:blipFill>
-          <a:blip r:embed="rId2"/>
+          <a:blip r:embed="rId4"/>
           <a:stretch>
             <a:fillRect/>
           </a:stretch>
@@ -4445,7 +4298,7 @@
           <a:bodyPr wrap="square" lIns="0" tIns="0" rIns="0" bIns="0" rtlCol="0" anchor="ctr"/>
           <a:lstStyle/>
           <a:p>
-            <a:pPr indent="0" marL="0">
+            <a:pPr marL="0" indent="0">
               <a:buNone/>
             </a:pPr>
             <a:r>
@@ -4487,17 +4340,24 @@
             <a:prstDash val="solid"/>
           </a:ln>
         </p:spPr>
+        <p:txBody>
+          <a:bodyPr/>
+          <a:lstStyle/>
+          <a:p>
+            <a:endParaRPr lang="de-DE"/>
+          </a:p>
+        </p:txBody>
       </p:sp>
       <p:pic>
         <p:nvPicPr>
-          <p:cNvPr id="14" name="Image 2" descr="FaWaveSquare">    </p:cNvPr>
+          <p:cNvPr id="14" name="Image 2" descr="FaWaveSquare"/>
           <p:cNvPicPr>
             <a:picLocks noChangeAspect="1"/>
           </p:cNvPicPr>
           <p:nvPr/>
         </p:nvPicPr>
         <p:blipFill>
-          <a:blip r:embed="rId3"/>
+          <a:blip r:embed="rId5"/>
           <a:stretch>
             <a:fillRect/>
           </a:stretch>
@@ -4533,7 +4393,7 @@
           <a:bodyPr wrap="square" lIns="0" tIns="0" rIns="0" bIns="0" rtlCol="0" anchor="ctr"/>
           <a:lstStyle/>
           <a:p>
-            <a:pPr indent="0" marL="0">
+            <a:pPr marL="0" indent="0">
               <a:buNone/>
             </a:pPr>
             <a:r>
@@ -4575,17 +4435,24 @@
             <a:prstDash val="solid"/>
           </a:ln>
         </p:spPr>
+        <p:txBody>
+          <a:bodyPr/>
+          <a:lstStyle/>
+          <a:p>
+            <a:endParaRPr lang="de-DE"/>
+          </a:p>
+        </p:txBody>
       </p:sp>
       <p:pic>
         <p:nvPicPr>
-          <p:cNvPr id="17" name="Image 3" descr="FaBook">    </p:cNvPr>
+          <p:cNvPr id="17" name="Image 3" descr="FaBook"/>
           <p:cNvPicPr>
             <a:picLocks noChangeAspect="1"/>
           </p:cNvPicPr>
           <p:nvPr/>
         </p:nvPicPr>
         <p:blipFill>
-          <a:blip r:embed="rId4"/>
+          <a:blip r:embed="rId6"/>
           <a:stretch>
             <a:fillRect/>
           </a:stretch>
@@ -4621,7 +4488,7 @@
           <a:bodyPr wrap="square" lIns="0" tIns="0" rIns="0" bIns="0" rtlCol="0" anchor="ctr"/>
           <a:lstStyle/>
           <a:p>
-            <a:pPr indent="0" marL="0">
+            <a:pPr marL="0" indent="0">
               <a:buNone/>
             </a:pPr>
             <a:r>
@@ -4663,17 +4530,24 @@
             <a:prstDash val="solid"/>
           </a:ln>
         </p:spPr>
+        <p:txBody>
+          <a:bodyPr/>
+          <a:lstStyle/>
+          <a:p>
+            <a:endParaRPr lang="de-DE"/>
+          </a:p>
+        </p:txBody>
       </p:sp>
       <p:pic>
         <p:nvPicPr>
-          <p:cNvPr id="20" name="Image 4" descr="FaGlobe">    </p:cNvPr>
+          <p:cNvPr id="20" name="Image 4" descr="FaGlobe"/>
           <p:cNvPicPr>
             <a:picLocks noChangeAspect="1"/>
           </p:cNvPicPr>
           <p:nvPr/>
         </p:nvPicPr>
         <p:blipFill>
-          <a:blip r:embed="rId5"/>
+          <a:blip r:embed="rId7"/>
           <a:stretch>
             <a:fillRect/>
           </a:stretch>
@@ -4709,7 +4583,7 @@
           <a:bodyPr wrap="square" lIns="0" tIns="0" rIns="0" bIns="0" rtlCol="0" anchor="ctr"/>
           <a:lstStyle/>
           <a:p>
-            <a:pPr indent="0" marL="0">
+            <a:pPr marL="0" indent="0">
               <a:buNone/>
             </a:pPr>
             <a:r>
@@ -4747,7 +4621,7 @@
           </a:prstGeom>
           <a:extLst>
             <a:ext uri="{C572A759-6A51-4108-AA02-DFA0A04FC94B}">
-              <ma14:wrappingTextBoxFlag xmlns:ma14="http://schemas.microsoft.com/office/mac/drawingml/2011/main" val="0"/>
+              <ma14:wrappingTextBoxFlag xmlns:ma14="http://schemas.microsoft.com/office/mac/drawingml/2011/main" xmlns="" val="0"/>
             </a:ext>
           </a:extLst>
         </p:spPr>
@@ -4768,13 +4642,43 @@
           <a:p>
             <a:pPr algn="r"/>
             <a:fld id="{F7021451-1387-4CA6-816F-3879F97B5CBC}" type="slidenum">
-              <a:rPr b="0" lang="en-US"/>
+              <a:rPr lang="en-US" b="0"/>
               <a:t>11</a:t>
             </a:fld>
             <a:endParaRPr lang="en-US"/>
           </a:p>
         </p:txBody>
       </p:sp>
+      <p:pic>
+        <p:nvPicPr>
+          <p:cNvPr id="23" name="Grafik 22">
+            <a:extLst>
+              <a:ext uri="{FF2B5EF4-FFF2-40B4-BE49-F238E27FC236}">
+                <a16:creationId xmlns:a16="http://schemas.microsoft.com/office/drawing/2014/main" id="{E69BF621-445A-D77F-15E2-6B5830110610}"/>
+              </a:ext>
+            </a:extLst>
+          </p:cNvPr>
+          <p:cNvPicPr>
+            <a:picLocks noChangeAspect="1"/>
+          </p:cNvPicPr>
+          <p:nvPr/>
+        </p:nvPicPr>
+        <p:blipFill>
+          <a:blip r:embed="rId8"/>
+          <a:stretch>
+            <a:fillRect/>
+          </a:stretch>
+        </p:blipFill>
+        <p:spPr>
+          <a:xfrm>
+            <a:off x="640080" y="1783080"/>
+            <a:ext cx="6766559" cy="4233337"/>
+          </a:xfrm>
+          <a:prstGeom prst="rect">
+            <a:avLst/>
+          </a:prstGeom>
+        </p:spPr>
+      </p:pic>
     </p:spTree>
   </p:cSld>
   <p:clrMapOvr>
@@ -4821,11 +4725,11 @@
           <a:bodyPr wrap="square" lIns="0" tIns="0" rIns="0" bIns="0" rtlCol="0" anchor="ctr"/>
           <a:lstStyle/>
           <a:p>
-            <a:pPr indent="0" marL="0">
+            <a:pPr marL="0" indent="0">
               <a:buNone/>
             </a:pPr>
             <a:r>
-              <a:rPr lang="en-US" sz="1200" b="1" spc="200" kern="0" dirty="0">
+              <a:rPr lang="en-US" sz="1200" b="1" kern="0" spc="200" dirty="0">
                 <a:solidFill>
                   <a:schemeClr val="accent1"/>
                 </a:solidFill>
@@ -4864,7 +4768,7 @@
           <a:bodyPr wrap="square" lIns="0" tIns="0" rIns="0" bIns="0" rtlCol="0" anchor="ctr"/>
           <a:lstStyle/>
           <a:p>
-            <a:pPr algn="ctr" indent="0" marL="0">
+            <a:pPr marL="0" indent="0" algn="ctr">
               <a:buNone/>
             </a:pPr>
             <a:r>
@@ -4903,7 +4807,7 @@
           <a:bodyPr wrap="square" lIns="0" tIns="0" rIns="0" bIns="0" rtlCol="0" anchor="ctr"/>
           <a:lstStyle/>
           <a:p>
-            <a:pPr algn="r" indent="0" marL="0">
+            <a:pPr marL="0" indent="0" algn="r">
               <a:buNone/>
             </a:pPr>
             <a:r>
@@ -4924,9 +4828,11 @@
       <p:sp>
         <p:nvSpPr>
           <p:cNvPr id="5" name="Text 0"/>
-          <p:cNvSpPr/>
+          <p:cNvSpPr>
+            <a:spLocks noGrp="1"/>
+          </p:cNvSpPr>
           <p:nvPr>
-            <p:ph idx="100" type="title" hasCustomPrompt="1"/>
+            <p:ph type="title" idx="100" hasCustomPrompt="1"/>
           </p:nvPr>
         </p:nvSpPr>
         <p:spPr>
@@ -4944,7 +4850,7 @@
           <a:bodyPr wrap="square" lIns="0" tIns="0" rIns="0" bIns="0" rtlCol="0" anchor="t"/>
           <a:lstStyle/>
           <a:p>
-            <a:pPr algn="l" indent="0" marL="0">
+            <a:pPr marL="0" indent="0" algn="l">
               <a:buNone/>
             </a:pPr>
             <a:r>
@@ -4988,6 +4894,13 @@
             <a:prstDash val="solid"/>
           </a:ln>
         </p:spPr>
+        <p:txBody>
+          <a:bodyPr/>
+          <a:lstStyle/>
+          <a:p>
+            <a:endParaRPr lang="de-DE"/>
+          </a:p>
+        </p:txBody>
       </p:sp>
       <p:sp>
         <p:nvSpPr>
@@ -5014,7 +4927,7 @@
           <a:bodyPr wrap="square" lIns="0" tIns="0" rIns="0" bIns="0" rtlCol="0" anchor="ctr"/>
           <a:lstStyle/>
           <a:p>
-            <a:pPr algn="ctr" indent="0" marL="0">
+            <a:pPr marL="0" indent="0" algn="ctr">
               <a:buNone/>
             </a:pPr>
             <a:r>
@@ -5053,7 +4966,7 @@
           <a:bodyPr wrap="square" lIns="0" tIns="0" rIns="0" bIns="0" rtlCol="0" anchor="t"/>
           <a:lstStyle/>
           <a:p>
-            <a:pPr indent="0" marL="0">
+            <a:pPr marL="0" indent="0">
               <a:buNone/>
             </a:pPr>
             <a:r>
@@ -5092,7 +5005,7 @@
           <a:bodyPr wrap="square" lIns="0" tIns="0" rIns="0" bIns="0" rtlCol="0" anchor="t"/>
           <a:lstStyle/>
           <a:p>
-            <a:pPr indent="0" marL="0">
+            <a:pPr marL="0" indent="0">
               <a:buNone/>
             </a:pPr>
             <a:r>
@@ -5136,6 +5049,13 @@
             <a:prstDash val="solid"/>
           </a:ln>
         </p:spPr>
+        <p:txBody>
+          <a:bodyPr/>
+          <a:lstStyle/>
+          <a:p>
+            <a:endParaRPr lang="de-DE"/>
+          </a:p>
+        </p:txBody>
       </p:sp>
       <p:sp>
         <p:nvSpPr>
@@ -5162,7 +5082,7 @@
           <a:bodyPr wrap="square" lIns="0" tIns="0" rIns="0" bIns="0" rtlCol="0" anchor="ctr"/>
           <a:lstStyle/>
           <a:p>
-            <a:pPr algn="ctr" indent="0" marL="0">
+            <a:pPr marL="0" indent="0" algn="ctr">
               <a:buNone/>
             </a:pPr>
             <a:r>
@@ -5201,7 +5121,7 @@
           <a:bodyPr wrap="square" lIns="0" tIns="0" rIns="0" bIns="0" rtlCol="0" anchor="t"/>
           <a:lstStyle/>
           <a:p>
-            <a:pPr indent="0" marL="0">
+            <a:pPr marL="0" indent="0">
               <a:buNone/>
             </a:pPr>
             <a:r>
@@ -5240,7 +5160,7 @@
           <a:bodyPr wrap="square" lIns="0" tIns="0" rIns="0" bIns="0" rtlCol="0" anchor="t"/>
           <a:lstStyle/>
           <a:p>
-            <a:pPr indent="0" marL="0">
+            <a:pPr marL="0" indent="0">
               <a:buNone/>
             </a:pPr>
             <a:r>
@@ -5284,6 +5204,13 @@
             <a:prstDash val="solid"/>
           </a:ln>
         </p:spPr>
+        <p:txBody>
+          <a:bodyPr/>
+          <a:lstStyle/>
+          <a:p>
+            <a:endParaRPr lang="de-DE"/>
+          </a:p>
+        </p:txBody>
       </p:sp>
       <p:sp>
         <p:nvSpPr>
@@ -5310,7 +5237,7 @@
           <a:bodyPr wrap="square" lIns="0" tIns="0" rIns="0" bIns="0" rtlCol="0" anchor="ctr"/>
           <a:lstStyle/>
           <a:p>
-            <a:pPr algn="ctr" indent="0" marL="0">
+            <a:pPr marL="0" indent="0" algn="ctr">
               <a:buNone/>
             </a:pPr>
             <a:r>
@@ -5349,7 +5276,7 @@
           <a:bodyPr wrap="square" lIns="0" tIns="0" rIns="0" bIns="0" rtlCol="0" anchor="t"/>
           <a:lstStyle/>
           <a:p>
-            <a:pPr indent="0" marL="0">
+            <a:pPr marL="0" indent="0">
               <a:buNone/>
             </a:pPr>
             <a:r>
@@ -5388,7 +5315,7 @@
           <a:bodyPr wrap="square" lIns="0" tIns="0" rIns="0" bIns="0" rtlCol="0" anchor="t"/>
           <a:lstStyle/>
           <a:p>
-            <a:pPr indent="0" marL="0">
+            <a:pPr marL="0" indent="0">
               <a:buNone/>
             </a:pPr>
             <a:r>
@@ -5432,6 +5359,13 @@
             <a:prstDash val="solid"/>
           </a:ln>
         </p:spPr>
+        <p:txBody>
+          <a:bodyPr/>
+          <a:lstStyle/>
+          <a:p>
+            <a:endParaRPr lang="de-DE"/>
+          </a:p>
+        </p:txBody>
       </p:sp>
       <p:sp>
         <p:nvSpPr>
@@ -5458,7 +5392,7 @@
           <a:bodyPr wrap="square" lIns="0" tIns="0" rIns="0" bIns="0" rtlCol="0" anchor="ctr"/>
           <a:lstStyle/>
           <a:p>
-            <a:pPr algn="ctr" indent="0" marL="0">
+            <a:pPr marL="0" indent="0" algn="ctr">
               <a:buNone/>
             </a:pPr>
             <a:r>
@@ -5497,7 +5431,7 @@
           <a:bodyPr wrap="square" lIns="0" tIns="0" rIns="0" bIns="0" rtlCol="0" anchor="t"/>
           <a:lstStyle/>
           <a:p>
-            <a:pPr indent="0" marL="0">
+            <a:pPr marL="0" indent="0">
               <a:buNone/>
             </a:pPr>
             <a:r>
@@ -5536,7 +5470,7 @@
           <a:bodyPr wrap="square" lIns="0" tIns="0" rIns="0" bIns="0" rtlCol="0" anchor="t"/>
           <a:lstStyle/>
           <a:p>
-            <a:pPr indent="0" marL="0">
+            <a:pPr marL="0" indent="0">
               <a:buNone/>
             </a:pPr>
             <a:r>
@@ -5574,7 +5508,7 @@
           </a:prstGeom>
           <a:extLst>
             <a:ext uri="{C572A759-6A51-4108-AA02-DFA0A04FC94B}">
-              <ma14:wrappingTextBoxFlag xmlns:ma14="http://schemas.microsoft.com/office/mac/drawingml/2011/main" val="0"/>
+              <ma14:wrappingTextBoxFlag xmlns:ma14="http://schemas.microsoft.com/office/mac/drawingml/2011/main" xmlns="" val="0"/>
             </a:ext>
           </a:extLst>
         </p:spPr>
@@ -5595,7 +5529,7 @@
           <a:p>
             <a:pPr algn="r"/>
             <a:fld id="{F7021451-1387-4CA6-816F-3879F97B5CBC}" type="slidenum">
-              <a:rPr b="0" lang="en-US"/>
+              <a:rPr lang="en-US" b="0"/>
               <a:t>12</a:t>
             </a:fld>
             <a:endParaRPr lang="en-US"/>
@@ -5648,11 +5582,11 @@
           <a:bodyPr wrap="square" lIns="0" tIns="0" rIns="0" bIns="0" rtlCol="0" anchor="ctr"/>
           <a:lstStyle/>
           <a:p>
-            <a:pPr indent="0" marL="0">
+            <a:pPr marL="0" indent="0">
               <a:buNone/>
             </a:pPr>
             <a:r>
-              <a:rPr lang="en-US" sz="1200" b="1" spc="200" kern="0" dirty="0">
+              <a:rPr lang="en-US" sz="1200" b="1" kern="0" spc="200" dirty="0">
                 <a:solidFill>
                   <a:schemeClr val="accent2"/>
                 </a:solidFill>
@@ -5669,9 +5603,11 @@
       <p:sp>
         <p:nvSpPr>
           <p:cNvPr id="3" name="Text 0"/>
-          <p:cNvSpPr/>
+          <p:cNvSpPr>
+            <a:spLocks noGrp="1"/>
+          </p:cNvSpPr>
           <p:nvPr>
-            <p:ph idx="100" type="title" hasCustomPrompt="1"/>
+            <p:ph type="title" idx="100" hasCustomPrompt="1"/>
           </p:nvPr>
         </p:nvSpPr>
         <p:spPr>
@@ -5689,7 +5625,7 @@
           <a:bodyPr wrap="square" lIns="0" tIns="0" rIns="0" bIns="0" rtlCol="0" anchor="t"/>
           <a:lstStyle/>
           <a:p>
-            <a:pPr algn="l" indent="0" marL="0">
+            <a:pPr marL="0" indent="0" algn="l">
               <a:buNone/>
             </a:pPr>
             <a:r>
@@ -5733,17 +5669,24 @@
             <a:prstDash val="solid"/>
           </a:ln>
         </p:spPr>
+        <p:txBody>
+          <a:bodyPr/>
+          <a:lstStyle/>
+          <a:p>
+            <a:endParaRPr lang="de-DE"/>
+          </a:p>
+        </p:txBody>
       </p:sp>
       <p:pic>
         <p:nvPicPr>
-          <p:cNvPr id="5" name="Image 0" descr="Nachweis">    </p:cNvPr>
+          <p:cNvPr id="5" name="Image 0" descr="Nachweis"/>
           <p:cNvPicPr>
             <a:picLocks noChangeAspect="1"/>
           </p:cNvPicPr>
           <p:nvPr/>
         </p:nvPicPr>
         <p:blipFill>
-          <a:blip r:embed="rId1"/>
+          <a:blip r:embed="rId3"/>
           <a:stretch>
             <a:fillRect/>
           </a:stretch>
@@ -5779,7 +5722,7 @@
           <a:bodyPr wrap="square" lIns="0" tIns="0" rIns="0" bIns="0" rtlCol="0" anchor="t"/>
           <a:lstStyle/>
           <a:p>
-            <a:pPr indent="0" marL="0">
+            <a:pPr marL="0" indent="0">
               <a:buNone/>
             </a:pPr>
             <a:r>
@@ -5818,7 +5761,7 @@
           <a:bodyPr wrap="square" lIns="0" tIns="0" rIns="0" bIns="0" rtlCol="0" anchor="t"/>
           <a:lstStyle/>
           <a:p>
-            <a:pPr indent="0" marL="0">
+            <a:pPr marL="0" indent="0">
               <a:buNone/>
             </a:pPr>
             <a:r>
@@ -5862,17 +5805,24 @@
             <a:prstDash val="solid"/>
           </a:ln>
         </p:spPr>
+        <p:txBody>
+          <a:bodyPr/>
+          <a:lstStyle/>
+          <a:p>
+            <a:endParaRPr lang="de-DE"/>
+          </a:p>
+        </p:txBody>
       </p:sp>
       <p:pic>
         <p:nvPicPr>
-          <p:cNvPr id="9" name="Image 1" descr="Ausfallsicher">    </p:cNvPr>
+          <p:cNvPr id="9" name="Image 1" descr="Ausfallsicher"/>
           <p:cNvPicPr>
             <a:picLocks noChangeAspect="1"/>
           </p:cNvPicPr>
           <p:nvPr/>
         </p:nvPicPr>
         <p:blipFill>
-          <a:blip r:embed="rId2"/>
+          <a:blip r:embed="rId4"/>
           <a:stretch>
             <a:fillRect/>
           </a:stretch>
@@ -5908,7 +5858,7 @@
           <a:bodyPr wrap="square" lIns="0" tIns="0" rIns="0" bIns="0" rtlCol="0" anchor="t"/>
           <a:lstStyle/>
           <a:p>
-            <a:pPr indent="0" marL="0">
+            <a:pPr marL="0" indent="0">
               <a:buNone/>
             </a:pPr>
             <a:r>
@@ -5947,7 +5897,7 @@
           <a:bodyPr wrap="square" lIns="0" tIns="0" rIns="0" bIns="0" rtlCol="0" anchor="t"/>
           <a:lstStyle/>
           <a:p>
-            <a:pPr indent="0" marL="0">
+            <a:pPr marL="0" indent="0">
               <a:buNone/>
             </a:pPr>
             <a:r>
@@ -5991,17 +5941,24 @@
             <a:prstDash val="solid"/>
           </a:ln>
         </p:spPr>
+        <p:txBody>
+          <a:bodyPr/>
+          <a:lstStyle/>
+          <a:p>
+            <a:endParaRPr lang="de-DE"/>
+          </a:p>
+        </p:txBody>
       </p:sp>
       <p:pic>
         <p:nvPicPr>
-          <p:cNvPr id="13" name="Image 2" descr="Ausblick">    </p:cNvPr>
+          <p:cNvPr id="13" name="Image 2" descr="Ausblick"/>
           <p:cNvPicPr>
             <a:picLocks noChangeAspect="1"/>
           </p:cNvPicPr>
           <p:nvPr/>
         </p:nvPicPr>
         <p:blipFill>
-          <a:blip r:embed="rId3"/>
+          <a:blip r:embed="rId5"/>
           <a:stretch>
             <a:fillRect/>
           </a:stretch>
@@ -6037,7 +5994,7 @@
           <a:bodyPr wrap="square" lIns="0" tIns="0" rIns="0" bIns="0" rtlCol="0" anchor="t"/>
           <a:lstStyle/>
           <a:p>
-            <a:pPr indent="0" marL="0">
+            <a:pPr marL="0" indent="0">
               <a:buNone/>
             </a:pPr>
             <a:r>
@@ -6076,7 +6033,7 @@
           <a:bodyPr wrap="square" lIns="0" tIns="0" rIns="0" bIns="0" rtlCol="0" anchor="t"/>
           <a:lstStyle/>
           <a:p>
-            <a:pPr indent="0" marL="0">
+            <a:pPr marL="0" indent="0">
               <a:buNone/>
             </a:pPr>
             <a:r>
@@ -6096,14 +6053,14 @@
       </p:sp>
       <p:sp>
         <p:nvSpPr>
-          <p:cNvPr id="16" name="Text 11"/>
+          <p:cNvPr id="17" name="Text 12"/>
           <p:cNvSpPr txBox="1"/>
           <p:nvPr/>
         </p:nvSpPr>
         <p:spPr>
           <a:xfrm>
-            <a:off x="640080" y="4709160"/>
-            <a:ext cx="10908792" cy="548640"/>
+            <a:off x="640080" y="5440680"/>
+            <a:ext cx="7315200" cy="731520"/>
           </a:xfrm>
           <a:prstGeom prst="rect">
             <a:avLst/>
@@ -6115,60 +6072,7 @@
           <a:bodyPr wrap="square" lIns="0" tIns="0" rIns="0" bIns="0" rtlCol="0" anchor="t"/>
           <a:lstStyle/>
           <a:p>
-            <a:pPr indent="0" marL="0">
-              <a:buNone/>
-            </a:pPr>
-            <a:r>
-              <a:rPr lang="en-US" sz="1800" b="1" dirty="0">
-                <a:solidFill>
-                  <a:srgbClr val="FFFFFF"/>
-                </a:solidFill>
-                <a:latin typeface="Calibri" pitchFamily="34" charset="0"/>
-                <a:ea typeface="Calibri" pitchFamily="34" charset="-122"/>
-                <a:cs typeface="Calibri" pitchFamily="34" charset="-120"/>
-              </a:rPr>
-              <a:t>Gelernt: </a:t>
-            </a:r>
-            <a:pPr indent="0" marL="0">
-              <a:buNone/>
-            </a:pPr>
-            <a:r>
-              <a:rPr lang="en-US" sz="1800" dirty="0">
-                <a:solidFill>
-                  <a:srgbClr val="FFFFFF"/>
-                </a:solidFill>
-                <a:latin typeface="Calibri" pitchFamily="34" charset="0"/>
-                <a:ea typeface="Calibri" pitchFamily="34" charset="-122"/>
-                <a:cs typeface="Calibri" pitchFamily="34" charset="-120"/>
-              </a:rPr>
-              <a:t>Die Bridge trennt Logik und Sender: ThingSpeak jetzt, Azure für die Flotte.</a:t>
-            </a:r>
-            <a:endParaRPr lang="en-US" sz="1800" dirty="0"/>
-          </a:p>
-        </p:txBody>
-      </p:sp>
-      <p:sp>
-        <p:nvSpPr>
-          <p:cNvPr id="17" name="Text 12"/>
-          <p:cNvSpPr txBox="1"/>
-          <p:nvPr/>
-        </p:nvSpPr>
-        <p:spPr>
-          <a:xfrm>
-            <a:off x="640080" y="5440680"/>
-            <a:ext cx="7315200" cy="731520"/>
-          </a:xfrm>
-          <a:prstGeom prst="rect">
-            <a:avLst/>
-          </a:prstGeom>
-          <a:noFill/>
-          <a:ln/>
-        </p:spPr>
-        <p:txBody>
-          <a:bodyPr wrap="square" lIns="0" tIns="0" rIns="0" bIns="0" rtlCol="0" anchor="t"/>
-          <a:lstStyle/>
-          <a:p>
-            <a:pPr indent="0" marL="0">
+            <a:pPr marL="0" indent="0">
               <a:buNone/>
             </a:pPr>
             <a:r>
@@ -6206,7 +6110,7 @@
           </a:prstGeom>
           <a:extLst>
             <a:ext uri="{C572A759-6A51-4108-AA02-DFA0A04FC94B}">
-              <ma14:wrappingTextBoxFlag xmlns:ma14="http://schemas.microsoft.com/office/mac/drawingml/2011/main" val="0"/>
+              <ma14:wrappingTextBoxFlag xmlns:ma14="http://schemas.microsoft.com/office/mac/drawingml/2011/main" xmlns="" val="0"/>
             </a:ext>
           </a:extLst>
         </p:spPr>
@@ -6227,7 +6131,7 @@
           <a:p>
             <a:pPr algn="r"/>
             <a:fld id="{F7021451-1387-4CA6-816F-3879F97B5CBC}" type="slidenum">
-              <a:rPr b="0" lang="en-US"/>
+              <a:rPr lang="en-US" b="0"/>
               <a:t>13</a:t>
             </a:fld>
             <a:endParaRPr lang="en-US"/>
@@ -6280,11 +6184,11 @@
           <a:bodyPr wrap="square" lIns="0" tIns="0" rIns="0" bIns="0" rtlCol="0" anchor="ctr"/>
           <a:lstStyle/>
           <a:p>
-            <a:pPr indent="0" marL="0">
+            <a:pPr marL="0" indent="0">
               <a:buNone/>
             </a:pPr>
             <a:r>
-              <a:rPr lang="en-US" sz="1200" b="1" spc="200" kern="0" dirty="0">
+              <a:rPr lang="en-US" sz="1200" b="1" kern="0" spc="200" dirty="0">
                 <a:solidFill>
                   <a:schemeClr val="accent1"/>
                 </a:solidFill>
@@ -6301,9 +6205,11 @@
       <p:sp>
         <p:nvSpPr>
           <p:cNvPr id="3" name="Text 0"/>
-          <p:cNvSpPr/>
+          <p:cNvSpPr>
+            <a:spLocks noGrp="1"/>
+          </p:cNvSpPr>
           <p:nvPr>
-            <p:ph idx="100" type="title" hasCustomPrompt="1"/>
+            <p:ph type="title" idx="100" hasCustomPrompt="1"/>
           </p:nvPr>
         </p:nvSpPr>
         <p:spPr>
@@ -6321,7 +6227,7 @@
           <a:bodyPr wrap="square" lIns="0" tIns="0" rIns="0" bIns="0" rtlCol="0" anchor="t"/>
           <a:lstStyle/>
           <a:p>
-            <a:pPr algn="l" indent="0" marL="0">
+            <a:pPr marL="0" indent="0" algn="l">
               <a:buNone/>
             </a:pPr>
             <a:r>
@@ -6365,6 +6271,13 @@
             <a:prstDash val="solid"/>
           </a:ln>
         </p:spPr>
+        <p:txBody>
+          <a:bodyPr/>
+          <a:lstStyle/>
+          <a:p>
+            <a:endParaRPr lang="de-DE"/>
+          </a:p>
+        </p:txBody>
       </p:sp>
       <p:sp>
         <p:nvSpPr>
@@ -6390,17 +6303,24 @@
             <a:prstDash val="solid"/>
           </a:ln>
         </p:spPr>
+        <p:txBody>
+          <a:bodyPr/>
+          <a:lstStyle/>
+          <a:p>
+            <a:endParaRPr lang="de-DE"/>
+          </a:p>
+        </p:txBody>
       </p:sp>
       <p:pic>
         <p:nvPicPr>
-          <p:cNvPr id="6" name="Image 0" descr="FaDatabase">    </p:cNvPr>
+          <p:cNvPr id="6" name="Image 0" descr="FaDatabase"/>
           <p:cNvPicPr>
             <a:picLocks noChangeAspect="1"/>
           </p:cNvPicPr>
           <p:nvPr/>
         </p:nvPicPr>
         <p:blipFill>
-          <a:blip r:embed="rId1"/>
+          <a:blip r:embed="rId3"/>
           <a:stretch>
             <a:fillRect/>
           </a:stretch>
@@ -6436,7 +6356,7 @@
           <a:bodyPr wrap="square" lIns="0" tIns="0" rIns="0" bIns="0" rtlCol="0" anchor="t"/>
           <a:lstStyle/>
           <a:p>
-            <a:pPr indent="0" marL="0">
+            <a:pPr marL="0" indent="0">
               <a:buNone/>
             </a:pPr>
             <a:r>
@@ -6475,7 +6395,7 @@
           <a:bodyPr wrap="square" lIns="0" tIns="0" rIns="0" bIns="0" rtlCol="0" anchor="t"/>
           <a:lstStyle/>
           <a:p>
-            <a:pPr indent="0" marL="0">
+            <a:pPr marL="0" indent="0">
               <a:buNone/>
             </a:pPr>
             <a:r>
@@ -6519,6 +6439,13 @@
             <a:prstDash val="solid"/>
           </a:ln>
         </p:spPr>
+        <p:txBody>
+          <a:bodyPr/>
+          <a:lstStyle/>
+          <a:p>
+            <a:endParaRPr lang="de-DE"/>
+          </a:p>
+        </p:txBody>
       </p:sp>
       <p:sp>
         <p:nvSpPr>
@@ -6544,17 +6471,24 @@
             <a:prstDash val="solid"/>
           </a:ln>
         </p:spPr>
+        <p:txBody>
+          <a:bodyPr/>
+          <a:lstStyle/>
+          <a:p>
+            <a:endParaRPr lang="de-DE"/>
+          </a:p>
+        </p:txBody>
       </p:sp>
       <p:pic>
         <p:nvPicPr>
-          <p:cNvPr id="11" name="Image 1" descr="FaBook">    </p:cNvPr>
+          <p:cNvPr id="11" name="Image 1" descr="FaBook"/>
           <p:cNvPicPr>
             <a:picLocks noChangeAspect="1"/>
           </p:cNvPicPr>
           <p:nvPr/>
         </p:nvPicPr>
         <p:blipFill>
-          <a:blip r:embed="rId2"/>
+          <a:blip r:embed="rId4"/>
           <a:stretch>
             <a:fillRect/>
           </a:stretch>
@@ -6590,7 +6524,7 @@
           <a:bodyPr wrap="square" lIns="0" tIns="0" rIns="0" bIns="0" rtlCol="0" anchor="t"/>
           <a:lstStyle/>
           <a:p>
-            <a:pPr indent="0" marL="0">
+            <a:pPr marL="0" indent="0">
               <a:buNone/>
             </a:pPr>
             <a:r>
@@ -6629,7 +6563,7 @@
           <a:bodyPr wrap="square" lIns="0" tIns="0" rIns="0" bIns="0" rtlCol="0" anchor="t"/>
           <a:lstStyle/>
           <a:p>
-            <a:pPr indent="0" marL="0">
+            <a:pPr marL="0" indent="0">
               <a:buNone/>
             </a:pPr>
             <a:r>
@@ -6673,6 +6607,13 @@
             <a:prstDash val="solid"/>
           </a:ln>
         </p:spPr>
+        <p:txBody>
+          <a:bodyPr/>
+          <a:lstStyle/>
+          <a:p>
+            <a:endParaRPr lang="de-DE"/>
+          </a:p>
+        </p:txBody>
       </p:sp>
       <p:sp>
         <p:nvSpPr>
@@ -6698,17 +6639,24 @@
             <a:prstDash val="solid"/>
           </a:ln>
         </p:spPr>
+        <p:txBody>
+          <a:bodyPr/>
+          <a:lstStyle/>
+          <a:p>
+            <a:endParaRPr lang="de-DE"/>
+          </a:p>
+        </p:txBody>
       </p:sp>
       <p:pic>
         <p:nvPicPr>
-          <p:cNvPr id="16" name="Image 2" descr="FaExclamationTriangle">    </p:cNvPr>
+          <p:cNvPr id="16" name="Image 2" descr="FaExclamationTriangle"/>
           <p:cNvPicPr>
             <a:picLocks noChangeAspect="1"/>
           </p:cNvPicPr>
           <p:nvPr/>
         </p:nvPicPr>
         <p:blipFill>
-          <a:blip r:embed="rId3"/>
+          <a:blip r:embed="rId5"/>
           <a:stretch>
             <a:fillRect/>
           </a:stretch>
@@ -6744,7 +6692,7 @@
           <a:bodyPr wrap="square" lIns="0" tIns="0" rIns="0" bIns="0" rtlCol="0" anchor="t"/>
           <a:lstStyle/>
           <a:p>
-            <a:pPr indent="0" marL="0">
+            <a:pPr marL="0" indent="0">
               <a:buNone/>
             </a:pPr>
             <a:r>
@@ -6783,7 +6731,7 @@
           <a:bodyPr wrap="square" lIns="0" tIns="0" rIns="0" bIns="0" rtlCol="0" anchor="t"/>
           <a:lstStyle/>
           <a:p>
-            <a:pPr indent="0" marL="0">
+            <a:pPr marL="0" indent="0">
               <a:buNone/>
             </a:pPr>
             <a:r>
@@ -6822,7 +6770,7 @@
           <a:bodyPr wrap="square" lIns="0" tIns="0" rIns="0" bIns="0" rtlCol="0" anchor="t"/>
           <a:lstStyle/>
           <a:p>
-            <a:pPr indent="0" marL="0">
+            <a:pPr marL="0" indent="0">
               <a:buNone/>
             </a:pPr>
             <a:r>
@@ -6860,7 +6808,7 @@
           </a:prstGeom>
           <a:extLst>
             <a:ext uri="{C572A759-6A51-4108-AA02-DFA0A04FC94B}">
-              <ma14:wrappingTextBoxFlag xmlns:ma14="http://schemas.microsoft.com/office/mac/drawingml/2011/main" val="0"/>
+              <ma14:wrappingTextBoxFlag xmlns:ma14="http://schemas.microsoft.com/office/mac/drawingml/2011/main" xmlns="" val="0"/>
             </a:ext>
           </a:extLst>
         </p:spPr>
@@ -6881,7 +6829,7 @@
           <a:p>
             <a:pPr algn="r"/>
             <a:fld id="{F7021451-1387-4CA6-816F-3879F97B5CBC}" type="slidenum">
-              <a:rPr b="0" lang="en-US"/>
+              <a:rPr lang="en-US" b="0"/>
               <a:t>2</a:t>
             </a:fld>
             <a:endParaRPr lang="en-US"/>
@@ -6934,11 +6882,11 @@
           <a:bodyPr wrap="square" lIns="0" tIns="0" rIns="0" bIns="0" rtlCol="0" anchor="ctr"/>
           <a:lstStyle/>
           <a:p>
-            <a:pPr indent="0" marL="0">
+            <a:pPr marL="0" indent="0">
               <a:buNone/>
             </a:pPr>
             <a:r>
-              <a:rPr lang="en-US" sz="1200" b="1" spc="200" kern="0" dirty="0">
+              <a:rPr lang="en-US" sz="1200" b="1" kern="0" spc="200" dirty="0">
                 <a:solidFill>
                   <a:schemeClr val="accent1"/>
                 </a:solidFill>
@@ -6955,9 +6903,11 @@
       <p:sp>
         <p:nvSpPr>
           <p:cNvPr id="3" name="Text 0"/>
-          <p:cNvSpPr/>
+          <p:cNvSpPr>
+            <a:spLocks noGrp="1"/>
+          </p:cNvSpPr>
           <p:nvPr>
-            <p:ph idx="100" type="title" hasCustomPrompt="1"/>
+            <p:ph type="title" idx="100" hasCustomPrompt="1"/>
           </p:nvPr>
         </p:nvSpPr>
         <p:spPr>
@@ -6975,7 +6925,7 @@
           <a:bodyPr wrap="square" lIns="0" tIns="0" rIns="0" bIns="0" rtlCol="0" anchor="t"/>
           <a:lstStyle/>
           <a:p>
-            <a:pPr algn="l" indent="0" marL="0">
+            <a:pPr marL="0" indent="0" algn="l">
               <a:buNone/>
             </a:pPr>
             <a:r>
@@ -7014,11 +6964,11 @@
           <a:bodyPr wrap="square" lIns="0" tIns="0" rIns="0" bIns="0" rtlCol="0" anchor="t"/>
           <a:lstStyle/>
           <a:p>
-            <a:pPr indent="0" marL="0">
+            <a:pPr marL="0" indent="0">
               <a:buNone/>
             </a:pPr>
             <a:r>
-              <a:rPr lang="en-US" sz="1200" b="1" spc="200" kern="0" dirty="0">
+              <a:rPr lang="en-US" sz="1200" b="1" kern="0" spc="200" dirty="0">
                 <a:solidFill>
                   <a:schemeClr val="tx2"/>
                 </a:solidFill>
@@ -7053,11 +7003,11 @@
           <a:bodyPr wrap="square" lIns="0" tIns="0" rIns="0" bIns="0" rtlCol="0" anchor="t"/>
           <a:lstStyle/>
           <a:p>
-            <a:pPr indent="0" marL="0">
+            <a:pPr marL="0" indent="0">
               <a:buNone/>
             </a:pPr>
             <a:r>
-              <a:rPr lang="en-US" sz="1200" b="1" spc="200" kern="0" dirty="0">
+              <a:rPr lang="en-US" sz="1200" b="1" kern="0" spc="200" dirty="0">
                 <a:solidFill>
                   <a:schemeClr val="accent1"/>
                 </a:solidFill>
@@ -7097,17 +7047,24 @@
             <a:prstDash val="solid"/>
           </a:ln>
         </p:spPr>
+        <p:txBody>
+          <a:bodyPr/>
+          <a:lstStyle/>
+          <a:p>
+            <a:endParaRPr lang="de-DE"/>
+          </a:p>
+        </p:txBody>
       </p:sp>
       <p:pic>
         <p:nvPicPr>
-          <p:cNvPr id="7" name="Image 0" descr="Sensoren">    </p:cNvPr>
+          <p:cNvPr id="7" name="Image 0" descr="Sensoren"/>
           <p:cNvPicPr>
             <a:picLocks noChangeAspect="1"/>
           </p:cNvPicPr>
           <p:nvPr/>
         </p:nvPicPr>
         <p:blipFill>
-          <a:blip r:embed="rId1"/>
+          <a:blip r:embed="rId3"/>
           <a:stretch>
             <a:fillRect/>
           </a:stretch>
@@ -7143,7 +7100,7 @@
           <a:bodyPr wrap="square" lIns="0" tIns="0" rIns="0" bIns="0" rtlCol="0" anchor="t"/>
           <a:lstStyle/>
           <a:p>
-            <a:pPr indent="0" marL="0">
+            <a:pPr marL="0" indent="0">
               <a:buNone/>
             </a:pPr>
             <a:r>
@@ -7182,7 +7139,7 @@
           <a:bodyPr wrap="square" lIns="0" tIns="0" rIns="0" bIns="0" rtlCol="0" anchor="t"/>
           <a:lstStyle/>
           <a:p>
-            <a:pPr indent="0" marL="0">
+            <a:pPr marL="0" indent="0">
               <a:buNone/>
             </a:pPr>
             <a:r>
@@ -7224,6 +7181,13 @@
             <a:prstDash val="solid"/>
           </a:ln>
         </p:spPr>
+        <p:txBody>
+          <a:bodyPr/>
+          <a:lstStyle/>
+          <a:p>
+            <a:endParaRPr lang="de-DE"/>
+          </a:p>
+        </p:txBody>
       </p:sp>
       <p:sp>
         <p:nvSpPr>
@@ -7251,17 +7215,24 @@
             <a:prstDash val="solid"/>
           </a:ln>
         </p:spPr>
+        <p:txBody>
+          <a:bodyPr/>
+          <a:lstStyle/>
+          <a:p>
+            <a:endParaRPr lang="de-DE"/>
+          </a:p>
+        </p:txBody>
       </p:sp>
       <p:pic>
         <p:nvPicPr>
-          <p:cNvPr id="12" name="Image 1" descr="Raspberry Pi">    </p:cNvPr>
+          <p:cNvPr id="12" name="Image 1" descr="Raspberry Pi"/>
           <p:cNvPicPr>
             <a:picLocks noChangeAspect="1"/>
           </p:cNvPicPr>
           <p:nvPr/>
         </p:nvPicPr>
         <p:blipFill>
-          <a:blip r:embed="rId2"/>
+          <a:blip r:embed="rId4"/>
           <a:stretch>
             <a:fillRect/>
           </a:stretch>
@@ -7297,7 +7268,7 @@
           <a:bodyPr wrap="square" lIns="0" tIns="0" rIns="0" bIns="0" rtlCol="0" anchor="t"/>
           <a:lstStyle/>
           <a:p>
-            <a:pPr indent="0" marL="0">
+            <a:pPr marL="0" indent="0">
               <a:buNone/>
             </a:pPr>
             <a:r>
@@ -7336,7 +7307,7 @@
           <a:bodyPr wrap="square" lIns="0" tIns="0" rIns="0" bIns="0" rtlCol="0" anchor="t"/>
           <a:lstStyle/>
           <a:p>
-            <a:pPr indent="0" marL="0">
+            <a:pPr marL="0" indent="0">
               <a:buNone/>
             </a:pPr>
             <a:r>
@@ -7378,6 +7349,13 @@
             <a:prstDash val="solid"/>
           </a:ln>
         </p:spPr>
+        <p:txBody>
+          <a:bodyPr/>
+          <a:lstStyle/>
+          <a:p>
+            <a:endParaRPr lang="de-DE"/>
+          </a:p>
+        </p:txBody>
       </p:sp>
       <p:sp>
         <p:nvSpPr>
@@ -7405,17 +7383,24 @@
             <a:prstDash val="solid"/>
           </a:ln>
         </p:spPr>
+        <p:txBody>
+          <a:bodyPr/>
+          <a:lstStyle/>
+          <a:p>
+            <a:endParaRPr lang="de-DE"/>
+          </a:p>
+        </p:txBody>
       </p:sp>
       <p:pic>
         <p:nvPicPr>
-          <p:cNvPr id="17" name="Image 2" descr="Cloud-Bridge">    </p:cNvPr>
+          <p:cNvPr id="17" name="Image 2" descr="Cloud-Bridge"/>
           <p:cNvPicPr>
             <a:picLocks noChangeAspect="1"/>
           </p:cNvPicPr>
           <p:nvPr/>
         </p:nvPicPr>
         <p:blipFill>
-          <a:blip r:embed="rId3"/>
+          <a:blip r:embed="rId5"/>
           <a:stretch>
             <a:fillRect/>
           </a:stretch>
@@ -7451,7 +7436,7 @@
           <a:bodyPr wrap="square" lIns="0" tIns="0" rIns="0" bIns="0" rtlCol="0" anchor="t"/>
           <a:lstStyle/>
           <a:p>
-            <a:pPr indent="0" marL="0">
+            <a:pPr marL="0" indent="0">
               <a:buNone/>
             </a:pPr>
             <a:r>
@@ -7490,7 +7475,7 @@
           <a:bodyPr wrap="square" lIns="0" tIns="0" rIns="0" bIns="0" rtlCol="0" anchor="t"/>
           <a:lstStyle/>
           <a:p>
-            <a:pPr indent="0" marL="0">
+            <a:pPr marL="0" indent="0">
               <a:buNone/>
             </a:pPr>
             <a:r>
@@ -7532,6 +7517,13 @@
             <a:prstDash val="solid"/>
           </a:ln>
         </p:spPr>
+        <p:txBody>
+          <a:bodyPr/>
+          <a:lstStyle/>
+          <a:p>
+            <a:endParaRPr lang="de-DE"/>
+          </a:p>
+        </p:txBody>
       </p:sp>
       <p:sp>
         <p:nvSpPr>
@@ -7559,17 +7551,24 @@
             <a:prstDash val="solid"/>
           </a:ln>
         </p:spPr>
+        <p:txBody>
+          <a:bodyPr/>
+          <a:lstStyle/>
+          <a:p>
+            <a:endParaRPr lang="de-DE"/>
+          </a:p>
+        </p:txBody>
       </p:sp>
       <p:pic>
         <p:nvPicPr>
-          <p:cNvPr id="22" name="Image 3" descr="ThingSpeak">    </p:cNvPr>
+          <p:cNvPr id="22" name="Image 3" descr="ThingSpeak"/>
           <p:cNvPicPr>
             <a:picLocks noChangeAspect="1"/>
           </p:cNvPicPr>
           <p:nvPr/>
         </p:nvPicPr>
         <p:blipFill>
-          <a:blip r:embed="rId4"/>
+          <a:blip r:embed="rId6"/>
           <a:stretch>
             <a:fillRect/>
           </a:stretch>
@@ -7605,7 +7604,7 @@
           <a:bodyPr wrap="square" lIns="0" tIns="0" rIns="0" bIns="0" rtlCol="0" anchor="t"/>
           <a:lstStyle/>
           <a:p>
-            <a:pPr indent="0" marL="0">
+            <a:pPr marL="0" indent="0">
               <a:buNone/>
             </a:pPr>
             <a:r>
@@ -7644,7 +7643,7 @@
           <a:bodyPr wrap="square" lIns="0" tIns="0" rIns="0" bIns="0" rtlCol="0" anchor="t"/>
           <a:lstStyle/>
           <a:p>
-            <a:pPr indent="0" marL="0">
+            <a:pPr marL="0" indent="0">
               <a:buNone/>
             </a:pPr>
             <a:r>
@@ -7686,6 +7685,13 @@
             <a:prstDash val="solid"/>
           </a:ln>
         </p:spPr>
+        <p:txBody>
+          <a:bodyPr/>
+          <a:lstStyle/>
+          <a:p>
+            <a:endParaRPr lang="de-DE"/>
+          </a:p>
+        </p:txBody>
       </p:sp>
       <p:sp>
         <p:nvSpPr>
@@ -7713,17 +7719,24 @@
             <a:prstDash val="solid"/>
           </a:ln>
         </p:spPr>
+        <p:txBody>
+          <a:bodyPr/>
+          <a:lstStyle/>
+          <a:p>
+            <a:endParaRPr lang="de-DE"/>
+          </a:p>
+        </p:txBody>
       </p:sp>
       <p:pic>
         <p:nvPicPr>
-          <p:cNvPr id="27" name="Image 4" descr="Auswertung">    </p:cNvPr>
+          <p:cNvPr id="27" name="Image 4" descr="Auswertung"/>
           <p:cNvPicPr>
             <a:picLocks noChangeAspect="1"/>
           </p:cNvPicPr>
           <p:nvPr/>
         </p:nvPicPr>
         <p:blipFill>
-          <a:blip r:embed="rId5"/>
+          <a:blip r:embed="rId7"/>
           <a:stretch>
             <a:fillRect/>
           </a:stretch>
@@ -7759,7 +7772,7 @@
           <a:bodyPr wrap="square" lIns="0" tIns="0" rIns="0" bIns="0" rtlCol="0" anchor="t"/>
           <a:lstStyle/>
           <a:p>
-            <a:pPr indent="0" marL="0">
+            <a:pPr marL="0" indent="0">
               <a:buNone/>
             </a:pPr>
             <a:r>
@@ -7798,7 +7811,7 @@
           <a:bodyPr wrap="square" lIns="0" tIns="0" rIns="0" bIns="0" rtlCol="0" anchor="t"/>
           <a:lstStyle/>
           <a:p>
-            <a:pPr indent="0" marL="0">
+            <a:pPr marL="0" indent="0">
               <a:buNone/>
             </a:pPr>
             <a:r>
@@ -7837,7 +7850,7 @@
           <a:bodyPr wrap="square" lIns="0" tIns="0" rIns="0" bIns="0" rtlCol="0" anchor="t"/>
           <a:lstStyle/>
           <a:p>
-            <a:pPr indent="0" marL="0">
+            <a:pPr marL="0" indent="0">
               <a:buNone/>
             </a:pPr>
             <a:r>
@@ -7876,7 +7889,7 @@
           <a:bodyPr wrap="square" lIns="0" tIns="0" rIns="0" bIns="0" rtlCol="0" anchor="t"/>
           <a:lstStyle/>
           <a:p>
-            <a:pPr indent="0" marL="0">
+            <a:pPr marL="0" indent="0">
               <a:buNone/>
             </a:pPr>
             <a:r>
@@ -7915,7 +7928,7 @@
           <a:bodyPr wrap="square" lIns="0" tIns="0" rIns="0" bIns="0" rtlCol="0" anchor="t"/>
           <a:lstStyle/>
           <a:p>
-            <a:pPr indent="0" marL="0">
+            <a:pPr marL="0" indent="0">
               <a:buNone/>
             </a:pPr>
             <a:r>
@@ -7954,7 +7967,7 @@
           <a:bodyPr wrap="square" lIns="0" tIns="0" rIns="0" bIns="0" rtlCol="0" anchor="t"/>
           <a:lstStyle/>
           <a:p>
-            <a:pPr indent="0" marL="0">
+            <a:pPr marL="0" indent="0">
               <a:buNone/>
             </a:pPr>
             <a:r>
@@ -7993,7 +8006,7 @@
           <a:bodyPr wrap="square" lIns="0" tIns="0" rIns="0" bIns="0" rtlCol="0" anchor="t"/>
           <a:lstStyle/>
           <a:p>
-            <a:pPr indent="0" marL="0">
+            <a:pPr marL="0" indent="0">
               <a:buNone/>
             </a:pPr>
             <a:r>
@@ -8032,7 +8045,7 @@
           <a:bodyPr wrap="square" lIns="0" tIns="0" rIns="0" bIns="0" rtlCol="0" anchor="t"/>
           <a:lstStyle/>
           <a:p>
-            <a:pPr indent="0" marL="0">
+            <a:pPr marL="0" indent="0">
               <a:buNone/>
             </a:pPr>
             <a:r>
@@ -8052,7 +8065,7 @@
       </p:sp>
       <p:sp>
         <p:nvSpPr>
-          <p:cNvPr id="25" name="Slide Number Placeholder 0"/>
+          <p:cNvPr id="36" name="Slide Number Placeholder 0"/>
           <p:cNvSpPr>
             <a:spLocks noGrp="1"/>
           </p:cNvSpPr>
@@ -8070,7 +8083,7 @@
           </a:prstGeom>
           <a:extLst>
             <a:ext uri="{C572A759-6A51-4108-AA02-DFA0A04FC94B}">
-              <ma14:wrappingTextBoxFlag xmlns:ma14="http://schemas.microsoft.com/office/mac/drawingml/2011/main" val="0"/>
+              <ma14:wrappingTextBoxFlag xmlns:ma14="http://schemas.microsoft.com/office/mac/drawingml/2011/main" xmlns="" val="0"/>
             </a:ext>
           </a:extLst>
         </p:spPr>
@@ -8091,7 +8104,7 @@
           <a:p>
             <a:pPr algn="r"/>
             <a:fld id="{F7021451-1387-4CA6-816F-3879F97B5CBC}" type="slidenum">
-              <a:rPr b="0" lang="en-US"/>
+              <a:rPr lang="en-US" b="0"/>
               <a:t>3</a:t>
             </a:fld>
             <a:endParaRPr lang="en-US"/>
@@ -8144,11 +8157,11 @@
           <a:bodyPr wrap="square" lIns="0" tIns="0" rIns="0" bIns="0" rtlCol="0" anchor="ctr"/>
           <a:lstStyle/>
           <a:p>
-            <a:pPr indent="0" marL="0">
+            <a:pPr marL="0" indent="0">
               <a:buNone/>
             </a:pPr>
             <a:r>
-              <a:rPr lang="en-US" sz="1200" b="1" spc="200" kern="0" dirty="0">
+              <a:rPr lang="en-US" sz="1200" b="1" kern="0" spc="200" dirty="0">
                 <a:solidFill>
                   <a:schemeClr val="accent1"/>
                 </a:solidFill>
@@ -8165,9 +8178,11 @@
       <p:sp>
         <p:nvSpPr>
           <p:cNvPr id="3" name="Text 0"/>
-          <p:cNvSpPr/>
+          <p:cNvSpPr>
+            <a:spLocks noGrp="1"/>
+          </p:cNvSpPr>
           <p:nvPr>
-            <p:ph idx="100" type="title" hasCustomPrompt="1"/>
+            <p:ph type="title" idx="100" hasCustomPrompt="1"/>
           </p:nvPr>
         </p:nvSpPr>
         <p:spPr>
@@ -8185,7 +8200,7 @@
           <a:bodyPr wrap="square" lIns="0" tIns="0" rIns="0" bIns="0" rtlCol="0" anchor="t"/>
           <a:lstStyle/>
           <a:p>
-            <a:pPr algn="l" indent="0" marL="0">
+            <a:pPr marL="0" indent="0" algn="l">
               <a:buNone/>
             </a:pPr>
             <a:r>
@@ -8219,17 +8234,41 @@
         </p:nvGraphicFramePr>
         <p:xfrm>
           <a:off x="640080" y="1783080"/>
-          <a:ext cx="10908792" cy="914400"/>
+          <a:ext cx="10908792" cy="4114800"/>
         </p:xfrm>
         <a:graphic>
           <a:graphicData uri="http://schemas.openxmlformats.org/drawingml/2006/table">
             <a:tbl>
               <a:tblPr/>
               <a:tblGrid>
-                <a:gridCol w="822960"/>
-                <a:gridCol w="6949440"/>
-                <a:gridCol w="1554480"/>
-                <a:gridCol w="1581912"/>
+                <a:gridCol w="822960">
+                  <a:extLst>
+                    <a:ext uri="{9D8B030D-6E8A-4147-A177-3AD203B41FA5}">
+                      <a16:colId xmlns:a16="http://schemas.microsoft.com/office/drawing/2014/main" val="20000"/>
+                    </a:ext>
+                  </a:extLst>
+                </a:gridCol>
+                <a:gridCol w="6949440">
+                  <a:extLst>
+                    <a:ext uri="{9D8B030D-6E8A-4147-A177-3AD203B41FA5}">
+                      <a16:colId xmlns:a16="http://schemas.microsoft.com/office/drawing/2014/main" val="20001"/>
+                    </a:ext>
+                  </a:extLst>
+                </a:gridCol>
+                <a:gridCol w="1554480">
+                  <a:extLst>
+                    <a:ext uri="{9D8B030D-6E8A-4147-A177-3AD203B41FA5}">
+                      <a16:colId xmlns:a16="http://schemas.microsoft.com/office/drawing/2014/main" val="20002"/>
+                    </a:ext>
+                  </a:extLst>
+                </a:gridCol>
+                <a:gridCol w="1581912">
+                  <a:extLst>
+                    <a:ext uri="{9D8B030D-6E8A-4147-A177-3AD203B41FA5}">
+                      <a16:colId xmlns:a16="http://schemas.microsoft.com/office/drawing/2014/main" val="20003"/>
+                    </a:ext>
+                  </a:extLst>
+                </a:gridCol>
               </a:tblGrid>
               <a:tr h="457200">
                 <a:tc>
@@ -8237,7 +8276,7 @@
                     <a:bodyPr/>
                     <a:lstStyle/>
                     <a:p>
-                      <a:pPr algn="l" indent="0" marL="0">
+                      <a:pPr marL="0" indent="0" algn="l">
                         <a:buNone/>
                       </a:pPr>
                       <a:r>
@@ -8258,7 +8297,7 @@
                       </a:endParaRPr>
                     </a:p>
                   </a:txBody>
-                  <a:tcPr marL="91440" marR="91440" marT="45720" marB="45720" anchor="ctr">
+                  <a:tcPr anchor="ctr">
                     <a:lnL w="6350" cap="flat" cmpd="sng" algn="ctr">
                       <a:solidFill>
                         <a:srgbClr val="D3DEE6"/>
@@ -8305,7 +8344,7 @@
                     <a:bodyPr/>
                     <a:lstStyle/>
                     <a:p>
-                      <a:pPr algn="l" indent="0" marL="0">
+                      <a:pPr marL="0" indent="0" algn="l">
                         <a:buNone/>
                       </a:pPr>
                       <a:r>
@@ -8326,7 +8365,7 @@
                       </a:endParaRPr>
                     </a:p>
                   </a:txBody>
-                  <a:tcPr marL="91440" marR="91440" marT="45720" marB="45720" anchor="ctr">
+                  <a:tcPr anchor="ctr">
                     <a:lnL w="6350" cap="flat" cmpd="sng" algn="ctr">
                       <a:solidFill>
                         <a:srgbClr val="D3DEE6"/>
@@ -8373,7 +8412,7 @@
                     <a:bodyPr/>
                     <a:lstStyle/>
                     <a:p>
-                      <a:pPr algn="r" indent="0" marL="0">
+                      <a:pPr marL="0" indent="0" algn="r">
                         <a:buNone/>
                       </a:pPr>
                       <a:r>
@@ -8394,7 +8433,7 @@
                       </a:endParaRPr>
                     </a:p>
                   </a:txBody>
-                  <a:tcPr marL="91440" marR="91440" marT="45720" marB="45720" anchor="ctr">
+                  <a:tcPr anchor="ctr">
                     <a:lnL w="6350" cap="flat" cmpd="sng" algn="ctr">
                       <a:solidFill>
                         <a:srgbClr val="D3DEE6"/>
@@ -8441,7 +8480,7 @@
                     <a:bodyPr/>
                     <a:lstStyle/>
                     <a:p>
-                      <a:pPr algn="r" indent="0" marL="0">
+                      <a:pPr marL="0" indent="0" algn="r">
                         <a:buNone/>
                       </a:pPr>
                       <a:r>
@@ -8462,7 +8501,7 @@
                       </a:endParaRPr>
                     </a:p>
                   </a:txBody>
-                  <a:tcPr marL="91440" marR="91440" marT="45720" marB="45720" anchor="ctr">
+                  <a:tcPr anchor="ctr">
                     <a:lnL w="6350" cap="flat" cmpd="sng" algn="ctr">
                       <a:solidFill>
                         <a:srgbClr val="D3DEE6"/>
@@ -8504,6 +8543,11 @@
                     </a:solidFill>
                   </a:tcPr>
                 </a:tc>
+                <a:extLst>
+                  <a:ext uri="{0D108BD9-81ED-4DB2-BD59-A6C34878D82A}">
+                    <a16:rowId xmlns:a16="http://schemas.microsoft.com/office/drawing/2014/main" val="10000"/>
+                  </a:ext>
+                </a:extLst>
               </a:tr>
               <a:tr h="457200">
                 <a:tc>
@@ -8511,7 +8555,7 @@
                     <a:bodyPr/>
                     <a:lstStyle/>
                     <a:p>
-                      <a:pPr indent="0" marL="0">
+                      <a:pPr marL="0" indent="0">
                         <a:buNone/>
                       </a:pPr>
                       <a:r>
@@ -8532,7 +8576,7 @@
                       </a:endParaRPr>
                     </a:p>
                   </a:txBody>
-                  <a:tcPr marL="91440" marR="91440" marT="45720" marB="45720" anchor="ctr">
+                  <a:tcPr anchor="ctr">
                     <a:lnL w="6350" cap="flat" cmpd="sng" algn="ctr">
                       <a:solidFill>
                         <a:srgbClr val="D3DEE6"/>
@@ -8579,7 +8623,7 @@
                     <a:bodyPr/>
                     <a:lstStyle/>
                     <a:p>
-                      <a:pPr indent="0" marL="0">
+                      <a:pPr marL="0" indent="0">
                         <a:buNone/>
                       </a:pPr>
                       <a:r>
@@ -8600,7 +8644,7 @@
                       </a:endParaRPr>
                     </a:p>
                   </a:txBody>
-                  <a:tcPr marL="91440" marR="91440" marT="45720" marB="45720" anchor="ctr">
+                  <a:tcPr anchor="ctr">
                     <a:lnL w="6350" cap="flat" cmpd="sng" algn="ctr">
                       <a:solidFill>
                         <a:srgbClr val="D3DEE6"/>
@@ -8647,7 +8691,7 @@
                     <a:bodyPr/>
                     <a:lstStyle/>
                     <a:p>
-                      <a:pPr algn="r" indent="0" marL="0">
+                      <a:pPr marL="0" indent="0" algn="r">
                         <a:buNone/>
                       </a:pPr>
                       <a:r>
@@ -8668,7 +8712,7 @@
                       </a:endParaRPr>
                     </a:p>
                   </a:txBody>
-                  <a:tcPr marL="91440" marR="91440" marT="45720" marB="45720" anchor="ctr">
+                  <a:tcPr anchor="ctr">
                     <a:lnL w="6350" cap="flat" cmpd="sng" algn="ctr">
                       <a:solidFill>
                         <a:srgbClr val="D3DEE6"/>
@@ -8715,7 +8759,7 @@
                     <a:bodyPr/>
                     <a:lstStyle/>
                     <a:p>
-                      <a:pPr algn="r" indent="0" marL="0">
+                      <a:pPr marL="0" indent="0" algn="r">
                         <a:buNone/>
                       </a:pPr>
                       <a:r>
@@ -8736,7 +8780,7 @@
                       </a:endParaRPr>
                     </a:p>
                   </a:txBody>
-                  <a:tcPr marL="91440" marR="91440" marT="45720" marB="45720" anchor="ctr">
+                  <a:tcPr anchor="ctr">
                     <a:lnL w="6350" cap="flat" cmpd="sng" algn="ctr">
                       <a:solidFill>
                         <a:srgbClr val="D3DEE6"/>
@@ -8778,6 +8822,11 @@
                     </a:solidFill>
                   </a:tcPr>
                 </a:tc>
+                <a:extLst>
+                  <a:ext uri="{0D108BD9-81ED-4DB2-BD59-A6C34878D82A}">
+                    <a16:rowId xmlns:a16="http://schemas.microsoft.com/office/drawing/2014/main" val="10001"/>
+                  </a:ext>
+                </a:extLst>
               </a:tr>
               <a:tr h="457200">
                 <a:tc>
@@ -8785,7 +8834,7 @@
                     <a:bodyPr/>
                     <a:lstStyle/>
                     <a:p>
-                      <a:pPr indent="0" marL="0">
+                      <a:pPr marL="0" indent="0">
                         <a:buNone/>
                       </a:pPr>
                       <a:r>
@@ -8806,7 +8855,7 @@
                       </a:endParaRPr>
                     </a:p>
                   </a:txBody>
-                  <a:tcPr marL="91440" marR="91440" marT="45720" marB="45720" anchor="ctr">
+                  <a:tcPr anchor="ctr">
                     <a:lnL w="6350" cap="flat" cmpd="sng" algn="ctr">
                       <a:solidFill>
                         <a:srgbClr val="D3DEE6"/>
@@ -8853,7 +8902,7 @@
                     <a:bodyPr/>
                     <a:lstStyle/>
                     <a:p>
-                      <a:pPr indent="0" marL="0">
+                      <a:pPr marL="0" indent="0">
                         <a:buNone/>
                       </a:pPr>
                       <a:r>
@@ -8874,7 +8923,7 @@
                       </a:endParaRPr>
                     </a:p>
                   </a:txBody>
-                  <a:tcPr marL="91440" marR="91440" marT="45720" marB="45720" anchor="ctr">
+                  <a:tcPr anchor="ctr">
                     <a:lnL w="6350" cap="flat" cmpd="sng" algn="ctr">
                       <a:solidFill>
                         <a:srgbClr val="D3DEE6"/>
@@ -8921,7 +8970,7 @@
                     <a:bodyPr/>
                     <a:lstStyle/>
                     <a:p>
-                      <a:pPr algn="r" indent="0" marL="0">
+                      <a:pPr marL="0" indent="0" algn="r">
                         <a:buNone/>
                       </a:pPr>
                       <a:r>
@@ -8942,7 +8991,7 @@
                       </a:endParaRPr>
                     </a:p>
                   </a:txBody>
-                  <a:tcPr marL="91440" marR="91440" marT="45720" marB="45720" anchor="ctr">
+                  <a:tcPr anchor="ctr">
                     <a:lnL w="6350" cap="flat" cmpd="sng" algn="ctr">
                       <a:solidFill>
                         <a:srgbClr val="D3DEE6"/>
@@ -8989,7 +9038,7 @@
                     <a:bodyPr/>
                     <a:lstStyle/>
                     <a:p>
-                      <a:pPr algn="r" indent="0" marL="0">
+                      <a:pPr marL="0" indent="0" algn="r">
                         <a:buNone/>
                       </a:pPr>
                       <a:r>
@@ -9010,7 +9059,7 @@
                       </a:endParaRPr>
                     </a:p>
                   </a:txBody>
-                  <a:tcPr marL="91440" marR="91440" marT="45720" marB="45720" anchor="ctr">
+                  <a:tcPr anchor="ctr">
                     <a:lnL w="6350" cap="flat" cmpd="sng" algn="ctr">
                       <a:solidFill>
                         <a:srgbClr val="D3DEE6"/>
@@ -9052,6 +9101,11 @@
                     </a:solidFill>
                   </a:tcPr>
                 </a:tc>
+                <a:extLst>
+                  <a:ext uri="{0D108BD9-81ED-4DB2-BD59-A6C34878D82A}">
+                    <a16:rowId xmlns:a16="http://schemas.microsoft.com/office/drawing/2014/main" val="10002"/>
+                  </a:ext>
+                </a:extLst>
               </a:tr>
               <a:tr h="457200">
                 <a:tc>
@@ -9059,7 +9113,7 @@
                     <a:bodyPr/>
                     <a:lstStyle/>
                     <a:p>
-                      <a:pPr indent="0" marL="0">
+                      <a:pPr marL="0" indent="0">
                         <a:buNone/>
                       </a:pPr>
                       <a:r>
@@ -9080,7 +9134,7 @@
                       </a:endParaRPr>
                     </a:p>
                   </a:txBody>
-                  <a:tcPr marL="91440" marR="91440" marT="45720" marB="45720" anchor="ctr">
+                  <a:tcPr anchor="ctr">
                     <a:lnL w="6350" cap="flat" cmpd="sng" algn="ctr">
                       <a:solidFill>
                         <a:srgbClr val="D3DEE6"/>
@@ -9127,7 +9181,7 @@
                     <a:bodyPr/>
                     <a:lstStyle/>
                     <a:p>
-                      <a:pPr indent="0" marL="0">
+                      <a:pPr marL="0" indent="0">
                         <a:buNone/>
                       </a:pPr>
                       <a:r>
@@ -9148,7 +9202,7 @@
                       </a:endParaRPr>
                     </a:p>
                   </a:txBody>
-                  <a:tcPr marL="91440" marR="91440" marT="45720" marB="45720" anchor="ctr">
+                  <a:tcPr anchor="ctr">
                     <a:lnL w="6350" cap="flat" cmpd="sng" algn="ctr">
                       <a:solidFill>
                         <a:srgbClr val="D3DEE6"/>
@@ -9195,7 +9249,7 @@
                     <a:bodyPr/>
                     <a:lstStyle/>
                     <a:p>
-                      <a:pPr algn="r" indent="0" marL="0">
+                      <a:pPr marL="0" indent="0" algn="r">
                         <a:buNone/>
                       </a:pPr>
                       <a:r>
@@ -9216,7 +9270,7 @@
                       </a:endParaRPr>
                     </a:p>
                   </a:txBody>
-                  <a:tcPr marL="91440" marR="91440" marT="45720" marB="45720" anchor="ctr">
+                  <a:tcPr anchor="ctr">
                     <a:lnL w="6350" cap="flat" cmpd="sng" algn="ctr">
                       <a:solidFill>
                         <a:srgbClr val="D3DEE6"/>
@@ -9263,7 +9317,7 @@
                     <a:bodyPr/>
                     <a:lstStyle/>
                     <a:p>
-                      <a:pPr algn="r" indent="0" marL="0">
+                      <a:pPr marL="0" indent="0" algn="r">
                         <a:buNone/>
                       </a:pPr>
                       <a:r>
@@ -9284,7 +9338,7 @@
                       </a:endParaRPr>
                     </a:p>
                   </a:txBody>
-                  <a:tcPr marL="91440" marR="91440" marT="45720" marB="45720" anchor="ctr">
+                  <a:tcPr anchor="ctr">
                     <a:lnL w="6350" cap="flat" cmpd="sng" algn="ctr">
                       <a:solidFill>
                         <a:srgbClr val="D3DEE6"/>
@@ -9326,6 +9380,11 @@
                     </a:solidFill>
                   </a:tcPr>
                 </a:tc>
+                <a:extLst>
+                  <a:ext uri="{0D108BD9-81ED-4DB2-BD59-A6C34878D82A}">
+                    <a16:rowId xmlns:a16="http://schemas.microsoft.com/office/drawing/2014/main" val="10003"/>
+                  </a:ext>
+                </a:extLst>
               </a:tr>
               <a:tr h="457200">
                 <a:tc>
@@ -9333,7 +9392,7 @@
                     <a:bodyPr/>
                     <a:lstStyle/>
                     <a:p>
-                      <a:pPr indent="0" marL="0">
+                      <a:pPr marL="0" indent="0">
                         <a:buNone/>
                       </a:pPr>
                       <a:r>
@@ -9354,7 +9413,7 @@
                       </a:endParaRPr>
                     </a:p>
                   </a:txBody>
-                  <a:tcPr marL="91440" marR="91440" marT="45720" marB="45720" anchor="ctr">
+                  <a:tcPr anchor="ctr">
                     <a:lnL w="6350" cap="flat" cmpd="sng" algn="ctr">
                       <a:solidFill>
                         <a:srgbClr val="D3DEE6"/>
@@ -9401,7 +9460,7 @@
                     <a:bodyPr/>
                     <a:lstStyle/>
                     <a:p>
-                      <a:pPr indent="0" marL="0">
+                      <a:pPr marL="0" indent="0">
                         <a:buNone/>
                       </a:pPr>
                       <a:r>
@@ -9422,7 +9481,7 @@
                       </a:endParaRPr>
                     </a:p>
                   </a:txBody>
-                  <a:tcPr marL="91440" marR="91440" marT="45720" marB="45720" anchor="ctr">
+                  <a:tcPr anchor="ctr">
                     <a:lnL w="6350" cap="flat" cmpd="sng" algn="ctr">
                       <a:solidFill>
                         <a:srgbClr val="D3DEE6"/>
@@ -9469,7 +9528,7 @@
                     <a:bodyPr/>
                     <a:lstStyle/>
                     <a:p>
-                      <a:pPr algn="r" indent="0" marL="0">
+                      <a:pPr marL="0" indent="0" algn="r">
                         <a:buNone/>
                       </a:pPr>
                       <a:r>
@@ -9490,7 +9549,7 @@
                       </a:endParaRPr>
                     </a:p>
                   </a:txBody>
-                  <a:tcPr marL="91440" marR="91440" marT="45720" marB="45720" anchor="ctr">
+                  <a:tcPr anchor="ctr">
                     <a:lnL w="6350" cap="flat" cmpd="sng" algn="ctr">
                       <a:solidFill>
                         <a:srgbClr val="D3DEE6"/>
@@ -9537,7 +9596,7 @@
                     <a:bodyPr/>
                     <a:lstStyle/>
                     <a:p>
-                      <a:pPr algn="r" indent="0" marL="0">
+                      <a:pPr marL="0" indent="0" algn="r">
                         <a:buNone/>
                       </a:pPr>
                       <a:r>
@@ -9558,7 +9617,7 @@
                       </a:endParaRPr>
                     </a:p>
                   </a:txBody>
-                  <a:tcPr marL="91440" marR="91440" marT="45720" marB="45720" anchor="ctr">
+                  <a:tcPr anchor="ctr">
                     <a:lnL w="6350" cap="flat" cmpd="sng" algn="ctr">
                       <a:solidFill>
                         <a:srgbClr val="D3DEE6"/>
@@ -9600,6 +9659,11 @@
                     </a:solidFill>
                   </a:tcPr>
                 </a:tc>
+                <a:extLst>
+                  <a:ext uri="{0D108BD9-81ED-4DB2-BD59-A6C34878D82A}">
+                    <a16:rowId xmlns:a16="http://schemas.microsoft.com/office/drawing/2014/main" val="10004"/>
+                  </a:ext>
+                </a:extLst>
               </a:tr>
               <a:tr h="457200">
                 <a:tc>
@@ -9607,7 +9671,7 @@
                     <a:bodyPr/>
                     <a:lstStyle/>
                     <a:p>
-                      <a:pPr indent="0" marL="0">
+                      <a:pPr marL="0" indent="0">
                         <a:buNone/>
                       </a:pPr>
                       <a:r>
@@ -9628,7 +9692,7 @@
                       </a:endParaRPr>
                     </a:p>
                   </a:txBody>
-                  <a:tcPr marL="91440" marR="91440" marT="45720" marB="45720" anchor="ctr">
+                  <a:tcPr anchor="ctr">
                     <a:lnL w="6350" cap="flat" cmpd="sng" algn="ctr">
                       <a:solidFill>
                         <a:srgbClr val="D3DEE6"/>
@@ -9675,7 +9739,7 @@
                     <a:bodyPr/>
                     <a:lstStyle/>
                     <a:p>
-                      <a:pPr indent="0" marL="0">
+                      <a:pPr marL="0" indent="0">
                         <a:buNone/>
                       </a:pPr>
                       <a:r>
@@ -9696,7 +9760,7 @@
                       </a:endParaRPr>
                     </a:p>
                   </a:txBody>
-                  <a:tcPr marL="91440" marR="91440" marT="45720" marB="45720" anchor="ctr">
+                  <a:tcPr anchor="ctr">
                     <a:lnL w="6350" cap="flat" cmpd="sng" algn="ctr">
                       <a:solidFill>
                         <a:srgbClr val="D3DEE6"/>
@@ -9743,7 +9807,7 @@
                     <a:bodyPr/>
                     <a:lstStyle/>
                     <a:p>
-                      <a:pPr algn="r" indent="0" marL="0">
+                      <a:pPr marL="0" indent="0" algn="r">
                         <a:buNone/>
                       </a:pPr>
                       <a:r>
@@ -9764,7 +9828,7 @@
                       </a:endParaRPr>
                     </a:p>
                   </a:txBody>
-                  <a:tcPr marL="91440" marR="91440" marT="45720" marB="45720" anchor="ctr">
+                  <a:tcPr anchor="ctr">
                     <a:lnL w="6350" cap="flat" cmpd="sng" algn="ctr">
                       <a:solidFill>
                         <a:srgbClr val="D3DEE6"/>
@@ -9811,7 +9875,7 @@
                     <a:bodyPr/>
                     <a:lstStyle/>
                     <a:p>
-                      <a:pPr algn="r" indent="0" marL="0">
+                      <a:pPr marL="0" indent="0" algn="r">
                         <a:buNone/>
                       </a:pPr>
                       <a:r>
@@ -9832,7 +9896,7 @@
                       </a:endParaRPr>
                     </a:p>
                   </a:txBody>
-                  <a:tcPr marL="91440" marR="91440" marT="45720" marB="45720" anchor="ctr">
+                  <a:tcPr anchor="ctr">
                     <a:lnL w="6350" cap="flat" cmpd="sng" algn="ctr">
                       <a:solidFill>
                         <a:srgbClr val="D3DEE6"/>
@@ -9874,6 +9938,11 @@
                     </a:solidFill>
                   </a:tcPr>
                 </a:tc>
+                <a:extLst>
+                  <a:ext uri="{0D108BD9-81ED-4DB2-BD59-A6C34878D82A}">
+                    <a16:rowId xmlns:a16="http://schemas.microsoft.com/office/drawing/2014/main" val="10005"/>
+                  </a:ext>
+                </a:extLst>
               </a:tr>
               <a:tr h="457200">
                 <a:tc>
@@ -9881,7 +9950,7 @@
                     <a:bodyPr/>
                     <a:lstStyle/>
                     <a:p>
-                      <a:pPr indent="0" marL="0">
+                      <a:pPr marL="0" indent="0">
                         <a:buNone/>
                       </a:pPr>
                       <a:r>
@@ -9902,7 +9971,7 @@
                       </a:endParaRPr>
                     </a:p>
                   </a:txBody>
-                  <a:tcPr marL="91440" marR="91440" marT="45720" marB="45720" anchor="ctr">
+                  <a:tcPr anchor="ctr">
                     <a:lnL w="6350" cap="flat" cmpd="sng" algn="ctr">
                       <a:solidFill>
                         <a:srgbClr val="D3DEE6"/>
@@ -9949,7 +10018,7 @@
                     <a:bodyPr/>
                     <a:lstStyle/>
                     <a:p>
-                      <a:pPr indent="0" marL="0">
+                      <a:pPr marL="0" indent="0">
                         <a:buNone/>
                       </a:pPr>
                       <a:r>
@@ -9970,7 +10039,7 @@
                       </a:endParaRPr>
                     </a:p>
                   </a:txBody>
-                  <a:tcPr marL="91440" marR="91440" marT="45720" marB="45720" anchor="ctr">
+                  <a:tcPr anchor="ctr">
                     <a:lnL w="6350" cap="flat" cmpd="sng" algn="ctr">
                       <a:solidFill>
                         <a:srgbClr val="D3DEE6"/>
@@ -10017,7 +10086,7 @@
                     <a:bodyPr/>
                     <a:lstStyle/>
                     <a:p>
-                      <a:pPr algn="r" indent="0" marL="0">
+                      <a:pPr marL="0" indent="0" algn="r">
                         <a:buNone/>
                       </a:pPr>
                       <a:r>
@@ -10038,7 +10107,7 @@
                       </a:endParaRPr>
                     </a:p>
                   </a:txBody>
-                  <a:tcPr marL="91440" marR="91440" marT="45720" marB="45720" anchor="ctr">
+                  <a:tcPr anchor="ctr">
                     <a:lnL w="6350" cap="flat" cmpd="sng" algn="ctr">
                       <a:solidFill>
                         <a:srgbClr val="D3DEE6"/>
@@ -10085,7 +10154,7 @@
                     <a:bodyPr/>
                     <a:lstStyle/>
                     <a:p>
-                      <a:pPr algn="r" indent="0" marL="0">
+                      <a:pPr marL="0" indent="0" algn="r">
                         <a:buNone/>
                       </a:pPr>
                       <a:r>
@@ -10106,7 +10175,7 @@
                       </a:endParaRPr>
                     </a:p>
                   </a:txBody>
-                  <a:tcPr marL="91440" marR="91440" marT="45720" marB="45720" anchor="ctr">
+                  <a:tcPr anchor="ctr">
                     <a:lnL w="6350" cap="flat" cmpd="sng" algn="ctr">
                       <a:solidFill>
                         <a:srgbClr val="D3DEE6"/>
@@ -10148,6 +10217,11 @@
                     </a:solidFill>
                   </a:tcPr>
                 </a:tc>
+                <a:extLst>
+                  <a:ext uri="{0D108BD9-81ED-4DB2-BD59-A6C34878D82A}">
+                    <a16:rowId xmlns:a16="http://schemas.microsoft.com/office/drawing/2014/main" val="10006"/>
+                  </a:ext>
+                </a:extLst>
               </a:tr>
               <a:tr h="457200">
                 <a:tc>
@@ -10155,7 +10229,7 @@
                     <a:bodyPr/>
                     <a:lstStyle/>
                     <a:p>
-                      <a:pPr indent="0" marL="0">
+                      <a:pPr marL="0" indent="0">
                         <a:buNone/>
                       </a:pPr>
                       <a:r>
@@ -10176,7 +10250,7 @@
                       </a:endParaRPr>
                     </a:p>
                   </a:txBody>
-                  <a:tcPr marL="91440" marR="91440" marT="45720" marB="45720" anchor="ctr">
+                  <a:tcPr anchor="ctr">
                     <a:lnL w="6350" cap="flat" cmpd="sng" algn="ctr">
                       <a:solidFill>
                         <a:srgbClr val="D3DEE6"/>
@@ -10223,7 +10297,7 @@
                     <a:bodyPr/>
                     <a:lstStyle/>
                     <a:p>
-                      <a:pPr indent="0" marL="0">
+                      <a:pPr marL="0" indent="0">
                         <a:buNone/>
                       </a:pPr>
                       <a:r>
@@ -10244,7 +10318,7 @@
                       </a:endParaRPr>
                     </a:p>
                   </a:txBody>
-                  <a:tcPr marL="91440" marR="91440" marT="45720" marB="45720" anchor="ctr">
+                  <a:tcPr anchor="ctr">
                     <a:lnL w="6350" cap="flat" cmpd="sng" algn="ctr">
                       <a:solidFill>
                         <a:srgbClr val="D3DEE6"/>
@@ -10291,7 +10365,7 @@
                     <a:bodyPr/>
                     <a:lstStyle/>
                     <a:p>
-                      <a:pPr algn="r" indent="0" marL="0">
+                      <a:pPr marL="0" indent="0" algn="r">
                         <a:buNone/>
                       </a:pPr>
                       <a:r>
@@ -10312,7 +10386,7 @@
                       </a:endParaRPr>
                     </a:p>
                   </a:txBody>
-                  <a:tcPr marL="91440" marR="91440" marT="45720" marB="45720" anchor="ctr">
+                  <a:tcPr anchor="ctr">
                     <a:lnL w="6350" cap="flat" cmpd="sng" algn="ctr">
                       <a:solidFill>
                         <a:srgbClr val="D3DEE6"/>
@@ -10359,7 +10433,7 @@
                     <a:bodyPr/>
                     <a:lstStyle/>
                     <a:p>
-                      <a:pPr algn="r" indent="0" marL="0">
+                      <a:pPr marL="0" indent="0" algn="r">
                         <a:buNone/>
                       </a:pPr>
                       <a:r>
@@ -10380,7 +10454,7 @@
                       </a:endParaRPr>
                     </a:p>
                   </a:txBody>
-                  <a:tcPr marL="91440" marR="91440" marT="45720" marB="45720" anchor="ctr">
+                  <a:tcPr anchor="ctr">
                     <a:lnL w="6350" cap="flat" cmpd="sng" algn="ctr">
                       <a:solidFill>
                         <a:srgbClr val="D3DEE6"/>
@@ -10422,6 +10496,11 @@
                     </a:solidFill>
                   </a:tcPr>
                 </a:tc>
+                <a:extLst>
+                  <a:ext uri="{0D108BD9-81ED-4DB2-BD59-A6C34878D82A}">
+                    <a16:rowId xmlns:a16="http://schemas.microsoft.com/office/drawing/2014/main" val="10007"/>
+                  </a:ext>
+                </a:extLst>
               </a:tr>
               <a:tr h="457200">
                 <a:tc>
@@ -10429,7 +10508,7 @@
                     <a:bodyPr/>
                     <a:lstStyle/>
                     <a:p>
-                      <a:pPr indent="0" marL="0">
+                      <a:pPr marL="0" indent="0">
                         <a:buNone/>
                       </a:pPr>
                       <a:r>
@@ -10450,7 +10529,7 @@
                       </a:endParaRPr>
                     </a:p>
                   </a:txBody>
-                  <a:tcPr marL="91440" marR="91440" marT="45720" marB="45720" anchor="ctr">
+                  <a:tcPr anchor="ctr">
                     <a:lnL w="6350" cap="flat" cmpd="sng" algn="ctr">
                       <a:solidFill>
                         <a:srgbClr val="D3DEE6"/>
@@ -10497,7 +10576,7 @@
                     <a:bodyPr/>
                     <a:lstStyle/>
                     <a:p>
-                      <a:pPr indent="0" marL="0">
+                      <a:pPr marL="0" indent="0">
                         <a:buNone/>
                       </a:pPr>
                       <a:r>
@@ -10518,7 +10597,7 @@
                       </a:endParaRPr>
                     </a:p>
                   </a:txBody>
-                  <a:tcPr marL="91440" marR="91440" marT="45720" marB="45720" anchor="ctr">
+                  <a:tcPr anchor="ctr">
                     <a:lnL w="6350" cap="flat" cmpd="sng" algn="ctr">
                       <a:solidFill>
                         <a:srgbClr val="D3DEE6"/>
@@ -10565,7 +10644,7 @@
                     <a:bodyPr/>
                     <a:lstStyle/>
                     <a:p>
-                      <a:pPr algn="r" indent="0" marL="0">
+                      <a:pPr marL="0" indent="0" algn="r">
                         <a:buNone/>
                       </a:pPr>
                       <a:r>
@@ -10586,7 +10665,7 @@
                       </a:endParaRPr>
                     </a:p>
                   </a:txBody>
-                  <a:tcPr marL="91440" marR="91440" marT="45720" marB="45720" anchor="ctr">
+                  <a:tcPr anchor="ctr">
                     <a:lnL w="6350" cap="flat" cmpd="sng" algn="ctr">
                       <a:solidFill>
                         <a:srgbClr val="D3DEE6"/>
@@ -10633,7 +10712,7 @@
                     <a:bodyPr/>
                     <a:lstStyle/>
                     <a:p>
-                      <a:pPr algn="r" indent="0" marL="0">
+                      <a:pPr marL="0" indent="0" algn="r">
                         <a:buNone/>
                       </a:pPr>
                       <a:r>
@@ -10654,7 +10733,7 @@
                       </a:endParaRPr>
                     </a:p>
                   </a:txBody>
-                  <a:tcPr marL="91440" marR="91440" marT="45720" marB="45720" anchor="ctr">
+                  <a:tcPr anchor="ctr">
                     <a:lnL w="6350" cap="flat" cmpd="sng" algn="ctr">
                       <a:solidFill>
                         <a:srgbClr val="D3DEE6"/>
@@ -10696,6 +10775,11 @@
                     </a:solidFill>
                   </a:tcPr>
                 </a:tc>
+                <a:extLst>
+                  <a:ext uri="{0D108BD9-81ED-4DB2-BD59-A6C34878D82A}">
+                    <a16:rowId xmlns:a16="http://schemas.microsoft.com/office/drawing/2014/main" val="10008"/>
+                  </a:ext>
+                </a:extLst>
               </a:tr>
             </a:tbl>
           </a:graphicData>
@@ -10721,7 +10805,7 @@
           </a:prstGeom>
           <a:extLst>
             <a:ext uri="{C572A759-6A51-4108-AA02-DFA0A04FC94B}">
-              <ma14:wrappingTextBoxFlag xmlns:ma14="http://schemas.microsoft.com/office/mac/drawingml/2011/main" val="0"/>
+              <ma14:wrappingTextBoxFlag xmlns:ma14="http://schemas.microsoft.com/office/mac/drawingml/2011/main" xmlns="" val="0"/>
             </a:ext>
           </a:extLst>
         </p:spPr>
@@ -10742,7 +10826,7 @@
           <a:p>
             <a:pPr algn="r"/>
             <a:fld id="{F7021451-1387-4CA6-816F-3879F97B5CBC}" type="slidenum">
-              <a:rPr b="0" lang="en-US"/>
+              <a:rPr lang="en-US" b="0"/>
               <a:t>4</a:t>
             </a:fld>
             <a:endParaRPr lang="en-US"/>
@@ -10795,11 +10879,11 @@
           <a:bodyPr wrap="square" lIns="0" tIns="0" rIns="0" bIns="0" rtlCol="0" anchor="ctr"/>
           <a:lstStyle/>
           <a:p>
-            <a:pPr indent="0" marL="0">
+            <a:pPr marL="0" indent="0">
               <a:buNone/>
             </a:pPr>
             <a:r>
-              <a:rPr lang="en-US" sz="1200" b="1" spc="200" kern="0" dirty="0">
+              <a:rPr lang="en-US" sz="1200" b="1" kern="0" spc="200" dirty="0">
                 <a:solidFill>
                   <a:schemeClr val="accent1"/>
                 </a:solidFill>
@@ -10838,7 +10922,7 @@
           <a:bodyPr wrap="square" lIns="0" tIns="0" rIns="0" bIns="0" rtlCol="0" anchor="ctr"/>
           <a:lstStyle/>
           <a:p>
-            <a:pPr algn="ctr" indent="0" marL="0">
+            <a:pPr marL="0" indent="0" algn="ctr">
               <a:buNone/>
             </a:pPr>
             <a:r>
@@ -10877,7 +10961,7 @@
           <a:bodyPr wrap="square" lIns="0" tIns="0" rIns="0" bIns="0" rtlCol="0" anchor="ctr"/>
           <a:lstStyle/>
           <a:p>
-            <a:pPr algn="r" indent="0" marL="0">
+            <a:pPr marL="0" indent="0" algn="r">
               <a:buNone/>
             </a:pPr>
             <a:r>
@@ -10898,9 +10982,11 @@
       <p:sp>
         <p:nvSpPr>
           <p:cNvPr id="5" name="Text 0"/>
-          <p:cNvSpPr/>
+          <p:cNvSpPr>
+            <a:spLocks noGrp="1"/>
+          </p:cNvSpPr>
           <p:nvPr>
-            <p:ph idx="100" type="title" hasCustomPrompt="1"/>
+            <p:ph type="title" idx="100" hasCustomPrompt="1"/>
           </p:nvPr>
         </p:nvSpPr>
         <p:spPr>
@@ -10918,7 +11004,7 @@
           <a:bodyPr wrap="square" lIns="0" tIns="0" rIns="0" bIns="0" rtlCol="0" anchor="t"/>
           <a:lstStyle/>
           <a:p>
-            <a:pPr algn="l" indent="0" marL="0">
+            <a:pPr marL="0" indent="0" algn="l">
               <a:buNone/>
             </a:pPr>
             <a:r>
@@ -10952,16 +11038,34 @@
         </p:nvGraphicFramePr>
         <p:xfrm>
           <a:off x="640080" y="1783080"/>
-          <a:ext cx="10908792" cy="914400"/>
+          <a:ext cx="10908792" cy="3017520"/>
         </p:xfrm>
         <a:graphic>
           <a:graphicData uri="http://schemas.openxmlformats.org/drawingml/2006/table">
             <a:tbl>
               <a:tblPr/>
               <a:tblGrid>
-                <a:gridCol w="2468880"/>
-                <a:gridCol w="4206240"/>
-                <a:gridCol w="4233672"/>
+                <a:gridCol w="2468880">
+                  <a:extLst>
+                    <a:ext uri="{9D8B030D-6E8A-4147-A177-3AD203B41FA5}">
+                      <a16:colId xmlns:a16="http://schemas.microsoft.com/office/drawing/2014/main" val="20000"/>
+                    </a:ext>
+                  </a:extLst>
+                </a:gridCol>
+                <a:gridCol w="4206240">
+                  <a:extLst>
+                    <a:ext uri="{9D8B030D-6E8A-4147-A177-3AD203B41FA5}">
+                      <a16:colId xmlns:a16="http://schemas.microsoft.com/office/drawing/2014/main" val="20001"/>
+                    </a:ext>
+                  </a:extLst>
+                </a:gridCol>
+                <a:gridCol w="4233672">
+                  <a:extLst>
+                    <a:ext uri="{9D8B030D-6E8A-4147-A177-3AD203B41FA5}">
+                      <a16:colId xmlns:a16="http://schemas.microsoft.com/office/drawing/2014/main" val="20002"/>
+                    </a:ext>
+                  </a:extLst>
+                </a:gridCol>
               </a:tblGrid>
               <a:tr h="502920">
                 <a:tc>
@@ -10969,7 +11073,7 @@
                     <a:bodyPr/>
                     <a:lstStyle/>
                     <a:p>
-                      <a:pPr algn="l" indent="0" marL="0">
+                      <a:pPr marL="0" indent="0" algn="l">
                         <a:buNone/>
                       </a:pPr>
                       <a:r>
@@ -10990,7 +11094,7 @@
                       </a:endParaRPr>
                     </a:p>
                   </a:txBody>
-                  <a:tcPr marL="91440" marR="91440" marT="45720" marB="45720" anchor="ctr">
+                  <a:tcPr anchor="ctr">
                     <a:lnL w="6350" cap="flat" cmpd="sng" algn="ctr">
                       <a:solidFill>
                         <a:srgbClr val="D3DEE6"/>
@@ -11037,7 +11141,7 @@
                     <a:bodyPr/>
                     <a:lstStyle/>
                     <a:p>
-                      <a:pPr algn="l" indent="0" marL="0">
+                      <a:pPr marL="0" indent="0" algn="l">
                         <a:buNone/>
                       </a:pPr>
                       <a:r>
@@ -11058,7 +11162,7 @@
                       </a:endParaRPr>
                     </a:p>
                   </a:txBody>
-                  <a:tcPr marL="91440" marR="91440" marT="45720" marB="45720" anchor="ctr">
+                  <a:tcPr anchor="ctr">
                     <a:lnL w="6350" cap="flat" cmpd="sng" algn="ctr">
                       <a:solidFill>
                         <a:srgbClr val="D3DEE6"/>
@@ -11105,7 +11209,7 @@
                     <a:bodyPr/>
                     <a:lstStyle/>
                     <a:p>
-                      <a:pPr algn="l" indent="0" marL="0">
+                      <a:pPr marL="0" indent="0" algn="l">
                         <a:buNone/>
                       </a:pPr>
                       <a:r>
@@ -11126,7 +11230,7 @@
                       </a:endParaRPr>
                     </a:p>
                   </a:txBody>
-                  <a:tcPr marL="91440" marR="91440" marT="45720" marB="45720" anchor="ctr">
+                  <a:tcPr anchor="ctr">
                     <a:lnL w="6350" cap="flat" cmpd="sng" algn="ctr">
                       <a:solidFill>
                         <a:srgbClr val="D3DEE6"/>
@@ -11168,6 +11272,11 @@
                     </a:solidFill>
                   </a:tcPr>
                 </a:tc>
+                <a:extLst>
+                  <a:ext uri="{0D108BD9-81ED-4DB2-BD59-A6C34878D82A}">
+                    <a16:rowId xmlns:a16="http://schemas.microsoft.com/office/drawing/2014/main" val="10000"/>
+                  </a:ext>
+                </a:extLst>
               </a:tr>
               <a:tr h="502920">
                 <a:tc>
@@ -11175,7 +11284,7 @@
                     <a:bodyPr/>
                     <a:lstStyle/>
                     <a:p>
-                      <a:pPr indent="0" marL="0">
+                      <a:pPr marL="0" indent="0">
                         <a:buNone/>
                       </a:pPr>
                       <a:r>
@@ -11196,7 +11305,7 @@
                       </a:endParaRPr>
                     </a:p>
                   </a:txBody>
-                  <a:tcPr marL="91440" marR="91440" marT="45720" marB="45720" anchor="ctr">
+                  <a:tcPr anchor="ctr">
                     <a:lnL w="6350" cap="flat" cmpd="sng" algn="ctr">
                       <a:solidFill>
                         <a:srgbClr val="D3DEE6"/>
@@ -11243,7 +11352,7 @@
                     <a:bodyPr/>
                     <a:lstStyle/>
                     <a:p>
-                      <a:pPr indent="0" marL="0">
+                      <a:pPr marL="0" indent="0">
                         <a:buNone/>
                       </a:pPr>
                       <a:r>
@@ -11264,7 +11373,7 @@
                       </a:endParaRPr>
                     </a:p>
                   </a:txBody>
-                  <a:tcPr marL="91440" marR="91440" marT="45720" marB="45720" anchor="ctr">
+                  <a:tcPr anchor="ctr">
                     <a:lnL w="6350" cap="flat" cmpd="sng" algn="ctr">
                       <a:solidFill>
                         <a:srgbClr val="D3DEE6"/>
@@ -11311,7 +11420,7 @@
                     <a:bodyPr/>
                     <a:lstStyle/>
                     <a:p>
-                      <a:pPr indent="0" marL="0">
+                      <a:pPr marL="0" indent="0">
                         <a:buNone/>
                       </a:pPr>
                       <a:r>
@@ -11332,7 +11441,7 @@
                       </a:endParaRPr>
                     </a:p>
                   </a:txBody>
-                  <a:tcPr marL="91440" marR="91440" marT="45720" marB="45720" anchor="ctr">
+                  <a:tcPr anchor="ctr">
                     <a:lnL w="6350" cap="flat" cmpd="sng" algn="ctr">
                       <a:solidFill>
                         <a:srgbClr val="D3DEE6"/>
@@ -11374,6 +11483,11 @@
                     </a:solidFill>
                   </a:tcPr>
                 </a:tc>
+                <a:extLst>
+                  <a:ext uri="{0D108BD9-81ED-4DB2-BD59-A6C34878D82A}">
+                    <a16:rowId xmlns:a16="http://schemas.microsoft.com/office/drawing/2014/main" val="10001"/>
+                  </a:ext>
+                </a:extLst>
               </a:tr>
               <a:tr h="502920">
                 <a:tc>
@@ -11381,7 +11495,7 @@
                     <a:bodyPr/>
                     <a:lstStyle/>
                     <a:p>
-                      <a:pPr indent="0" marL="0">
+                      <a:pPr marL="0" indent="0">
                         <a:buNone/>
                       </a:pPr>
                       <a:r>
@@ -11402,7 +11516,7 @@
                       </a:endParaRPr>
                     </a:p>
                   </a:txBody>
-                  <a:tcPr marL="91440" marR="91440" marT="45720" marB="45720" anchor="ctr">
+                  <a:tcPr anchor="ctr">
                     <a:lnL w="6350" cap="flat" cmpd="sng" algn="ctr">
                       <a:solidFill>
                         <a:srgbClr val="D3DEE6"/>
@@ -11449,7 +11563,7 @@
                     <a:bodyPr/>
                     <a:lstStyle/>
                     <a:p>
-                      <a:pPr indent="0" marL="0">
+                      <a:pPr marL="0" indent="0">
                         <a:buNone/>
                       </a:pPr>
                       <a:r>
@@ -11470,7 +11584,7 @@
                       </a:endParaRPr>
                     </a:p>
                   </a:txBody>
-                  <a:tcPr marL="91440" marR="91440" marT="45720" marB="45720" anchor="ctr">
+                  <a:tcPr anchor="ctr">
                     <a:lnL w="6350" cap="flat" cmpd="sng" algn="ctr">
                       <a:solidFill>
                         <a:srgbClr val="D3DEE6"/>
@@ -11517,7 +11631,7 @@
                     <a:bodyPr/>
                     <a:lstStyle/>
                     <a:p>
-                      <a:pPr indent="0" marL="0">
+                      <a:pPr marL="0" indent="0">
                         <a:buNone/>
                       </a:pPr>
                       <a:r>
@@ -11538,7 +11652,7 @@
                       </a:endParaRPr>
                     </a:p>
                   </a:txBody>
-                  <a:tcPr marL="91440" marR="91440" marT="45720" marB="45720" anchor="ctr">
+                  <a:tcPr anchor="ctr">
                     <a:lnL w="6350" cap="flat" cmpd="sng" algn="ctr">
                       <a:solidFill>
                         <a:srgbClr val="D3DEE6"/>
@@ -11580,6 +11694,11 @@
                     </a:solidFill>
                   </a:tcPr>
                 </a:tc>
+                <a:extLst>
+                  <a:ext uri="{0D108BD9-81ED-4DB2-BD59-A6C34878D82A}">
+                    <a16:rowId xmlns:a16="http://schemas.microsoft.com/office/drawing/2014/main" val="10002"/>
+                  </a:ext>
+                </a:extLst>
               </a:tr>
               <a:tr h="502920">
                 <a:tc>
@@ -11587,7 +11706,7 @@
                     <a:bodyPr/>
                     <a:lstStyle/>
                     <a:p>
-                      <a:pPr indent="0" marL="0">
+                      <a:pPr marL="0" indent="0">
                         <a:buNone/>
                       </a:pPr>
                       <a:r>
@@ -11608,7 +11727,7 @@
                       </a:endParaRPr>
                     </a:p>
                   </a:txBody>
-                  <a:tcPr marL="91440" marR="91440" marT="45720" marB="45720" anchor="ctr">
+                  <a:tcPr anchor="ctr">
                     <a:lnL w="6350" cap="flat" cmpd="sng" algn="ctr">
                       <a:solidFill>
                         <a:srgbClr val="D3DEE6"/>
@@ -11655,7 +11774,7 @@
                     <a:bodyPr/>
                     <a:lstStyle/>
                     <a:p>
-                      <a:pPr indent="0" marL="0">
+                      <a:pPr marL="0" indent="0">
                         <a:buNone/>
                       </a:pPr>
                       <a:r>
@@ -11676,7 +11795,7 @@
                       </a:endParaRPr>
                     </a:p>
                   </a:txBody>
-                  <a:tcPr marL="91440" marR="91440" marT="45720" marB="45720" anchor="ctr">
+                  <a:tcPr anchor="ctr">
                     <a:lnL w="6350" cap="flat" cmpd="sng" algn="ctr">
                       <a:solidFill>
                         <a:srgbClr val="D3DEE6"/>
@@ -11723,7 +11842,7 @@
                     <a:bodyPr/>
                     <a:lstStyle/>
                     <a:p>
-                      <a:pPr indent="0" marL="0">
+                      <a:pPr marL="0" indent="0">
                         <a:buNone/>
                       </a:pPr>
                       <a:r>
@@ -11744,7 +11863,7 @@
                       </a:endParaRPr>
                     </a:p>
                   </a:txBody>
-                  <a:tcPr marL="91440" marR="91440" marT="45720" marB="45720" anchor="ctr">
+                  <a:tcPr anchor="ctr">
                     <a:lnL w="6350" cap="flat" cmpd="sng" algn="ctr">
                       <a:solidFill>
                         <a:srgbClr val="D3DEE6"/>
@@ -11786,6 +11905,11 @@
                     </a:solidFill>
                   </a:tcPr>
                 </a:tc>
+                <a:extLst>
+                  <a:ext uri="{0D108BD9-81ED-4DB2-BD59-A6C34878D82A}">
+                    <a16:rowId xmlns:a16="http://schemas.microsoft.com/office/drawing/2014/main" val="10003"/>
+                  </a:ext>
+                </a:extLst>
               </a:tr>
               <a:tr h="502920">
                 <a:tc>
@@ -11793,7 +11917,7 @@
                     <a:bodyPr/>
                     <a:lstStyle/>
                     <a:p>
-                      <a:pPr indent="0" marL="0">
+                      <a:pPr marL="0" indent="0">
                         <a:buNone/>
                       </a:pPr>
                       <a:r>
@@ -11814,7 +11938,7 @@
                       </a:endParaRPr>
                     </a:p>
                   </a:txBody>
-                  <a:tcPr marL="91440" marR="91440" marT="45720" marB="45720" anchor="ctr">
+                  <a:tcPr anchor="ctr">
                     <a:lnL w="6350" cap="flat" cmpd="sng" algn="ctr">
                       <a:solidFill>
                         <a:srgbClr val="D3DEE6"/>
@@ -11861,7 +11985,7 @@
                     <a:bodyPr/>
                     <a:lstStyle/>
                     <a:p>
-                      <a:pPr indent="0" marL="0">
+                      <a:pPr marL="0" indent="0">
                         <a:buNone/>
                       </a:pPr>
                       <a:r>
@@ -11882,7 +12006,7 @@
                       </a:endParaRPr>
                     </a:p>
                   </a:txBody>
-                  <a:tcPr marL="91440" marR="91440" marT="45720" marB="45720" anchor="ctr">
+                  <a:tcPr anchor="ctr">
                     <a:lnL w="6350" cap="flat" cmpd="sng" algn="ctr">
                       <a:solidFill>
                         <a:srgbClr val="D3DEE6"/>
@@ -11929,7 +12053,7 @@
                     <a:bodyPr/>
                     <a:lstStyle/>
                     <a:p>
-                      <a:pPr indent="0" marL="0">
+                      <a:pPr marL="0" indent="0">
                         <a:buNone/>
                       </a:pPr>
                       <a:r>
@@ -11950,7 +12074,7 @@
                       </a:endParaRPr>
                     </a:p>
                   </a:txBody>
-                  <a:tcPr marL="91440" marR="91440" marT="45720" marB="45720" anchor="ctr">
+                  <a:tcPr anchor="ctr">
                     <a:lnL w="6350" cap="flat" cmpd="sng" algn="ctr">
                       <a:solidFill>
                         <a:srgbClr val="D3DEE6"/>
@@ -11992,6 +12116,11 @@
                     </a:solidFill>
                   </a:tcPr>
                 </a:tc>
+                <a:extLst>
+                  <a:ext uri="{0D108BD9-81ED-4DB2-BD59-A6C34878D82A}">
+                    <a16:rowId xmlns:a16="http://schemas.microsoft.com/office/drawing/2014/main" val="10004"/>
+                  </a:ext>
+                </a:extLst>
               </a:tr>
               <a:tr h="502920">
                 <a:tc>
@@ -11999,7 +12128,7 @@
                     <a:bodyPr/>
                     <a:lstStyle/>
                     <a:p>
-                      <a:pPr indent="0" marL="0">
+                      <a:pPr marL="0" indent="0">
                         <a:buNone/>
                       </a:pPr>
                       <a:r>
@@ -12020,7 +12149,7 @@
                       </a:endParaRPr>
                     </a:p>
                   </a:txBody>
-                  <a:tcPr marL="91440" marR="91440" marT="45720" marB="45720" anchor="ctr">
+                  <a:tcPr anchor="ctr">
                     <a:lnL w="6350" cap="flat" cmpd="sng" algn="ctr">
                       <a:solidFill>
                         <a:srgbClr val="D3DEE6"/>
@@ -12067,7 +12196,7 @@
                     <a:bodyPr/>
                     <a:lstStyle/>
                     <a:p>
-                      <a:pPr indent="0" marL="0">
+                      <a:pPr marL="0" indent="0">
                         <a:buNone/>
                       </a:pPr>
                       <a:r>
@@ -12088,7 +12217,7 @@
                       </a:endParaRPr>
                     </a:p>
                   </a:txBody>
-                  <a:tcPr marL="91440" marR="91440" marT="45720" marB="45720" anchor="ctr">
+                  <a:tcPr anchor="ctr">
                     <a:lnL w="6350" cap="flat" cmpd="sng" algn="ctr">
                       <a:solidFill>
                         <a:srgbClr val="D3DEE6"/>
@@ -12135,7 +12264,7 @@
                     <a:bodyPr/>
                     <a:lstStyle/>
                     <a:p>
-                      <a:pPr indent="0" marL="0">
+                      <a:pPr marL="0" indent="0">
                         <a:buNone/>
                       </a:pPr>
                       <a:r>
@@ -12156,7 +12285,7 @@
                       </a:endParaRPr>
                     </a:p>
                   </a:txBody>
-                  <a:tcPr marL="91440" marR="91440" marT="45720" marB="45720" anchor="ctr">
+                  <a:tcPr anchor="ctr">
                     <a:lnL w="6350" cap="flat" cmpd="sng" algn="ctr">
                       <a:solidFill>
                         <a:srgbClr val="D3DEE6"/>
@@ -12198,6 +12327,11 @@
                     </a:solidFill>
                   </a:tcPr>
                 </a:tc>
+                <a:extLst>
+                  <a:ext uri="{0D108BD9-81ED-4DB2-BD59-A6C34878D82A}">
+                    <a16:rowId xmlns:a16="http://schemas.microsoft.com/office/drawing/2014/main" val="10005"/>
+                  </a:ext>
+                </a:extLst>
               </a:tr>
             </a:tbl>
           </a:graphicData>
@@ -12224,7 +12358,7 @@
           <a:bodyPr wrap="square" lIns="0" tIns="0" rIns="0" bIns="0" rtlCol="0" anchor="t"/>
           <a:lstStyle/>
           <a:p>
-            <a:pPr indent="0" marL="0">
+            <a:pPr marL="0" indent="0">
               <a:buNone/>
             </a:pPr>
             <a:r>
@@ -12262,7 +12396,7 @@
           </a:prstGeom>
           <a:extLst>
             <a:ext uri="{C572A759-6A51-4108-AA02-DFA0A04FC94B}">
-              <ma14:wrappingTextBoxFlag xmlns:ma14="http://schemas.microsoft.com/office/mac/drawingml/2011/main" val="0"/>
+              <ma14:wrappingTextBoxFlag xmlns:ma14="http://schemas.microsoft.com/office/mac/drawingml/2011/main" xmlns="" val="0"/>
             </a:ext>
           </a:extLst>
         </p:spPr>
@@ -12283,7 +12417,7 @@
           <a:p>
             <a:pPr algn="r"/>
             <a:fld id="{F7021451-1387-4CA6-816F-3879F97B5CBC}" type="slidenum">
-              <a:rPr b="0" lang="en-US"/>
+              <a:rPr lang="en-US" b="0"/>
               <a:t>5</a:t>
             </a:fld>
             <a:endParaRPr lang="en-US"/>
@@ -12336,11 +12470,11 @@
           <a:bodyPr wrap="square" lIns="0" tIns="0" rIns="0" bIns="0" rtlCol="0" anchor="ctr"/>
           <a:lstStyle/>
           <a:p>
-            <a:pPr indent="0" marL="0">
+            <a:pPr marL="0" indent="0">
               <a:buNone/>
             </a:pPr>
             <a:r>
-              <a:rPr lang="en-US" sz="1200" b="1" spc="200" kern="0" dirty="0">
+              <a:rPr lang="en-US" sz="1200" b="1" kern="0" spc="200" dirty="0">
                 <a:solidFill>
                   <a:schemeClr val="accent2"/>
                 </a:solidFill>
@@ -12379,7 +12513,7 @@
           <a:bodyPr wrap="square" lIns="0" tIns="0" rIns="0" bIns="0" rtlCol="0" anchor="ctr"/>
           <a:lstStyle/>
           <a:p>
-            <a:pPr algn="ctr" indent="0" marL="0">
+            <a:pPr marL="0" indent="0" algn="ctr">
               <a:buNone/>
             </a:pPr>
             <a:r>
@@ -12418,7 +12552,7 @@
           <a:bodyPr wrap="square" lIns="0" tIns="0" rIns="0" bIns="0" rtlCol="0" anchor="ctr"/>
           <a:lstStyle/>
           <a:p>
-            <a:pPr algn="r" indent="0" marL="0">
+            <a:pPr marL="0" indent="0" algn="r">
               <a:buNone/>
             </a:pPr>
             <a:r>
@@ -12439,9 +12573,11 @@
       <p:sp>
         <p:nvSpPr>
           <p:cNvPr id="5" name="Text 0"/>
-          <p:cNvSpPr/>
+          <p:cNvSpPr>
+            <a:spLocks noGrp="1"/>
+          </p:cNvSpPr>
           <p:nvPr>
-            <p:ph idx="100" type="title" hasCustomPrompt="1"/>
+            <p:ph type="title" idx="100" hasCustomPrompt="1"/>
           </p:nvPr>
         </p:nvSpPr>
         <p:spPr>
@@ -12459,7 +12595,7 @@
           <a:bodyPr wrap="square" lIns="0" tIns="0" rIns="0" bIns="0" rtlCol="0" anchor="t"/>
           <a:lstStyle/>
           <a:p>
-            <a:pPr algn="l" indent="0" marL="0">
+            <a:pPr marL="0" indent="0" algn="l">
               <a:buNone/>
             </a:pPr>
             <a:r>
@@ -12503,6 +12639,13 @@
             <a:prstDash val="solid"/>
           </a:ln>
         </p:spPr>
+        <p:txBody>
+          <a:bodyPr/>
+          <a:lstStyle/>
+          <a:p>
+            <a:endParaRPr lang="de-DE"/>
+          </a:p>
+        </p:txBody>
       </p:sp>
       <p:sp>
         <p:nvSpPr>
@@ -12529,7 +12672,7 @@
           <a:bodyPr wrap="square" lIns="0" tIns="0" rIns="0" bIns="0" rtlCol="0" anchor="ctr"/>
           <a:lstStyle/>
           <a:p>
-            <a:pPr algn="ctr" indent="0" marL="0">
+            <a:pPr marL="0" indent="0" algn="ctr">
               <a:buNone/>
             </a:pPr>
             <a:r>
@@ -12568,7 +12711,7 @@
           <a:bodyPr wrap="square" lIns="0" tIns="0" rIns="0" bIns="0" rtlCol="0" anchor="t"/>
           <a:lstStyle/>
           <a:p>
-            <a:pPr indent="0" marL="0">
+            <a:pPr marL="0" indent="0">
               <a:buNone/>
             </a:pPr>
             <a:r>
@@ -12607,7 +12750,7 @@
           <a:bodyPr wrap="square" lIns="0" tIns="0" rIns="0" bIns="0" rtlCol="0" anchor="t"/>
           <a:lstStyle/>
           <a:p>
-            <a:pPr indent="0" marL="0">
+            <a:pPr marL="0" indent="0">
               <a:buNone/>
             </a:pPr>
             <a:r>
@@ -12651,6 +12794,13 @@
             <a:prstDash val="solid"/>
           </a:ln>
         </p:spPr>
+        <p:txBody>
+          <a:bodyPr/>
+          <a:lstStyle/>
+          <a:p>
+            <a:endParaRPr lang="de-DE"/>
+          </a:p>
+        </p:txBody>
       </p:sp>
       <p:sp>
         <p:nvSpPr>
@@ -12677,7 +12827,7 @@
           <a:bodyPr wrap="square" lIns="0" tIns="0" rIns="0" bIns="0" rtlCol="0" anchor="ctr"/>
           <a:lstStyle/>
           <a:p>
-            <a:pPr algn="ctr" indent="0" marL="0">
+            <a:pPr marL="0" indent="0" algn="ctr">
               <a:buNone/>
             </a:pPr>
             <a:r>
@@ -12716,7 +12866,7 @@
           <a:bodyPr wrap="square" lIns="0" tIns="0" rIns="0" bIns="0" rtlCol="0" anchor="t"/>
           <a:lstStyle/>
           <a:p>
-            <a:pPr indent="0" marL="0">
+            <a:pPr marL="0" indent="0">
               <a:buNone/>
             </a:pPr>
             <a:r>
@@ -12755,7 +12905,7 @@
           <a:bodyPr wrap="square" lIns="0" tIns="0" rIns="0" bIns="0" rtlCol="0" anchor="t"/>
           <a:lstStyle/>
           <a:p>
-            <a:pPr indent="0" marL="0">
+            <a:pPr marL="0" indent="0">
               <a:buNone/>
             </a:pPr>
             <a:r>
@@ -12799,6 +12949,13 @@
             <a:prstDash val="solid"/>
           </a:ln>
         </p:spPr>
+        <p:txBody>
+          <a:bodyPr/>
+          <a:lstStyle/>
+          <a:p>
+            <a:endParaRPr lang="de-DE"/>
+          </a:p>
+        </p:txBody>
       </p:sp>
       <p:sp>
         <p:nvSpPr>
@@ -12821,7 +12978,7 @@
           <a:bodyPr wrap="square" lIns="0" tIns="0" rIns="0" bIns="0" rtlCol="0" anchor="t"/>
           <a:lstStyle/>
           <a:p>
-            <a:pPr indent="0" marL="0">
+            <a:pPr marL="0" indent="0">
               <a:buNone/>
             </a:pPr>
             <a:r>
@@ -12841,161 +12998,7 @@
       </p:sp>
       <p:pic>
         <p:nvPicPr>
-          <p:cNvPr id="16" name="Image 0" descr="Haken">    </p:cNvPr>
-          <p:cNvPicPr>
-            <a:picLocks noChangeAspect="1"/>
-          </p:cNvPicPr>
-          <p:nvPr/>
-        </p:nvPicPr>
-        <p:blipFill>
-          <a:blip r:embed="rId1"/>
-          <a:stretch>
-            <a:fillRect/>
-          </a:stretch>
-        </p:blipFill>
-        <p:spPr>
-          <a:xfrm>
-            <a:off x="6355080" y="2724912"/>
-            <a:ext cx="292608" cy="292608"/>
-          </a:xfrm>
-          <a:prstGeom prst="rect">
-            <a:avLst/>
-          </a:prstGeom>
-        </p:spPr>
-      </p:pic>
-      <p:sp>
-        <p:nvSpPr>
-          <p:cNvPr id="17" name="Text 14"/>
-          <p:cNvSpPr txBox="1"/>
-          <p:nvPr/>
-        </p:nvSpPr>
-        <p:spPr>
-          <a:xfrm>
-            <a:off x="6858000" y="2651760"/>
-            <a:ext cx="4480560" cy="731520"/>
-          </a:xfrm>
-          <a:prstGeom prst="rect">
-            <a:avLst/>
-          </a:prstGeom>
-          <a:noFill/>
-          <a:ln/>
-        </p:spPr>
-        <p:txBody>
-          <a:bodyPr wrap="square" lIns="0" tIns="0" rIns="0" bIns="0" rtlCol="0" anchor="t"/>
-          <a:lstStyle/>
-          <a:p>
-            <a:pPr indent="0" marL="0">
-              <a:buNone/>
-            </a:pPr>
-            <a:r>
-              <a:rPr lang="en-US" sz="1600" b="1" dirty="0">
-                <a:solidFill>
-                  <a:srgbClr val="FFFFFF"/>
-                </a:solidFill>
-                <a:latin typeface="Calibri" pitchFamily="34" charset="0"/>
-                <a:ea typeface="Calibri" pitchFamily="34" charset="-122"/>
-                <a:cs typeface="Calibri" pitchFamily="34" charset="-120"/>
-              </a:rPr>
-              <a:t>Kosten: </a:t>
-            </a:r>
-            <a:pPr indent="0" marL="0">
-              <a:buNone/>
-            </a:pPr>
-            <a:r>
-              <a:rPr lang="en-US" sz="1600" dirty="0">
-                <a:solidFill>
-                  <a:srgbClr val="B8C7D9"/>
-                </a:solidFill>
-                <a:latin typeface="Calibri" pitchFamily="34" charset="0"/>
-                <a:ea typeface="Calibri" pitchFamily="34" charset="-122"/>
-                <a:cs typeface="Calibri" pitchFamily="34" charset="-120"/>
-              </a:rPr>
-              <a:t>Free-Tarif, keine Kreditkarte nötig</a:t>
-            </a:r>
-            <a:endParaRPr lang="en-US" sz="1600" dirty="0"/>
-          </a:p>
-        </p:txBody>
-      </p:sp>
-      <p:pic>
-        <p:nvPicPr>
-          <p:cNvPr id="18" name="Image 1" descr="Haken">    </p:cNvPr>
-          <p:cNvPicPr>
-            <a:picLocks noChangeAspect="1"/>
-          </p:cNvPicPr>
-          <p:nvPr/>
-        </p:nvPicPr>
-        <p:blipFill>
-          <a:blip r:embed="rId2"/>
-          <a:stretch>
-            <a:fillRect/>
-          </a:stretch>
-        </p:blipFill>
-        <p:spPr>
-          <a:xfrm>
-            <a:off x="6355080" y="3566160"/>
-            <a:ext cx="292608" cy="292608"/>
-          </a:xfrm>
-          <a:prstGeom prst="rect">
-            <a:avLst/>
-          </a:prstGeom>
-        </p:spPr>
-      </p:pic>
-      <p:sp>
-        <p:nvSpPr>
-          <p:cNvPr id="19" name="Text 15"/>
-          <p:cNvSpPr txBox="1"/>
-          <p:nvPr/>
-        </p:nvSpPr>
-        <p:spPr>
-          <a:xfrm>
-            <a:off x="6858000" y="3493008"/>
-            <a:ext cx="4480560" cy="731520"/>
-          </a:xfrm>
-          <a:prstGeom prst="rect">
-            <a:avLst/>
-          </a:prstGeom>
-          <a:noFill/>
-          <a:ln/>
-        </p:spPr>
-        <p:txBody>
-          <a:bodyPr wrap="square" lIns="0" tIns="0" rIns="0" bIns="0" rtlCol="0" anchor="t"/>
-          <a:lstStyle/>
-          <a:p>
-            <a:pPr indent="0" marL="0">
-              <a:buNone/>
-            </a:pPr>
-            <a:r>
-              <a:rPr lang="en-US" sz="1600" b="1" dirty="0">
-                <a:solidFill>
-                  <a:srgbClr val="FFFFFF"/>
-                </a:solidFill>
-                <a:latin typeface="Calibri" pitchFamily="34" charset="0"/>
-                <a:ea typeface="Calibri" pitchFamily="34" charset="-122"/>
-                <a:cs typeface="Calibri" pitchFamily="34" charset="-120"/>
-              </a:rPr>
-              <a:t>Protokolle: </a:t>
-            </a:r>
-            <a:pPr indent="0" marL="0">
-              <a:buNone/>
-            </a:pPr>
-            <a:r>
-              <a:rPr lang="en-US" sz="1600" dirty="0">
-                <a:solidFill>
-                  <a:srgbClr val="B8C7D9"/>
-                </a:solidFill>
-                <a:latin typeface="Calibri" pitchFamily="34" charset="0"/>
-                <a:ea typeface="Calibri" pitchFamily="34" charset="-122"/>
-                <a:cs typeface="Calibri" pitchFamily="34" charset="-120"/>
-              </a:rPr>
-              <a:t>HTTP(S)-API passt zur Bridge, MQTT möglich</a:t>
-            </a:r>
-            <a:endParaRPr lang="en-US" sz="1600" dirty="0"/>
-          </a:p>
-        </p:txBody>
-      </p:sp>
-      <p:pic>
-        <p:nvPicPr>
-          <p:cNvPr id="20" name="Image 2" descr="Haken">    </p:cNvPr>
+          <p:cNvPr id="16" name="Image 0" descr="Haken"/>
           <p:cNvPicPr>
             <a:picLocks noChangeAspect="1"/>
           </p:cNvPicPr>
@@ -13009,6 +13012,154 @@
         </p:blipFill>
         <p:spPr>
           <a:xfrm>
+            <a:off x="6355080" y="2724912"/>
+            <a:ext cx="292608" cy="292608"/>
+          </a:xfrm>
+          <a:prstGeom prst="rect">
+            <a:avLst/>
+          </a:prstGeom>
+        </p:spPr>
+      </p:pic>
+      <p:sp>
+        <p:nvSpPr>
+          <p:cNvPr id="17" name="Text 14"/>
+          <p:cNvSpPr txBox="1"/>
+          <p:nvPr/>
+        </p:nvSpPr>
+        <p:spPr>
+          <a:xfrm>
+            <a:off x="6858000" y="2651760"/>
+            <a:ext cx="4480560" cy="731520"/>
+          </a:xfrm>
+          <a:prstGeom prst="rect">
+            <a:avLst/>
+          </a:prstGeom>
+          <a:noFill/>
+          <a:ln/>
+        </p:spPr>
+        <p:txBody>
+          <a:bodyPr wrap="square" lIns="0" tIns="0" rIns="0" bIns="0" rtlCol="0" anchor="t"/>
+          <a:lstStyle/>
+          <a:p>
+            <a:pPr marL="0" indent="0">
+              <a:buNone/>
+            </a:pPr>
+            <a:r>
+              <a:rPr lang="en-US" sz="1600" b="1" dirty="0">
+                <a:solidFill>
+                  <a:srgbClr val="FFFFFF"/>
+                </a:solidFill>
+                <a:latin typeface="Calibri" pitchFamily="34" charset="0"/>
+                <a:ea typeface="Calibri" pitchFamily="34" charset="-122"/>
+                <a:cs typeface="Calibri" pitchFamily="34" charset="-120"/>
+              </a:rPr>
+              <a:t>Kosten: </a:t>
+            </a:r>
+            <a:r>
+              <a:rPr lang="en-US" sz="1600" dirty="0">
+                <a:solidFill>
+                  <a:srgbClr val="B8C7D9"/>
+                </a:solidFill>
+                <a:latin typeface="Calibri" pitchFamily="34" charset="0"/>
+                <a:ea typeface="Calibri" pitchFamily="34" charset="-122"/>
+                <a:cs typeface="Calibri" pitchFamily="34" charset="-120"/>
+              </a:rPr>
+              <a:t>Free-Tarif, keine Kreditkarte nötig</a:t>
+            </a:r>
+            <a:endParaRPr lang="en-US" sz="1600" dirty="0"/>
+          </a:p>
+        </p:txBody>
+      </p:sp>
+      <p:pic>
+        <p:nvPicPr>
+          <p:cNvPr id="18" name="Image 1" descr="Haken"/>
+          <p:cNvPicPr>
+            <a:picLocks noChangeAspect="1"/>
+          </p:cNvPicPr>
+          <p:nvPr/>
+        </p:nvPicPr>
+        <p:blipFill>
+          <a:blip r:embed="rId3"/>
+          <a:stretch>
+            <a:fillRect/>
+          </a:stretch>
+        </p:blipFill>
+        <p:spPr>
+          <a:xfrm>
+            <a:off x="6355080" y="3566160"/>
+            <a:ext cx="292608" cy="292608"/>
+          </a:xfrm>
+          <a:prstGeom prst="rect">
+            <a:avLst/>
+          </a:prstGeom>
+        </p:spPr>
+      </p:pic>
+      <p:sp>
+        <p:nvSpPr>
+          <p:cNvPr id="19" name="Text 15"/>
+          <p:cNvSpPr txBox="1"/>
+          <p:nvPr/>
+        </p:nvSpPr>
+        <p:spPr>
+          <a:xfrm>
+            <a:off x="6858000" y="3493008"/>
+            <a:ext cx="4480560" cy="731520"/>
+          </a:xfrm>
+          <a:prstGeom prst="rect">
+            <a:avLst/>
+          </a:prstGeom>
+          <a:noFill/>
+          <a:ln/>
+        </p:spPr>
+        <p:txBody>
+          <a:bodyPr wrap="square" lIns="0" tIns="0" rIns="0" bIns="0" rtlCol="0" anchor="t"/>
+          <a:lstStyle/>
+          <a:p>
+            <a:pPr marL="0" indent="0">
+              <a:buNone/>
+            </a:pPr>
+            <a:r>
+              <a:rPr lang="en-US" sz="1600" b="1" dirty="0">
+                <a:solidFill>
+                  <a:srgbClr val="FFFFFF"/>
+                </a:solidFill>
+                <a:latin typeface="Calibri" pitchFamily="34" charset="0"/>
+                <a:ea typeface="Calibri" pitchFamily="34" charset="-122"/>
+                <a:cs typeface="Calibri" pitchFamily="34" charset="-120"/>
+              </a:rPr>
+              <a:t>Protokolle: </a:t>
+            </a:r>
+            <a:r>
+              <a:rPr lang="en-US" sz="1600" dirty="0">
+                <a:solidFill>
+                  <a:srgbClr val="B8C7D9"/>
+                </a:solidFill>
+                <a:latin typeface="Calibri" pitchFamily="34" charset="0"/>
+                <a:ea typeface="Calibri" pitchFamily="34" charset="-122"/>
+                <a:cs typeface="Calibri" pitchFamily="34" charset="-120"/>
+              </a:rPr>
+              <a:t>HTTP(S)-API passt zur Bridge, MQTT möglich</a:t>
+            </a:r>
+            <a:endParaRPr lang="en-US" sz="1600" dirty="0"/>
+          </a:p>
+        </p:txBody>
+      </p:sp>
+      <p:pic>
+        <p:nvPicPr>
+          <p:cNvPr id="20" name="Image 2" descr="Haken"/>
+          <p:cNvPicPr>
+            <a:picLocks noChangeAspect="1"/>
+          </p:cNvPicPr>
+          <p:nvPr/>
+        </p:nvPicPr>
+        <p:blipFill>
+          <a:blip r:embed="rId3"/>
+          <a:stretch>
+            <a:fillRect/>
+          </a:stretch>
+        </p:blipFill>
+        <p:spPr>
+          <a:xfrm>
             <a:off x="6355080" y="4407408"/>
             <a:ext cx="292608" cy="292608"/>
           </a:xfrm>
@@ -13038,7 +13189,7 @@
           <a:bodyPr wrap="square" lIns="0" tIns="0" rIns="0" bIns="0" rtlCol="0" anchor="t"/>
           <a:lstStyle/>
           <a:p>
-            <a:pPr indent="0" marL="0">
+            <a:pPr marL="0" indent="0">
               <a:buNone/>
             </a:pPr>
             <a:r>
@@ -13052,9 +13203,6 @@
               </a:rPr>
               <a:t>Speicherung und Visualisierung: </a:t>
             </a:r>
-            <a:pPr indent="0" marL="0">
-              <a:buNone/>
-            </a:pPr>
             <a:r>
               <a:rPr lang="en-US" sz="1600" dirty="0">
                 <a:solidFill>
@@ -13072,14 +13220,14 @@
       </p:sp>
       <p:pic>
         <p:nvPicPr>
-          <p:cNvPr id="22" name="Image 3" descr="Haken">    </p:cNvPr>
+          <p:cNvPr id="22" name="Image 3" descr="Haken"/>
           <p:cNvPicPr>
             <a:picLocks noChangeAspect="1"/>
           </p:cNvPicPr>
           <p:nvPr/>
         </p:nvPicPr>
         <p:blipFill>
-          <a:blip r:embed="rId4"/>
+          <a:blip r:embed="rId3"/>
           <a:stretch>
             <a:fillRect/>
           </a:stretch>
@@ -13115,7 +13263,7 @@
           <a:bodyPr wrap="square" lIns="0" tIns="0" rIns="0" bIns="0" rtlCol="0" anchor="t"/>
           <a:lstStyle/>
           <a:p>
-            <a:pPr indent="0" marL="0">
+            <a:pPr marL="0" indent="0">
               <a:buNone/>
             </a:pPr>
             <a:r>
@@ -13129,9 +13277,6 @@
               </a:rPr>
               <a:t>Datenschutz: </a:t>
             </a:r>
-            <a:pPr indent="0" marL="0">
-              <a:buNone/>
-            </a:pPr>
             <a:r>
               <a:rPr lang="en-US" sz="1600" dirty="0">
                 <a:solidFill>
@@ -13167,7 +13312,7 @@
           </a:prstGeom>
           <a:extLst>
             <a:ext uri="{C572A759-6A51-4108-AA02-DFA0A04FC94B}">
-              <ma14:wrappingTextBoxFlag xmlns:ma14="http://schemas.microsoft.com/office/mac/drawingml/2011/main" val="0"/>
+              <ma14:wrappingTextBoxFlag xmlns:ma14="http://schemas.microsoft.com/office/mac/drawingml/2011/main" xmlns="" val="0"/>
             </a:ext>
           </a:extLst>
         </p:spPr>
@@ -13188,7 +13333,7 @@
           <a:p>
             <a:pPr algn="r"/>
             <a:fld id="{F7021451-1387-4CA6-816F-3879F97B5CBC}" type="slidenum">
-              <a:rPr b="0" lang="en-US"/>
+              <a:rPr lang="en-US" b="0"/>
               <a:t>6</a:t>
             </a:fld>
             <a:endParaRPr lang="en-US"/>
@@ -13241,11 +13386,11 @@
           <a:bodyPr wrap="square" lIns="0" tIns="0" rIns="0" bIns="0" rtlCol="0" anchor="ctr"/>
           <a:lstStyle/>
           <a:p>
-            <a:pPr indent="0" marL="0">
+            <a:pPr marL="0" indent="0">
               <a:buNone/>
             </a:pPr>
             <a:r>
-              <a:rPr lang="en-US" sz="1200" b="1" spc="200" kern="0" dirty="0">
+              <a:rPr lang="en-US" sz="1200" b="1" kern="0" spc="200" dirty="0">
                 <a:solidFill>
                   <a:schemeClr val="accent1"/>
                 </a:solidFill>
@@ -13284,7 +13429,7 @@
           <a:bodyPr wrap="square" lIns="0" tIns="0" rIns="0" bIns="0" rtlCol="0" anchor="ctr"/>
           <a:lstStyle/>
           <a:p>
-            <a:pPr algn="ctr" indent="0" marL="0">
+            <a:pPr marL="0" indent="0" algn="ctr">
               <a:buNone/>
             </a:pPr>
             <a:r>
@@ -13323,7 +13468,7 @@
           <a:bodyPr wrap="square" lIns="0" tIns="0" rIns="0" bIns="0" rtlCol="0" anchor="ctr"/>
           <a:lstStyle/>
           <a:p>
-            <a:pPr algn="r" indent="0" marL="0">
+            <a:pPr marL="0" indent="0" algn="r">
               <a:buNone/>
             </a:pPr>
             <a:r>
@@ -13344,9 +13489,11 @@
       <p:sp>
         <p:nvSpPr>
           <p:cNvPr id="5" name="Text 0"/>
-          <p:cNvSpPr/>
+          <p:cNvSpPr>
+            <a:spLocks noGrp="1"/>
+          </p:cNvSpPr>
           <p:nvPr>
-            <p:ph idx="100" type="title" hasCustomPrompt="1"/>
+            <p:ph type="title" idx="100" hasCustomPrompt="1"/>
           </p:nvPr>
         </p:nvSpPr>
         <p:spPr>
@@ -13364,7 +13511,7 @@
           <a:bodyPr wrap="square" lIns="0" tIns="0" rIns="0" bIns="0" rtlCol="0" anchor="t"/>
           <a:lstStyle/>
           <a:p>
-            <a:pPr algn="l" indent="0" marL="0">
+            <a:pPr marL="0" indent="0" algn="l">
               <a:buNone/>
             </a:pPr>
             <a:r>
@@ -13398,16 +13545,34 @@
         </p:nvGraphicFramePr>
         <p:xfrm>
           <a:off x="640080" y="1783080"/>
-          <a:ext cx="10908792" cy="914400"/>
+          <a:ext cx="10908792" cy="3840480"/>
         </p:xfrm>
         <a:graphic>
           <a:graphicData uri="http://schemas.openxmlformats.org/drawingml/2006/table">
             <a:tbl>
               <a:tblPr/>
               <a:tblGrid>
-                <a:gridCol w="2651760"/>
-                <a:gridCol w="4297680"/>
-                <a:gridCol w="3959352"/>
+                <a:gridCol w="2651760">
+                  <a:extLst>
+                    <a:ext uri="{9D8B030D-6E8A-4147-A177-3AD203B41FA5}">
+                      <a16:colId xmlns:a16="http://schemas.microsoft.com/office/drawing/2014/main" val="20000"/>
+                    </a:ext>
+                  </a:extLst>
+                </a:gridCol>
+                <a:gridCol w="4297680">
+                  <a:extLst>
+                    <a:ext uri="{9D8B030D-6E8A-4147-A177-3AD203B41FA5}">
+                      <a16:colId xmlns:a16="http://schemas.microsoft.com/office/drawing/2014/main" val="20001"/>
+                    </a:ext>
+                  </a:extLst>
+                </a:gridCol>
+                <a:gridCol w="3959352">
+                  <a:extLst>
+                    <a:ext uri="{9D8B030D-6E8A-4147-A177-3AD203B41FA5}">
+                      <a16:colId xmlns:a16="http://schemas.microsoft.com/office/drawing/2014/main" val="20002"/>
+                    </a:ext>
+                  </a:extLst>
+                </a:gridCol>
               </a:tblGrid>
               <a:tr h="640080">
                 <a:tc>
@@ -13415,7 +13580,7 @@
                     <a:bodyPr/>
                     <a:lstStyle/>
                     <a:p>
-                      <a:pPr algn="l" indent="0" marL="0">
+                      <a:pPr marL="0" indent="0" algn="l">
                         <a:buNone/>
                       </a:pPr>
                       <a:r>
@@ -13436,7 +13601,7 @@
                       </a:endParaRPr>
                     </a:p>
                   </a:txBody>
-                  <a:tcPr marL="91440" marR="91440" marT="45720" marB="45720" anchor="ctr">
+                  <a:tcPr anchor="ctr">
                     <a:lnL w="6350" cap="flat" cmpd="sng" algn="ctr">
                       <a:solidFill>
                         <a:srgbClr val="D3DEE6"/>
@@ -13483,7 +13648,7 @@
                     <a:bodyPr/>
                     <a:lstStyle/>
                     <a:p>
-                      <a:pPr algn="l" indent="0" marL="0">
+                      <a:pPr marL="0" indent="0" algn="l">
                         <a:buNone/>
                       </a:pPr>
                       <a:r>
@@ -13504,7 +13669,7 @@
                       </a:endParaRPr>
                     </a:p>
                   </a:txBody>
-                  <a:tcPr marL="91440" marR="91440" marT="45720" marB="45720" anchor="ctr">
+                  <a:tcPr anchor="ctr">
                     <a:lnL w="6350" cap="flat" cmpd="sng" algn="ctr">
                       <a:solidFill>
                         <a:srgbClr val="D3DEE6"/>
@@ -13551,7 +13716,7 @@
                     <a:bodyPr/>
                     <a:lstStyle/>
                     <a:p>
-                      <a:pPr algn="l" indent="0" marL="0">
+                      <a:pPr marL="0" indent="0" algn="l">
                         <a:buNone/>
                       </a:pPr>
                       <a:r>
@@ -13572,7 +13737,7 @@
                       </a:endParaRPr>
                     </a:p>
                   </a:txBody>
-                  <a:tcPr marL="91440" marR="91440" marT="45720" marB="45720" anchor="ctr">
+                  <a:tcPr anchor="ctr">
                     <a:lnL w="6350" cap="flat" cmpd="sng" algn="ctr">
                       <a:solidFill>
                         <a:srgbClr val="D3DEE6"/>
@@ -13614,6 +13779,11 @@
                     </a:solidFill>
                   </a:tcPr>
                 </a:tc>
+                <a:extLst>
+                  <a:ext uri="{0D108BD9-81ED-4DB2-BD59-A6C34878D82A}">
+                    <a16:rowId xmlns:a16="http://schemas.microsoft.com/office/drawing/2014/main" val="10000"/>
+                  </a:ext>
+                </a:extLst>
               </a:tr>
               <a:tr h="640080">
                 <a:tc>
@@ -13621,7 +13791,7 @@
                     <a:bodyPr/>
                     <a:lstStyle/>
                     <a:p>
-                      <a:pPr indent="0" marL="0">
+                      <a:pPr marL="0" indent="0">
                         <a:buNone/>
                       </a:pPr>
                       <a:r>
@@ -13642,7 +13812,7 @@
                       </a:endParaRPr>
                     </a:p>
                   </a:txBody>
-                  <a:tcPr marL="91440" marR="91440" marT="45720" marB="45720" anchor="ctr">
+                  <a:tcPr anchor="ctr">
                     <a:lnL w="6350" cap="flat" cmpd="sng" algn="ctr">
                       <a:solidFill>
                         <a:srgbClr val="D3DEE6"/>
@@ -13689,7 +13859,7 @@
                     <a:bodyPr/>
                     <a:lstStyle/>
                     <a:p>
-                      <a:pPr indent="0" marL="0">
+                      <a:pPr marL="0" indent="0">
                         <a:buNone/>
                       </a:pPr>
                       <a:r>
@@ -13710,7 +13880,7 @@
                       </a:endParaRPr>
                     </a:p>
                   </a:txBody>
-                  <a:tcPr marL="91440" marR="91440" marT="45720" marB="45720" anchor="ctr">
+                  <a:tcPr anchor="ctr">
                     <a:lnL w="6350" cap="flat" cmpd="sng" algn="ctr">
                       <a:solidFill>
                         <a:srgbClr val="D3DEE6"/>
@@ -13757,7 +13927,7 @@
                     <a:bodyPr/>
                     <a:lstStyle/>
                     <a:p>
-                      <a:pPr indent="0" marL="0">
+                      <a:pPr marL="0" indent="0">
                         <a:buNone/>
                       </a:pPr>
                       <a:r>
@@ -13778,7 +13948,7 @@
                       </a:endParaRPr>
                     </a:p>
                   </a:txBody>
-                  <a:tcPr marL="91440" marR="91440" marT="45720" marB="45720" anchor="ctr">
+                  <a:tcPr anchor="ctr">
                     <a:lnL w="6350" cap="flat" cmpd="sng" algn="ctr">
                       <a:solidFill>
                         <a:srgbClr val="D3DEE6"/>
@@ -13820,6 +13990,11 @@
                     </a:solidFill>
                   </a:tcPr>
                 </a:tc>
+                <a:extLst>
+                  <a:ext uri="{0D108BD9-81ED-4DB2-BD59-A6C34878D82A}">
+                    <a16:rowId xmlns:a16="http://schemas.microsoft.com/office/drawing/2014/main" val="10001"/>
+                  </a:ext>
+                </a:extLst>
               </a:tr>
               <a:tr h="640080">
                 <a:tc>
@@ -13827,7 +14002,7 @@
                     <a:bodyPr/>
                     <a:lstStyle/>
                     <a:p>
-                      <a:pPr indent="0" marL="0">
+                      <a:pPr marL="0" indent="0">
                         <a:buNone/>
                       </a:pPr>
                       <a:r>
@@ -13848,7 +14023,7 @@
                       </a:endParaRPr>
                     </a:p>
                   </a:txBody>
-                  <a:tcPr marL="91440" marR="91440" marT="45720" marB="45720" anchor="ctr">
+                  <a:tcPr anchor="ctr">
                     <a:lnL w="6350" cap="flat" cmpd="sng" algn="ctr">
                       <a:solidFill>
                         <a:srgbClr val="D3DEE6"/>
@@ -13895,7 +14070,7 @@
                     <a:bodyPr/>
                     <a:lstStyle/>
                     <a:p>
-                      <a:pPr indent="0" marL="0">
+                      <a:pPr marL="0" indent="0">
                         <a:buNone/>
                       </a:pPr>
                       <a:r>
@@ -13916,7 +14091,7 @@
                       </a:endParaRPr>
                     </a:p>
                   </a:txBody>
-                  <a:tcPr marL="91440" marR="91440" marT="45720" marB="45720" anchor="ctr">
+                  <a:tcPr anchor="ctr">
                     <a:lnL w="6350" cap="flat" cmpd="sng" algn="ctr">
                       <a:solidFill>
                         <a:srgbClr val="D3DEE6"/>
@@ -13963,7 +14138,7 @@
                     <a:bodyPr/>
                     <a:lstStyle/>
                     <a:p>
-                      <a:pPr indent="0" marL="0">
+                      <a:pPr marL="0" indent="0">
                         <a:buNone/>
                       </a:pPr>
                       <a:r>
@@ -13984,7 +14159,7 @@
                       </a:endParaRPr>
                     </a:p>
                   </a:txBody>
-                  <a:tcPr marL="91440" marR="91440" marT="45720" marB="45720" anchor="ctr">
+                  <a:tcPr anchor="ctr">
                     <a:lnL w="6350" cap="flat" cmpd="sng" algn="ctr">
                       <a:solidFill>
                         <a:srgbClr val="D3DEE6"/>
@@ -14026,6 +14201,11 @@
                     </a:solidFill>
                   </a:tcPr>
                 </a:tc>
+                <a:extLst>
+                  <a:ext uri="{0D108BD9-81ED-4DB2-BD59-A6C34878D82A}">
+                    <a16:rowId xmlns:a16="http://schemas.microsoft.com/office/drawing/2014/main" val="10002"/>
+                  </a:ext>
+                </a:extLst>
               </a:tr>
               <a:tr h="640080">
                 <a:tc>
@@ -14033,7 +14213,7 @@
                     <a:bodyPr/>
                     <a:lstStyle/>
                     <a:p>
-                      <a:pPr indent="0" marL="0">
+                      <a:pPr marL="0" indent="0">
                         <a:buNone/>
                       </a:pPr>
                       <a:r>
@@ -14054,7 +14234,7 @@
                       </a:endParaRPr>
                     </a:p>
                   </a:txBody>
-                  <a:tcPr marL="91440" marR="91440" marT="45720" marB="45720" anchor="ctr">
+                  <a:tcPr anchor="ctr">
                     <a:lnL w="6350" cap="flat" cmpd="sng" algn="ctr">
                       <a:solidFill>
                         <a:srgbClr val="D3DEE6"/>
@@ -14101,7 +14281,7 @@
                     <a:bodyPr/>
                     <a:lstStyle/>
                     <a:p>
-                      <a:pPr indent="0" marL="0">
+                      <a:pPr marL="0" indent="0">
                         <a:buNone/>
                       </a:pPr>
                       <a:r>
@@ -14122,7 +14302,7 @@
                       </a:endParaRPr>
                     </a:p>
                   </a:txBody>
-                  <a:tcPr marL="91440" marR="91440" marT="45720" marB="45720" anchor="ctr">
+                  <a:tcPr anchor="ctr">
                     <a:lnL w="6350" cap="flat" cmpd="sng" algn="ctr">
                       <a:solidFill>
                         <a:srgbClr val="D3DEE6"/>
@@ -14169,7 +14349,7 @@
                     <a:bodyPr/>
                     <a:lstStyle/>
                     <a:p>
-                      <a:pPr indent="0" marL="0">
+                      <a:pPr marL="0" indent="0">
                         <a:buNone/>
                       </a:pPr>
                       <a:r>
@@ -14190,7 +14370,7 @@
                       </a:endParaRPr>
                     </a:p>
                   </a:txBody>
-                  <a:tcPr marL="91440" marR="91440" marT="45720" marB="45720" anchor="ctr">
+                  <a:tcPr anchor="ctr">
                     <a:lnL w="6350" cap="flat" cmpd="sng" algn="ctr">
                       <a:solidFill>
                         <a:srgbClr val="D3DEE6"/>
@@ -14232,6 +14412,11 @@
                     </a:solidFill>
                   </a:tcPr>
                 </a:tc>
+                <a:extLst>
+                  <a:ext uri="{0D108BD9-81ED-4DB2-BD59-A6C34878D82A}">
+                    <a16:rowId xmlns:a16="http://schemas.microsoft.com/office/drawing/2014/main" val="10003"/>
+                  </a:ext>
+                </a:extLst>
               </a:tr>
               <a:tr h="640080">
                 <a:tc>
@@ -14239,7 +14424,7 @@
                     <a:bodyPr/>
                     <a:lstStyle/>
                     <a:p>
-                      <a:pPr indent="0" marL="0">
+                      <a:pPr marL="0" indent="0">
                         <a:buNone/>
                       </a:pPr>
                       <a:r>
@@ -14260,7 +14445,7 @@
                       </a:endParaRPr>
                     </a:p>
                   </a:txBody>
-                  <a:tcPr marL="91440" marR="91440" marT="45720" marB="45720" anchor="ctr">
+                  <a:tcPr anchor="ctr">
                     <a:lnL w="6350" cap="flat" cmpd="sng" algn="ctr">
                       <a:solidFill>
                         <a:srgbClr val="D3DEE6"/>
@@ -14307,7 +14492,7 @@
                     <a:bodyPr/>
                     <a:lstStyle/>
                     <a:p>
-                      <a:pPr indent="0" marL="0">
+                      <a:pPr marL="0" indent="0">
                         <a:buNone/>
                       </a:pPr>
                       <a:r>
@@ -14328,7 +14513,7 @@
                       </a:endParaRPr>
                     </a:p>
                   </a:txBody>
-                  <a:tcPr marL="91440" marR="91440" marT="45720" marB="45720" anchor="ctr">
+                  <a:tcPr anchor="ctr">
                     <a:lnL w="6350" cap="flat" cmpd="sng" algn="ctr">
                       <a:solidFill>
                         <a:srgbClr val="D3DEE6"/>
@@ -14375,7 +14560,7 @@
                     <a:bodyPr/>
                     <a:lstStyle/>
                     <a:p>
-                      <a:pPr indent="0" marL="0">
+                      <a:pPr marL="0" indent="0">
                         <a:buNone/>
                       </a:pPr>
                       <a:r>
@@ -14396,7 +14581,7 @@
                       </a:endParaRPr>
                     </a:p>
                   </a:txBody>
-                  <a:tcPr marL="91440" marR="91440" marT="45720" marB="45720" anchor="ctr">
+                  <a:tcPr anchor="ctr">
                     <a:lnL w="6350" cap="flat" cmpd="sng" algn="ctr">
                       <a:solidFill>
                         <a:srgbClr val="D3DEE6"/>
@@ -14438,6 +14623,11 @@
                     </a:solidFill>
                   </a:tcPr>
                 </a:tc>
+                <a:extLst>
+                  <a:ext uri="{0D108BD9-81ED-4DB2-BD59-A6C34878D82A}">
+                    <a16:rowId xmlns:a16="http://schemas.microsoft.com/office/drawing/2014/main" val="10004"/>
+                  </a:ext>
+                </a:extLst>
               </a:tr>
               <a:tr h="640080">
                 <a:tc>
@@ -14445,7 +14635,7 @@
                     <a:bodyPr/>
                     <a:lstStyle/>
                     <a:p>
-                      <a:pPr indent="0" marL="0">
+                      <a:pPr marL="0" indent="0">
                         <a:buNone/>
                       </a:pPr>
                       <a:r>
@@ -14466,7 +14656,7 @@
                       </a:endParaRPr>
                     </a:p>
                   </a:txBody>
-                  <a:tcPr marL="91440" marR="91440" marT="45720" marB="45720" anchor="ctr">
+                  <a:tcPr anchor="ctr">
                     <a:lnL w="6350" cap="flat" cmpd="sng" algn="ctr">
                       <a:solidFill>
                         <a:srgbClr val="D3DEE6"/>
@@ -14513,7 +14703,7 @@
                     <a:bodyPr/>
                     <a:lstStyle/>
                     <a:p>
-                      <a:pPr indent="0" marL="0">
+                      <a:pPr marL="0" indent="0">
                         <a:buNone/>
                       </a:pPr>
                       <a:r>
@@ -14534,7 +14724,7 @@
                       </a:endParaRPr>
                     </a:p>
                   </a:txBody>
-                  <a:tcPr marL="91440" marR="91440" marT="45720" marB="45720" anchor="ctr">
+                  <a:tcPr anchor="ctr">
                     <a:lnL w="6350" cap="flat" cmpd="sng" algn="ctr">
                       <a:solidFill>
                         <a:srgbClr val="D3DEE6"/>
@@ -14581,7 +14771,7 @@
                     <a:bodyPr/>
                     <a:lstStyle/>
                     <a:p>
-                      <a:pPr indent="0" marL="0">
+                      <a:pPr marL="0" indent="0">
                         <a:buNone/>
                       </a:pPr>
                       <a:r>
@@ -14602,7 +14792,7 @@
                       </a:endParaRPr>
                     </a:p>
                   </a:txBody>
-                  <a:tcPr marL="91440" marR="91440" marT="45720" marB="45720" anchor="ctr">
+                  <a:tcPr anchor="ctr">
                     <a:lnL w="6350" cap="flat" cmpd="sng" algn="ctr">
                       <a:solidFill>
                         <a:srgbClr val="D3DEE6"/>
@@ -14644,6 +14834,11 @@
                     </a:solidFill>
                   </a:tcPr>
                 </a:tc>
+                <a:extLst>
+                  <a:ext uri="{0D108BD9-81ED-4DB2-BD59-A6C34878D82A}">
+                    <a16:rowId xmlns:a16="http://schemas.microsoft.com/office/drawing/2014/main" val="10005"/>
+                  </a:ext>
+                </a:extLst>
               </a:tr>
             </a:tbl>
           </a:graphicData>
@@ -14669,7 +14864,7 @@
           </a:prstGeom>
           <a:extLst>
             <a:ext uri="{C572A759-6A51-4108-AA02-DFA0A04FC94B}">
-              <ma14:wrappingTextBoxFlag xmlns:ma14="http://schemas.microsoft.com/office/mac/drawingml/2011/main" val="0"/>
+              <ma14:wrappingTextBoxFlag xmlns:ma14="http://schemas.microsoft.com/office/mac/drawingml/2011/main" xmlns="" val="0"/>
             </a:ext>
           </a:extLst>
         </p:spPr>
@@ -14690,7 +14885,7 @@
           <a:p>
             <a:pPr algn="r"/>
             <a:fld id="{F7021451-1387-4CA6-816F-3879F97B5CBC}" type="slidenum">
-              <a:rPr b="0" lang="en-US"/>
+              <a:rPr lang="en-US" b="0"/>
               <a:t>7</a:t>
             </a:fld>
             <a:endParaRPr lang="en-US"/>
@@ -14743,11 +14938,11 @@
           <a:bodyPr wrap="square" lIns="0" tIns="0" rIns="0" bIns="0" rtlCol="0" anchor="ctr"/>
           <a:lstStyle/>
           <a:p>
-            <a:pPr indent="0" marL="0">
+            <a:pPr marL="0" indent="0">
               <a:buNone/>
             </a:pPr>
             <a:r>
-              <a:rPr lang="en-US" sz="1200" b="1" spc="200" kern="0" dirty="0">
+              <a:rPr lang="en-US" sz="1200" b="1" kern="0" spc="200" dirty="0">
                 <a:solidFill>
                   <a:schemeClr val="accent1"/>
                 </a:solidFill>
@@ -14786,7 +14981,7 @@
           <a:bodyPr wrap="square" lIns="0" tIns="0" rIns="0" bIns="0" rtlCol="0" anchor="ctr"/>
           <a:lstStyle/>
           <a:p>
-            <a:pPr algn="ctr" indent="0" marL="0">
+            <a:pPr marL="0" indent="0" algn="ctr">
               <a:buNone/>
             </a:pPr>
             <a:r>
@@ -14825,7 +15020,7 @@
           <a:bodyPr wrap="square" lIns="0" tIns="0" rIns="0" bIns="0" rtlCol="0" anchor="ctr"/>
           <a:lstStyle/>
           <a:p>
-            <a:pPr algn="r" indent="0" marL="0">
+            <a:pPr marL="0" indent="0" algn="r">
               <a:buNone/>
             </a:pPr>
             <a:r>
@@ -14846,9 +15041,11 @@
       <p:sp>
         <p:nvSpPr>
           <p:cNvPr id="5" name="Text 0"/>
-          <p:cNvSpPr/>
+          <p:cNvSpPr>
+            <a:spLocks noGrp="1"/>
+          </p:cNvSpPr>
           <p:nvPr>
-            <p:ph idx="100" type="title" hasCustomPrompt="1"/>
+            <p:ph type="title" idx="100" hasCustomPrompt="1"/>
           </p:nvPr>
         </p:nvSpPr>
         <p:spPr>
@@ -14866,7 +15063,7 @@
           <a:bodyPr wrap="square" lIns="0" tIns="0" rIns="0" bIns="0" rtlCol="0" anchor="t"/>
           <a:lstStyle/>
           <a:p>
-            <a:pPr algn="l" indent="0" marL="0">
+            <a:pPr marL="0" indent="0" algn="l">
               <a:buNone/>
             </a:pPr>
             <a:r>
@@ -14910,6 +15107,13 @@
             <a:prstDash val="solid"/>
           </a:ln>
         </p:spPr>
+        <p:txBody>
+          <a:bodyPr/>
+          <a:lstStyle/>
+          <a:p>
+            <a:endParaRPr lang="de-DE"/>
+          </a:p>
+        </p:txBody>
       </p:sp>
       <p:sp>
         <p:nvSpPr>
@@ -14936,7 +15140,7 @@
           <a:bodyPr wrap="square" lIns="0" tIns="0" rIns="0" bIns="0" rtlCol="0" anchor="ctr"/>
           <a:lstStyle/>
           <a:p>
-            <a:pPr algn="ctr" indent="0" marL="0">
+            <a:pPr marL="0" indent="0" algn="ctr">
               <a:buNone/>
             </a:pPr>
             <a:r>
@@ -14975,7 +15179,7 @@
           <a:bodyPr wrap="square" lIns="0" tIns="0" rIns="0" bIns="0" rtlCol="0" anchor="t"/>
           <a:lstStyle/>
           <a:p>
-            <a:pPr indent="0" marL="0">
+            <a:pPr marL="0" indent="0">
               <a:buNone/>
             </a:pPr>
             <a:r>
@@ -15014,7 +15218,7 @@
           <a:bodyPr wrap="square" lIns="0" tIns="0" rIns="0" bIns="0" rtlCol="0" anchor="t"/>
           <a:lstStyle/>
           <a:p>
-            <a:pPr indent="0" marL="0">
+            <a:pPr marL="0" indent="0">
               <a:buNone/>
             </a:pPr>
             <a:r>
@@ -15053,7 +15257,7 @@
           <a:bodyPr wrap="square" lIns="0" tIns="0" rIns="0" bIns="0" rtlCol="0" anchor="t"/>
           <a:lstStyle/>
           <a:p>
-            <a:pPr indent="0" marL="0">
+            <a:pPr marL="0" indent="0">
               <a:buNone/>
             </a:pPr>
             <a:r>
@@ -15067,9 +15271,6 @@
               </a:rPr>
               <a:t>Wir: </a:t>
             </a:r>
-            <a:pPr indent="0" marL="0">
-              <a:buNone/>
-            </a:pPr>
             <a:r>
               <a:rPr lang="en-US" sz="1400" dirty="0">
                 <a:solidFill>
@@ -15106,7 +15307,7 @@
           <a:bodyPr wrap="square" lIns="0" tIns="0" rIns="0" bIns="0" rtlCol="0" anchor="t"/>
           <a:lstStyle/>
           <a:p>
-            <a:pPr indent="0" marL="0">
+            <a:pPr marL="0" indent="0">
               <a:buNone/>
             </a:pPr>
             <a:r>
@@ -15120,9 +15321,6 @@
               </a:rPr>
               <a:t>Anbieter: </a:t>
             </a:r>
-            <a:pPr indent="0" marL="0">
-              <a:buNone/>
-            </a:pPr>
             <a:r>
               <a:rPr lang="en-US" sz="1400" dirty="0">
                 <a:solidFill>
@@ -15164,6 +15362,13 @@
             <a:prstDash val="solid"/>
           </a:ln>
         </p:spPr>
+        <p:txBody>
+          <a:bodyPr/>
+          <a:lstStyle/>
+          <a:p>
+            <a:endParaRPr lang="de-DE"/>
+          </a:p>
+        </p:txBody>
       </p:sp>
       <p:sp>
         <p:nvSpPr>
@@ -15190,7 +15395,7 @@
           <a:bodyPr wrap="square" lIns="0" tIns="0" rIns="0" bIns="0" rtlCol="0" anchor="ctr"/>
           <a:lstStyle/>
           <a:p>
-            <a:pPr algn="ctr" indent="0" marL="0">
+            <a:pPr marL="0" indent="0" algn="ctr">
               <a:buNone/>
             </a:pPr>
             <a:r>
@@ -15229,7 +15434,7 @@
           <a:bodyPr wrap="square" lIns="0" tIns="0" rIns="0" bIns="0" rtlCol="0" anchor="t"/>
           <a:lstStyle/>
           <a:p>
-            <a:pPr indent="0" marL="0">
+            <a:pPr marL="0" indent="0">
               <a:buNone/>
             </a:pPr>
             <a:r>
@@ -15268,7 +15473,7 @@
           <a:bodyPr wrap="square" lIns="0" tIns="0" rIns="0" bIns="0" rtlCol="0" anchor="t"/>
           <a:lstStyle/>
           <a:p>
-            <a:pPr indent="0" marL="0">
+            <a:pPr marL="0" indent="0">
               <a:buNone/>
             </a:pPr>
             <a:r>
@@ -15307,7 +15512,7 @@
           <a:bodyPr wrap="square" lIns="0" tIns="0" rIns="0" bIns="0" rtlCol="0" anchor="t"/>
           <a:lstStyle/>
           <a:p>
-            <a:pPr indent="0" marL="0">
+            <a:pPr marL="0" indent="0">
               <a:buNone/>
             </a:pPr>
             <a:r>
@@ -15321,9 +15526,6 @@
               </a:rPr>
               <a:t>Wir: </a:t>
             </a:r>
-            <a:pPr indent="0" marL="0">
-              <a:buNone/>
-            </a:pPr>
             <a:r>
               <a:rPr lang="en-US" sz="1400" dirty="0">
                 <a:solidFill>
@@ -15360,7 +15562,7 @@
           <a:bodyPr wrap="square" lIns="0" tIns="0" rIns="0" bIns="0" rtlCol="0" anchor="t"/>
           <a:lstStyle/>
           <a:p>
-            <a:pPr indent="0" marL="0">
+            <a:pPr marL="0" indent="0">
               <a:buNone/>
             </a:pPr>
             <a:r>
@@ -15374,9 +15576,6 @@
               </a:rPr>
               <a:t>Anbieter: </a:t>
             </a:r>
-            <a:pPr indent="0" marL="0">
-              <a:buNone/>
-            </a:pPr>
             <a:r>
               <a:rPr lang="en-US" sz="1400" dirty="0">
                 <a:solidFill>
@@ -15418,6 +15617,13 @@
             <a:prstDash val="solid"/>
           </a:ln>
         </p:spPr>
+        <p:txBody>
+          <a:bodyPr/>
+          <a:lstStyle/>
+          <a:p>
+            <a:endParaRPr lang="de-DE"/>
+          </a:p>
+        </p:txBody>
       </p:sp>
       <p:sp>
         <p:nvSpPr>
@@ -15444,7 +15650,7 @@
           <a:bodyPr wrap="square" lIns="0" tIns="0" rIns="0" bIns="0" rtlCol="0" anchor="ctr"/>
           <a:lstStyle/>
           <a:p>
-            <a:pPr algn="ctr" indent="0" marL="0">
+            <a:pPr marL="0" indent="0" algn="ctr">
               <a:buNone/>
             </a:pPr>
             <a:r>
@@ -15483,7 +15689,7 @@
           <a:bodyPr wrap="square" lIns="0" tIns="0" rIns="0" bIns="0" rtlCol="0" anchor="t"/>
           <a:lstStyle/>
           <a:p>
-            <a:pPr indent="0" marL="0">
+            <a:pPr marL="0" indent="0">
               <a:buNone/>
             </a:pPr>
             <a:r>
@@ -15522,7 +15728,7 @@
           <a:bodyPr wrap="square" lIns="0" tIns="0" rIns="0" bIns="0" rtlCol="0" anchor="t"/>
           <a:lstStyle/>
           <a:p>
-            <a:pPr indent="0" marL="0">
+            <a:pPr marL="0" indent="0">
               <a:buNone/>
             </a:pPr>
             <a:r>
@@ -15561,7 +15767,7 @@
           <a:bodyPr wrap="square" lIns="0" tIns="0" rIns="0" bIns="0" rtlCol="0" anchor="t"/>
           <a:lstStyle/>
           <a:p>
-            <a:pPr indent="0" marL="0">
+            <a:pPr marL="0" indent="0">
               <a:buNone/>
             </a:pPr>
             <a:r>
@@ -15575,9 +15781,6 @@
               </a:rPr>
               <a:t>Wir: </a:t>
             </a:r>
-            <a:pPr indent="0" marL="0">
-              <a:buNone/>
-            </a:pPr>
             <a:r>
               <a:rPr lang="en-US" sz="1400" dirty="0">
                 <a:solidFill>
@@ -15614,7 +15817,7 @@
           <a:bodyPr wrap="square" lIns="0" tIns="0" rIns="0" bIns="0" rtlCol="0" anchor="t"/>
           <a:lstStyle/>
           <a:p>
-            <a:pPr indent="0" marL="0">
+            <a:pPr marL="0" indent="0">
               <a:buNone/>
             </a:pPr>
             <a:r>
@@ -15628,9 +15831,6 @@
               </a:rPr>
               <a:t>Anbieter: </a:t>
             </a:r>
-            <a:pPr indent="0" marL="0">
-              <a:buNone/>
-            </a:pPr>
             <a:r>
               <a:rPr lang="en-US" sz="1400" dirty="0">
                 <a:solidFill>
@@ -15667,7 +15867,7 @@
           <a:bodyPr wrap="square" lIns="0" tIns="0" rIns="0" bIns="0" rtlCol="0" anchor="t"/>
           <a:lstStyle/>
           <a:p>
-            <a:pPr indent="0" marL="0">
+            <a:pPr marL="0" indent="0">
               <a:buNone/>
             </a:pPr>
             <a:r>
@@ -15681,9 +15881,6 @@
               </a:rPr>
               <a:t>Unsere Einordnung: SaaS. </a:t>
             </a:r>
-            <a:pPr indent="0" marL="0">
-              <a:buNone/>
-            </a:pPr>
             <a:r>
               <a:rPr lang="en-US" sz="1800" dirty="0">
                 <a:solidFill>
@@ -15719,7 +15916,7 @@
           </a:prstGeom>
           <a:extLst>
             <a:ext uri="{C572A759-6A51-4108-AA02-DFA0A04FC94B}">
-              <ma14:wrappingTextBoxFlag xmlns:ma14="http://schemas.microsoft.com/office/mac/drawingml/2011/main" val="0"/>
+              <ma14:wrappingTextBoxFlag xmlns:ma14="http://schemas.microsoft.com/office/mac/drawingml/2011/main" xmlns="" val="0"/>
             </a:ext>
           </a:extLst>
         </p:spPr>
@@ -15740,7 +15937,7 @@
           <a:p>
             <a:pPr algn="r"/>
             <a:fld id="{F7021451-1387-4CA6-816F-3879F97B5CBC}" type="slidenum">
-              <a:rPr b="0" lang="en-US"/>
+              <a:rPr lang="en-US" b="0"/>
               <a:t>8</a:t>
             </a:fld>
             <a:endParaRPr lang="en-US"/>
@@ -15793,11 +15990,11 @@
           <a:bodyPr wrap="square" lIns="0" tIns="0" rIns="0" bIns="0" rtlCol="0" anchor="ctr"/>
           <a:lstStyle/>
           <a:p>
-            <a:pPr indent="0" marL="0">
+            <a:pPr marL="0" indent="0">
               <a:buNone/>
             </a:pPr>
             <a:r>
-              <a:rPr lang="en-US" sz="1200" b="1" spc="200" kern="0" dirty="0">
+              <a:rPr lang="en-US" sz="1200" b="1" kern="0" spc="200" dirty="0">
                 <a:solidFill>
                   <a:schemeClr val="accent1"/>
                 </a:solidFill>
@@ -15836,7 +16033,7 @@
           <a:bodyPr wrap="square" lIns="0" tIns="0" rIns="0" bIns="0" rtlCol="0" anchor="ctr"/>
           <a:lstStyle/>
           <a:p>
-            <a:pPr algn="ctr" indent="0" marL="0">
+            <a:pPr marL="0" indent="0" algn="ctr">
               <a:buNone/>
             </a:pPr>
             <a:r>
@@ -15875,7 +16072,7 @@
           <a:bodyPr wrap="square" lIns="0" tIns="0" rIns="0" bIns="0" rtlCol="0" anchor="ctr"/>
           <a:lstStyle/>
           <a:p>
-            <a:pPr algn="r" indent="0" marL="0">
+            <a:pPr marL="0" indent="0" algn="r">
               <a:buNone/>
             </a:pPr>
             <a:r>
@@ -15896,9 +16093,11 @@
       <p:sp>
         <p:nvSpPr>
           <p:cNvPr id="5" name="Text 0"/>
-          <p:cNvSpPr/>
+          <p:cNvSpPr>
+            <a:spLocks noGrp="1"/>
+          </p:cNvSpPr>
           <p:nvPr>
-            <p:ph idx="100" type="title" hasCustomPrompt="1"/>
+            <p:ph type="title" idx="100" hasCustomPrompt="1"/>
           </p:nvPr>
         </p:nvSpPr>
         <p:spPr>
@@ -15916,7 +16115,7 @@
           <a:bodyPr wrap="square" lIns="0" tIns="0" rIns="0" bIns="0" rtlCol="0" anchor="t"/>
           <a:lstStyle/>
           <a:p>
-            <a:pPr algn="l" indent="0" marL="0">
+            <a:pPr marL="0" indent="0" algn="l">
               <a:buNone/>
             </a:pPr>
             <a:r>
@@ -15960,6 +16159,13 @@
             <a:prstDash val="solid"/>
           </a:ln>
         </p:spPr>
+        <p:txBody>
+          <a:bodyPr/>
+          <a:lstStyle/>
+          <a:p>
+            <a:endParaRPr lang="de-DE"/>
+          </a:p>
+        </p:txBody>
       </p:sp>
       <p:sp>
         <p:nvSpPr>
@@ -15985,17 +16191,24 @@
             <a:prstDash val="solid"/>
           </a:ln>
         </p:spPr>
+        <p:txBody>
+          <a:bodyPr/>
+          <a:lstStyle/>
+          <a:p>
+            <a:endParaRPr lang="de-DE"/>
+          </a:p>
+        </p:txBody>
       </p:sp>
       <p:pic>
         <p:nvPicPr>
-          <p:cNvPr id="8" name="Image 0" descr="FaDatabase">    </p:cNvPr>
+          <p:cNvPr id="8" name="Image 0" descr="FaDatabase"/>
           <p:cNvPicPr>
             <a:picLocks noChangeAspect="1"/>
           </p:cNvPicPr>
           <p:nvPr/>
         </p:nvPicPr>
         <p:blipFill>
-          <a:blip r:embed="rId1"/>
+          <a:blip r:embed="rId3"/>
           <a:stretch>
             <a:fillRect/>
           </a:stretch>
@@ -16031,7 +16244,7 @@
           <a:bodyPr wrap="square" lIns="0" tIns="0" rIns="0" bIns="0" rtlCol="0" anchor="t"/>
           <a:lstStyle/>
           <a:p>
-            <a:pPr indent="0" marL="0">
+            <a:pPr marL="0" indent="0">
               <a:buNone/>
             </a:pPr>
             <a:r>
@@ -16075,6 +16288,13 @@
             <a:prstDash val="solid"/>
           </a:ln>
         </p:spPr>
+        <p:txBody>
+          <a:bodyPr/>
+          <a:lstStyle/>
+          <a:p>
+            <a:endParaRPr lang="de-DE"/>
+          </a:p>
+        </p:txBody>
       </p:sp>
       <p:sp>
         <p:nvSpPr>
@@ -16100,17 +16320,24 @@
             <a:prstDash val="solid"/>
           </a:ln>
         </p:spPr>
+        <p:txBody>
+          <a:bodyPr/>
+          <a:lstStyle/>
+          <a:p>
+            <a:endParaRPr lang="de-DE"/>
+          </a:p>
+        </p:txBody>
       </p:sp>
       <p:pic>
         <p:nvPicPr>
-          <p:cNvPr id="12" name="Image 1" descr="FaExclamationTriangle">    </p:cNvPr>
+          <p:cNvPr id="12" name="Image 1" descr="FaExclamationTriangle"/>
           <p:cNvPicPr>
             <a:picLocks noChangeAspect="1"/>
           </p:cNvPicPr>
           <p:nvPr/>
         </p:nvPicPr>
         <p:blipFill>
-          <a:blip r:embed="rId2"/>
+          <a:blip r:embed="rId4"/>
           <a:stretch>
             <a:fillRect/>
           </a:stretch>
@@ -16146,7 +16373,7 @@
           <a:bodyPr wrap="square" lIns="0" tIns="0" rIns="0" bIns="0" rtlCol="0" anchor="t"/>
           <a:lstStyle/>
           <a:p>
-            <a:pPr indent="0" marL="0">
+            <a:pPr marL="0" indent="0">
               <a:buNone/>
             </a:pPr>
             <a:r>
@@ -16190,6 +16417,13 @@
             <a:prstDash val="solid"/>
           </a:ln>
         </p:spPr>
+        <p:txBody>
+          <a:bodyPr/>
+          <a:lstStyle/>
+          <a:p>
+            <a:endParaRPr lang="de-DE"/>
+          </a:p>
+        </p:txBody>
       </p:sp>
       <p:sp>
         <p:nvSpPr>
@@ -16215,17 +16449,24 @@
             <a:prstDash val="solid"/>
           </a:ln>
         </p:spPr>
+        <p:txBody>
+          <a:bodyPr/>
+          <a:lstStyle/>
+          <a:p>
+            <a:endParaRPr lang="de-DE"/>
+          </a:p>
+        </p:txBody>
       </p:sp>
       <p:pic>
         <p:nvPicPr>
-          <p:cNvPr id="16" name="Image 2" descr="FaLock">    </p:cNvPr>
+          <p:cNvPr id="16" name="Image 2" descr="FaLock"/>
           <p:cNvPicPr>
             <a:picLocks noChangeAspect="1"/>
           </p:cNvPicPr>
           <p:nvPr/>
         </p:nvPicPr>
         <p:blipFill>
-          <a:blip r:embed="rId3"/>
+          <a:blip r:embed="rId5"/>
           <a:stretch>
             <a:fillRect/>
           </a:stretch>
@@ -16261,7 +16502,7 @@
           <a:bodyPr wrap="square" lIns="0" tIns="0" rIns="0" bIns="0" rtlCol="0" anchor="t"/>
           <a:lstStyle/>
           <a:p>
-            <a:pPr indent="0" marL="0">
+            <a:pPr marL="0" indent="0">
               <a:buNone/>
             </a:pPr>
             <a:r>
@@ -16406,7 +16647,7 @@
           <a:bodyPr wrap="square" lIns="0" tIns="0" rIns="0" bIns="0" rtlCol="0" anchor="t"/>
           <a:lstStyle/>
           <a:p>
-            <a:pPr indent="0" marL="0">
+            <a:pPr marL="0" indent="0">
               <a:buNone/>
             </a:pPr>
             <a:r>
@@ -16420,9 +16661,6 @@
               </a:rPr>
               <a:t>Kein Personenbezug </a:t>
             </a:r>
-            <a:pPr indent="0" marL="0">
-              <a:buNone/>
-            </a:pPr>
             <a:r>
               <a:rPr lang="en-US" sz="1400" dirty="0">
                 <a:solidFill>
@@ -16671,7 +16909,7 @@
           <a:bodyPr wrap="square" lIns="0" tIns="0" rIns="0" bIns="0" rtlCol="0" anchor="t"/>
           <a:lstStyle/>
           <a:p>
-            <a:pPr indent="0" marL="0">
+            <a:pPr marL="0" indent="0">
               <a:buNone/>
             </a:pPr>
             <a:r>
@@ -16685,9 +16923,6 @@
               </a:rPr>
               <a:t>Einschätzung: </a:t>
             </a:r>
-            <a:pPr indent="0" marL="0">
-              <a:buNone/>
-            </a:pPr>
             <a:r>
               <a:rPr lang="en-US" sz="1500" dirty="0">
                 <a:solidFill>
@@ -16723,7 +16958,7 @@
           </a:prstGeom>
           <a:extLst>
             <a:ext uri="{C572A759-6A51-4108-AA02-DFA0A04FC94B}">
-              <ma14:wrappingTextBoxFlag xmlns:ma14="http://schemas.microsoft.com/office/mac/drawingml/2011/main" val="0"/>
+              <ma14:wrappingTextBoxFlag xmlns:ma14="http://schemas.microsoft.com/office/mac/drawingml/2011/main" xmlns="" val="0"/>
             </a:ext>
           </a:extLst>
         </p:spPr>
@@ -16744,7 +16979,7 @@
           <a:p>
             <a:pPr algn="r"/>
             <a:fld id="{F7021451-1387-4CA6-816F-3879F97B5CBC}" type="slidenum">
-              <a:rPr b="0" lang="en-US"/>
+              <a:rPr lang="en-US" b="0"/>
               <a:t>9</a:t>
             </a:fld>
             <a:endParaRPr lang="en-US"/>
@@ -17052,4 +17287,319 @@
     </a:ext>
   </a:extLst>
 </a:theme>
+</file>
+
+<file path=ppt/theme/theme2.xml><?xml version="1.0" encoding="utf-8"?>
+<a:theme xmlns:a="http://schemas.openxmlformats.org/drawingml/2006/main" name="Office">
+  <a:themeElements>
+    <a:clrScheme name="Office">
+      <a:dk1>
+        <a:sysClr val="windowText" lastClr="000000"/>
+      </a:dk1>
+      <a:lt1>
+        <a:sysClr val="window" lastClr="FFFFFF"/>
+      </a:lt1>
+      <a:dk2>
+        <a:srgbClr val="0E2841"/>
+      </a:dk2>
+      <a:lt2>
+        <a:srgbClr val="E8E8E8"/>
+      </a:lt2>
+      <a:accent1>
+        <a:srgbClr val="156082"/>
+      </a:accent1>
+      <a:accent2>
+        <a:srgbClr val="E97132"/>
+      </a:accent2>
+      <a:accent3>
+        <a:srgbClr val="196B24"/>
+      </a:accent3>
+      <a:accent4>
+        <a:srgbClr val="0F9ED5"/>
+      </a:accent4>
+      <a:accent5>
+        <a:srgbClr val="A02B93"/>
+      </a:accent5>
+      <a:accent6>
+        <a:srgbClr val="4EA72E"/>
+      </a:accent6>
+      <a:hlink>
+        <a:srgbClr val="467886"/>
+      </a:hlink>
+      <a:folHlink>
+        <a:srgbClr val="96607D"/>
+      </a:folHlink>
+    </a:clrScheme>
+    <a:fontScheme name="Office">
+      <a:majorFont>
+        <a:latin typeface="Aptos Display" panose="02110004020202020204"/>
+        <a:ea typeface=""/>
+        <a:cs typeface=""/>
+        <a:font script="Jpan" typeface="游ゴシック Light"/>
+        <a:font script="Hang" typeface="맑은 고딕"/>
+        <a:font script="Hans" typeface="等线 Light"/>
+        <a:font script="Hant" typeface="新細明體"/>
+        <a:font script="Arab" typeface="Times New Roman"/>
+        <a:font script="Hebr" typeface="Times New Roman"/>
+        <a:font script="Thai" typeface="Angsana New"/>
+        <a:font script="Ethi" typeface="Nyala"/>
+        <a:font script="Beng" typeface="Vrinda"/>
+        <a:font script="Gujr" typeface="Shruti"/>
+        <a:font script="Khmr" typeface="MoolBoran"/>
+        <a:font script="Knda" typeface="Tunga"/>
+        <a:font script="Guru" typeface="Raavi"/>
+        <a:font script="Cans" typeface="Euphemia"/>
+        <a:font script="Cher" typeface="Plantagenet Cherokee"/>
+        <a:font script="Yiii" typeface="Microsoft Yi Baiti"/>
+        <a:font script="Tibt" typeface="Microsoft Himalaya"/>
+        <a:font script="Thaa" typeface="MV Boli"/>
+        <a:font script="Deva" typeface="Mangal"/>
+        <a:font script="Telu" typeface="Gautami"/>
+        <a:font script="Taml" typeface="Latha"/>
+        <a:font script="Syrc" typeface="Estrangelo Edessa"/>
+        <a:font script="Orya" typeface="Kalinga"/>
+        <a:font script="Mlym" typeface="Kartika"/>
+        <a:font script="Laoo" typeface="DokChampa"/>
+        <a:font script="Sinh" typeface="Iskoola Pota"/>
+        <a:font script="Mong" typeface="Mongolian Baiti"/>
+        <a:font script="Viet" typeface="Times New Roman"/>
+        <a:font script="Uigh" typeface="Microsoft Uighur"/>
+        <a:font script="Geor" typeface="Sylfaen"/>
+        <a:font script="Armn" typeface="Arial"/>
+        <a:font script="Bugi" typeface="Leelawadee UI"/>
+        <a:font script="Bopo" typeface="Microsoft JhengHei"/>
+        <a:font script="Java" typeface="Javanese Text"/>
+        <a:font script="Lisu" typeface="Segoe UI"/>
+        <a:font script="Mymr" typeface="Myanmar Text"/>
+        <a:font script="Nkoo" typeface="Ebrima"/>
+        <a:font script="Olck" typeface="Nirmala UI"/>
+        <a:font script="Osma" typeface="Ebrima"/>
+        <a:font script="Phag" typeface="Phagspa"/>
+        <a:font script="Syrn" typeface="Estrangelo Edessa"/>
+        <a:font script="Syrj" typeface="Estrangelo Edessa"/>
+        <a:font script="Syre" typeface="Estrangelo Edessa"/>
+        <a:font script="Sora" typeface="Nirmala UI"/>
+        <a:font script="Tale" typeface="Microsoft Tai Le"/>
+        <a:font script="Talu" typeface="Microsoft New Tai Lue"/>
+        <a:font script="Tfng" typeface="Ebrima"/>
+      </a:majorFont>
+      <a:minorFont>
+        <a:latin typeface="Aptos" panose="02110004020202020204"/>
+        <a:ea typeface=""/>
+        <a:cs typeface=""/>
+        <a:font script="Jpan" typeface="游ゴシック"/>
+        <a:font script="Hang" typeface="맑은 고딕"/>
+        <a:font script="Hans" typeface="等线"/>
+        <a:font script="Hant" typeface="新細明體"/>
+        <a:font script="Arab" typeface="Arial"/>
+        <a:font script="Hebr" typeface="Arial"/>
+        <a:font script="Thai" typeface="Cordia New"/>
+        <a:font script="Ethi" typeface="Nyala"/>
+        <a:font script="Beng" typeface="Vrinda"/>
+        <a:font script="Gujr" typeface="Shruti"/>
+        <a:font script="Khmr" typeface="DaunPenh"/>
+        <a:font script="Knda" typeface="Tunga"/>
+        <a:font script="Guru" typeface="Raavi"/>
+        <a:font script="Cans" typeface="Euphemia"/>
+        <a:font script="Cher" typeface="Plantagenet Cherokee"/>
+        <a:font script="Yiii" typeface="Microsoft Yi Baiti"/>
+        <a:font script="Tibt" typeface="Microsoft Himalaya"/>
+        <a:font script="Thaa" typeface="MV Boli"/>
+        <a:font script="Deva" typeface="Mangal"/>
+        <a:font script="Telu" typeface="Gautami"/>
+        <a:font script="Taml" typeface="Latha"/>
+        <a:font script="Syrc" typeface="Estrangelo Edessa"/>
+        <a:font script="Orya" typeface="Kalinga"/>
+        <a:font script="Mlym" typeface="Kartika"/>
+        <a:font script="Laoo" typeface="DokChampa"/>
+        <a:font script="Sinh" typeface="Iskoola Pota"/>
+        <a:font script="Mong" typeface="Mongolian Baiti"/>
+        <a:font script="Viet" typeface="Arial"/>
+        <a:font script="Uigh" typeface="Microsoft Uighur"/>
+        <a:font script="Geor" typeface="Sylfaen"/>
+        <a:font script="Armn" typeface="Arial"/>
+        <a:font script="Bugi" typeface="Leelawadee UI"/>
+        <a:font script="Bopo" typeface="Microsoft JhengHei"/>
+        <a:font script="Java" typeface="Javanese Text"/>
+        <a:font script="Lisu" typeface="Segoe UI"/>
+        <a:font script="Mymr" typeface="Myanmar Text"/>
+        <a:font script="Nkoo" typeface="Ebrima"/>
+        <a:font script="Olck" typeface="Nirmala UI"/>
+        <a:font script="Osma" typeface="Ebrima"/>
+        <a:font script="Phag" typeface="Phagspa"/>
+        <a:font script="Syrn" typeface="Estrangelo Edessa"/>
+        <a:font script="Syrj" typeface="Estrangelo Edessa"/>
+        <a:font script="Syre" typeface="Estrangelo Edessa"/>
+        <a:font script="Sora" typeface="Nirmala UI"/>
+        <a:font script="Tale" typeface="Microsoft Tai Le"/>
+        <a:font script="Talu" typeface="Microsoft New Tai Lue"/>
+        <a:font script="Tfng" typeface="Ebrima"/>
+      </a:minorFont>
+    </a:fontScheme>
+    <a:fmtScheme name="Office">
+      <a:fillStyleLst>
+        <a:solidFill>
+          <a:schemeClr val="phClr"/>
+        </a:solidFill>
+        <a:gradFill rotWithShape="1">
+          <a:gsLst>
+            <a:gs pos="0">
+              <a:schemeClr val="phClr">
+                <a:lumMod val="110000"/>
+                <a:satMod val="105000"/>
+                <a:tint val="67000"/>
+              </a:schemeClr>
+            </a:gs>
+            <a:gs pos="50000">
+              <a:schemeClr val="phClr">
+                <a:lumMod val="105000"/>
+                <a:satMod val="103000"/>
+                <a:tint val="73000"/>
+              </a:schemeClr>
+            </a:gs>
+            <a:gs pos="100000">
+              <a:schemeClr val="phClr">
+                <a:lumMod val="105000"/>
+                <a:satMod val="109000"/>
+                <a:tint val="81000"/>
+              </a:schemeClr>
+            </a:gs>
+          </a:gsLst>
+          <a:lin ang="5400000" scaled="0"/>
+        </a:gradFill>
+        <a:gradFill rotWithShape="1">
+          <a:gsLst>
+            <a:gs pos="0">
+              <a:schemeClr val="phClr">
+                <a:satMod val="103000"/>
+                <a:lumMod val="102000"/>
+                <a:tint val="94000"/>
+              </a:schemeClr>
+            </a:gs>
+            <a:gs pos="50000">
+              <a:schemeClr val="phClr">
+                <a:satMod val="110000"/>
+                <a:lumMod val="100000"/>
+                <a:shade val="100000"/>
+              </a:schemeClr>
+            </a:gs>
+            <a:gs pos="100000">
+              <a:schemeClr val="phClr">
+                <a:lumMod val="99000"/>
+                <a:satMod val="120000"/>
+                <a:shade val="78000"/>
+              </a:schemeClr>
+            </a:gs>
+          </a:gsLst>
+          <a:lin ang="5400000" scaled="0"/>
+        </a:gradFill>
+      </a:fillStyleLst>
+      <a:lnStyleLst>
+        <a:ln w="12700" cap="flat" cmpd="sng" algn="ctr">
+          <a:solidFill>
+            <a:schemeClr val="phClr"/>
+          </a:solidFill>
+          <a:prstDash val="solid"/>
+          <a:miter lim="800000"/>
+        </a:ln>
+        <a:ln w="19050" cap="flat" cmpd="sng" algn="ctr">
+          <a:solidFill>
+            <a:schemeClr val="phClr"/>
+          </a:solidFill>
+          <a:prstDash val="solid"/>
+          <a:miter lim="800000"/>
+        </a:ln>
+        <a:ln w="25400" cap="flat" cmpd="sng" algn="ctr">
+          <a:solidFill>
+            <a:schemeClr val="phClr"/>
+          </a:solidFill>
+          <a:prstDash val="solid"/>
+          <a:miter lim="800000"/>
+        </a:ln>
+      </a:lnStyleLst>
+      <a:effectStyleLst>
+        <a:effectStyle>
+          <a:effectLst/>
+        </a:effectStyle>
+        <a:effectStyle>
+          <a:effectLst/>
+        </a:effectStyle>
+        <a:effectStyle>
+          <a:effectLst>
+            <a:outerShdw blurRad="57150" dist="19050" dir="5400000" algn="ctr" rotWithShape="0">
+              <a:srgbClr val="000000">
+                <a:alpha val="63000"/>
+              </a:srgbClr>
+            </a:outerShdw>
+          </a:effectLst>
+        </a:effectStyle>
+      </a:effectStyleLst>
+      <a:bgFillStyleLst>
+        <a:solidFill>
+          <a:schemeClr val="phClr"/>
+        </a:solidFill>
+        <a:solidFill>
+          <a:schemeClr val="phClr">
+            <a:tint val="95000"/>
+            <a:satMod val="170000"/>
+          </a:schemeClr>
+        </a:solidFill>
+        <a:gradFill rotWithShape="1">
+          <a:gsLst>
+            <a:gs pos="0">
+              <a:schemeClr val="phClr">
+                <a:tint val="93000"/>
+                <a:satMod val="150000"/>
+                <a:shade val="98000"/>
+                <a:lumMod val="102000"/>
+              </a:schemeClr>
+            </a:gs>
+            <a:gs pos="50000">
+              <a:schemeClr val="phClr">
+                <a:tint val="98000"/>
+                <a:satMod val="130000"/>
+                <a:shade val="90000"/>
+                <a:lumMod val="103000"/>
+              </a:schemeClr>
+            </a:gs>
+            <a:gs pos="100000">
+              <a:schemeClr val="phClr">
+                <a:shade val="63000"/>
+                <a:satMod val="120000"/>
+              </a:schemeClr>
+            </a:gs>
+          </a:gsLst>
+          <a:lin ang="5400000" scaled="0"/>
+        </a:gradFill>
+      </a:bgFillStyleLst>
+    </a:fmtScheme>
+  </a:themeElements>
+  <a:objectDefaults>
+    <a:lnDef>
+      <a:spPr/>
+      <a:bodyPr/>
+      <a:lstStyle/>
+      <a:style>
+        <a:lnRef idx="2">
+          <a:schemeClr val="accent1"/>
+        </a:lnRef>
+        <a:fillRef idx="0">
+          <a:schemeClr val="accent1"/>
+        </a:fillRef>
+        <a:effectRef idx="1">
+          <a:schemeClr val="accent1"/>
+        </a:effectRef>
+        <a:fontRef idx="minor">
+          <a:schemeClr val="tx1"/>
+        </a:fontRef>
+      </a:style>
+    </a:lnDef>
+  </a:objectDefaults>
+  <a:extraClrSchemeLst/>
+  <a:extLst>
+    <a:ext uri="{05A4C25C-085E-4340-85A3-A5531E510DB2}">
+      <thm15:themeFamily xmlns:thm15="http://schemas.microsoft.com/office/thememl/2012/main" name="Office Theme" id="{2E142A2C-CD16-42D6-873A-C26D2A0506FA}" vid="{1BDDFF52-6CD6-40A5-AB3C-68EB2F1E4D0A}"/>
+    </a:ext>
+  </a:extLst>
+</a:theme>
 </file>
--- a/Challenge-III-Ice-Truck-Cloud/Praesentation/ice-truck-in-der-cloud.pptx
+++ b/Challenge-III-Ice-Truck-Cloud/Praesentation/ice-truck-in-der-cloud.pptx
@@ -1571,7 +1571,7 @@
           </a:prstGeom>
           <a:extLst>
             <a:ext uri="{C572A759-6A51-4108-AA02-DFA0A04FC94B}">
-              <ma14:wrappingTextBoxFlag xmlns:ma14="http://schemas.microsoft.com/office/mac/drawingml/2011/main" xmlns="" val="0"/>
+              <ma14:wrappingTextBoxFlag xmlns="" xmlns:ma14="http://schemas.microsoft.com/office/mac/drawingml/2011/main" val="0"/>
             </a:ext>
           </a:extLst>
         </p:spPr>
@@ -1735,7 +1735,7 @@
           </a:prstGeom>
           <a:extLst>
             <a:ext uri="{C572A759-6A51-4108-AA02-DFA0A04FC94B}">
-              <ma14:wrappingTextBoxFlag xmlns:ma14="http://schemas.microsoft.com/office/mac/drawingml/2011/main" xmlns="" val="0"/>
+              <ma14:wrappingTextBoxFlag xmlns="" xmlns:ma14="http://schemas.microsoft.com/office/mac/drawingml/2011/main" val="0"/>
             </a:ext>
           </a:extLst>
         </p:spPr>
@@ -1899,7 +1899,7 @@
           </a:prstGeom>
           <a:extLst>
             <a:ext uri="{C572A759-6A51-4108-AA02-DFA0A04FC94B}">
-              <ma14:wrappingTextBoxFlag xmlns:ma14="http://schemas.microsoft.com/office/mac/drawingml/2011/main" xmlns="" val="0"/>
+              <ma14:wrappingTextBoxFlag xmlns="" xmlns:ma14="http://schemas.microsoft.com/office/mac/drawingml/2011/main" val="0"/>
             </a:ext>
           </a:extLst>
         </p:spPr>
@@ -2063,7 +2063,7 @@
           </a:prstGeom>
           <a:extLst>
             <a:ext uri="{C572A759-6A51-4108-AA02-DFA0A04FC94B}">
-              <ma14:wrappingTextBoxFlag xmlns:ma14="http://schemas.microsoft.com/office/mac/drawingml/2011/main" xmlns="" val="0"/>
+              <ma14:wrappingTextBoxFlag xmlns="" xmlns:ma14="http://schemas.microsoft.com/office/mac/drawingml/2011/main" val="0"/>
             </a:ext>
           </a:extLst>
         </p:spPr>
@@ -2141,7 +2141,7 @@
           </a:prstGeom>
           <a:extLst>
             <a:ext uri="{C572A759-6A51-4108-AA02-DFA0A04FC94B}">
-              <ma14:wrappingTextBoxFlag xmlns:ma14="http://schemas.microsoft.com/office/mac/drawingml/2011/main" xmlns="" val="0"/>
+              <ma14:wrappingTextBoxFlag xmlns="" xmlns:ma14="http://schemas.microsoft.com/office/mac/drawingml/2011/main" val="0"/>
             </a:ext>
           </a:extLst>
         </p:spPr>
@@ -2665,88 +2665,6 @@
       </p:sp>
       <p:sp>
         <p:nvSpPr>
-          <p:cNvPr id="8" name="Status"/>
-          <p:cNvSpPr/>
-          <p:nvPr/>
-        </p:nvSpPr>
-        <p:spPr>
-          <a:xfrm>
-            <a:off x="640080" y="4572000"/>
-            <a:ext cx="1554480" cy="310896"/>
-          </a:xfrm>
-          <a:prstGeom prst="roundRect">
-            <a:avLst>
-              <a:gd name="adj" fmla="val 50000"/>
-            </a:avLst>
-          </a:prstGeom>
-          <a:solidFill>
-            <a:srgbClr val="6CCBF5"/>
-          </a:solidFill>
-          <a:ln/>
-        </p:spPr>
-        <p:txBody>
-          <a:bodyPr wrap="square" lIns="0" tIns="0" rIns="0" bIns="0" rtlCol="0" anchor="ctr"/>
-          <a:lstStyle/>
-          <a:p>
-            <a:pPr marL="0" indent="0" algn="ctr">
-              <a:buNone/>
-            </a:pPr>
-            <a:r>
-              <a:rPr lang="en-US" sz="1200" b="1" dirty="0">
-                <a:solidFill>
-                  <a:srgbClr val="0E1B2C"/>
-                </a:solidFill>
-                <a:latin typeface="Calibri" pitchFamily="34" charset="0"/>
-                <a:ea typeface="Calibri" pitchFamily="34" charset="-122"/>
-                <a:cs typeface="Calibri" pitchFamily="34" charset="-120"/>
-              </a:rPr>
-              <a:t>Team 13-1</a:t>
-            </a:r>
-            <a:endParaRPr lang="en-US" sz="1200" dirty="0"/>
-          </a:p>
-        </p:txBody>
-      </p:sp>
-      <p:sp>
-        <p:nvSpPr>
-          <p:cNvPr id="9" name="Text 6"/>
-          <p:cNvSpPr txBox="1"/>
-          <p:nvPr/>
-        </p:nvSpPr>
-        <p:spPr>
-          <a:xfrm>
-            <a:off x="2377440" y="4617720"/>
-            <a:ext cx="3657600" cy="274320"/>
-          </a:xfrm>
-          <a:prstGeom prst="rect">
-            <a:avLst/>
-          </a:prstGeom>
-          <a:noFill/>
-          <a:ln/>
-        </p:spPr>
-        <p:txBody>
-          <a:bodyPr wrap="square" lIns="0" tIns="0" rIns="0" bIns="0" rtlCol="0" anchor="t"/>
-          <a:lstStyle/>
-          <a:p>
-            <a:pPr marL="0" indent="0">
-              <a:buNone/>
-            </a:pPr>
-            <a:r>
-              <a:rPr lang="en-US" sz="1600" dirty="0">
-                <a:solidFill>
-                  <a:srgbClr val="B8C7D9"/>
-                </a:solidFill>
-                <a:latin typeface="Calibri" pitchFamily="34" charset="0"/>
-                <a:ea typeface="Calibri" pitchFamily="34" charset="-122"/>
-                <a:cs typeface="Calibri" pitchFamily="34" charset="-120"/>
-              </a:rPr>
-              <a:t>Smart Systems · BH4ab</a:t>
-            </a:r>
-            <a:endParaRPr lang="en-US" sz="1600" dirty="0"/>
-          </a:p>
-        </p:txBody>
-      </p:sp>
-      <p:sp>
-        <p:nvSpPr>
           <p:cNvPr id="25" name="Slide Number Placeholder 0"/>
           <p:cNvSpPr>
             <a:spLocks noGrp="1"/>
@@ -2765,7 +2683,7 @@
           </a:prstGeom>
           <a:extLst>
             <a:ext uri="{C572A759-6A51-4108-AA02-DFA0A04FC94B}">
-              <ma14:wrappingTextBoxFlag xmlns:ma14="http://schemas.microsoft.com/office/mac/drawingml/2011/main" xmlns="" val="0"/>
+              <ma14:wrappingTextBoxFlag xmlns="" xmlns:ma14="http://schemas.microsoft.com/office/mac/drawingml/2011/main" val="0"/>
             </a:ext>
           </a:extLst>
         </p:spPr>
@@ -2793,6 +2711,36 @@
           </a:p>
         </p:txBody>
       </p:sp>
+      <p:pic>
+        <p:nvPicPr>
+          <p:cNvPr id="17" name="Grafik 16">
+            <a:extLst>
+              <a:ext uri="{FF2B5EF4-FFF2-40B4-BE49-F238E27FC236}">
+                <a16:creationId xmlns:a16="http://schemas.microsoft.com/office/drawing/2014/main" id="{73DCD6A8-57E4-9A15-0494-553FF6B0660D}"/>
+              </a:ext>
+            </a:extLst>
+          </p:cNvPr>
+          <p:cNvPicPr>
+            <a:picLocks noChangeAspect="1"/>
+          </p:cNvPicPr>
+          <p:nvPr/>
+        </p:nvPicPr>
+        <p:blipFill>
+          <a:blip r:embed="rId4"/>
+          <a:stretch>
+            <a:fillRect/>
+          </a:stretch>
+        </p:blipFill>
+        <p:spPr>
+          <a:xfrm>
+            <a:off x="244021" y="6051550"/>
+            <a:ext cx="4470400" cy="698500"/>
+          </a:xfrm>
+          <a:prstGeom prst="rect">
+            <a:avLst/>
+          </a:prstGeom>
+        </p:spPr>
+      </p:pic>
     </p:spTree>
   </p:cSld>
   <p:clrMapOvr>
@@ -2859,49 +2807,6 @@
       </p:sp>
       <p:sp>
         <p:nvSpPr>
-          <p:cNvPr id="3" name="Punkte"/>
-          <p:cNvSpPr/>
-          <p:nvPr/>
-        </p:nvSpPr>
-        <p:spPr>
-          <a:xfrm>
-            <a:off x="9994392" y="457200"/>
-            <a:ext cx="1554480" cy="457200"/>
-          </a:xfrm>
-          <a:prstGeom prst="roundRect">
-            <a:avLst>
-              <a:gd name="adj" fmla="val 50000"/>
-            </a:avLst>
-          </a:prstGeom>
-          <a:solidFill>
-            <a:schemeClr val="accent2"/>
-          </a:solidFill>
-          <a:ln/>
-        </p:spPr>
-        <p:txBody>
-          <a:bodyPr wrap="square" lIns="0" tIns="0" rIns="0" bIns="0" rtlCol="0" anchor="ctr"/>
-          <a:lstStyle/>
-          <a:p>
-            <a:pPr marL="0" indent="0" algn="ctr">
-              <a:buNone/>
-            </a:pPr>
-            <a:r>
-              <a:rPr lang="en-US" sz="1600" b="1" dirty="0">
-                <a:solidFill>
-                  <a:schemeClr val="tx1"/>
-                </a:solidFill>
-                <a:latin typeface="Calibri" pitchFamily="34" charset="0"/>
-                <a:ea typeface="Calibri" pitchFamily="34" charset="-122"/>
-                <a:cs typeface="Calibri" pitchFamily="34" charset="-120"/>
-              </a:rPr>
-              <a:t>10 Punkte</a:t>
-            </a:r>
-            <a:endParaRPr lang="en-US" sz="1600" dirty="0"/>
-          </a:p>
-        </p:txBody>
-      </p:sp>
-      <p:sp>
-        <p:nvSpPr>
           <p:cNvPr id="4" name="Kriterium"/>
           <p:cNvSpPr txBox="1"/>
           <p:nvPr/>
@@ -3384,7 +3289,29 @@
                 <a:ea typeface="Calibri" pitchFamily="34" charset="-122"/>
                 <a:cs typeface="Calibri" pitchFamily="34" charset="-120"/>
               </a:rPr>
-              <a:t>Keys in .env (chmod 600), nie im Git-Repository</a:t>
+              <a:t>Keys in .env (</a:t>
+            </a:r>
+            <a:r>
+              <a:rPr lang="en-US" sz="1400" dirty="0" err="1">
+                <a:solidFill>
+                  <a:srgbClr val="B8C7D9"/>
+                </a:solidFill>
+                <a:latin typeface="Calibri" pitchFamily="34" charset="0"/>
+                <a:ea typeface="Calibri" pitchFamily="34" charset="-122"/>
+                <a:cs typeface="Calibri" pitchFamily="34" charset="-120"/>
+              </a:rPr>
+              <a:t>chmod</a:t>
+            </a:r>
+            <a:r>
+              <a:rPr lang="en-US" sz="1400" dirty="0">
+                <a:solidFill>
+                  <a:srgbClr val="B8C7D9"/>
+                </a:solidFill>
+                <a:latin typeface="Calibri" pitchFamily="34" charset="0"/>
+                <a:ea typeface="Calibri" pitchFamily="34" charset="-122"/>
+                <a:cs typeface="Calibri" pitchFamily="34" charset="-120"/>
+              </a:rPr>
+              <a:t> 600</a:t>
             </a:r>
             <a:endParaRPr lang="en-US" sz="1400" dirty="0"/>
           </a:p>
@@ -3800,56 +3727,6 @@
       </p:sp>
       <p:sp>
         <p:nvSpPr>
-          <p:cNvPr id="30" name="Text 22"/>
-          <p:cNvSpPr txBox="1"/>
-          <p:nvPr/>
-        </p:nvSpPr>
-        <p:spPr>
-          <a:xfrm>
-            <a:off x="640080" y="5623560"/>
-            <a:ext cx="10908792" cy="457200"/>
-          </a:xfrm>
-          <a:prstGeom prst="rect">
-            <a:avLst/>
-          </a:prstGeom>
-          <a:noFill/>
-          <a:ln/>
-        </p:spPr>
-        <p:txBody>
-          <a:bodyPr wrap="square" lIns="0" tIns="0" rIns="0" bIns="0" rtlCol="0" anchor="t"/>
-          <a:lstStyle/>
-          <a:p>
-            <a:pPr marL="0" indent="0">
-              <a:buNone/>
-            </a:pPr>
-            <a:r>
-              <a:rPr lang="en-US" sz="1600" b="1" dirty="0">
-                <a:solidFill>
-                  <a:srgbClr val="F59E42"/>
-                </a:solidFill>
-                <a:latin typeface="Calibri" pitchFamily="34" charset="0"/>
-                <a:ea typeface="Calibri" pitchFamily="34" charset="-122"/>
-                <a:cs typeface="Calibri" pitchFamily="34" charset="-120"/>
-              </a:rPr>
-              <a:t>Grenzen: </a:t>
-            </a:r>
-            <a:r>
-              <a:rPr lang="en-US" sz="1600" dirty="0">
-                <a:solidFill>
-                  <a:srgbClr val="F59E42"/>
-                </a:solidFill>
-                <a:latin typeface="Calibri" pitchFamily="34" charset="0"/>
-                <a:ea typeface="Calibri" pitchFamily="34" charset="-122"/>
-                <a:cs typeface="Calibri" pitchFamily="34" charset="-120"/>
-              </a:rPr>
-              <a:t>Pi-Terminal (ttyd) ohne Anmeldung · Uhr ohne Batterie · Free-Tarif ohne Löschschutz</a:t>
-            </a:r>
-            <a:endParaRPr lang="en-US" sz="1600" dirty="0"/>
-          </a:p>
-        </p:txBody>
-      </p:sp>
-      <p:sp>
-        <p:nvSpPr>
           <p:cNvPr id="31" name="Slide Number Placeholder 0"/>
           <p:cNvSpPr>
             <a:spLocks noGrp="1"/>
@@ -3868,7 +3745,7 @@
           </a:prstGeom>
           <a:extLst>
             <a:ext uri="{C572A759-6A51-4108-AA02-DFA0A04FC94B}">
-              <ma14:wrappingTextBoxFlag xmlns:ma14="http://schemas.microsoft.com/office/mac/drawingml/2011/main" xmlns="" val="0"/>
+              <ma14:wrappingTextBoxFlag xmlns="" xmlns:ma14="http://schemas.microsoft.com/office/mac/drawingml/2011/main" val="0"/>
             </a:ext>
           </a:extLst>
         </p:spPr>
@@ -3896,6 +3773,36 @@
           </a:p>
         </p:txBody>
       </p:sp>
+      <p:pic>
+        <p:nvPicPr>
+          <p:cNvPr id="32" name="Grafik 31">
+            <a:extLst>
+              <a:ext uri="{FF2B5EF4-FFF2-40B4-BE49-F238E27FC236}">
+                <a16:creationId xmlns:a16="http://schemas.microsoft.com/office/drawing/2014/main" id="{923291AF-D9C2-50B0-09B1-E461E5B04E85}"/>
+              </a:ext>
+            </a:extLst>
+          </p:cNvPr>
+          <p:cNvPicPr>
+            <a:picLocks noChangeAspect="1"/>
+          </p:cNvPicPr>
+          <p:nvPr/>
+        </p:nvPicPr>
+        <p:blipFill>
+          <a:blip r:embed="rId9"/>
+          <a:stretch>
+            <a:fillRect/>
+          </a:stretch>
+        </p:blipFill>
+        <p:spPr>
+          <a:xfrm>
+            <a:off x="244021" y="6051550"/>
+            <a:ext cx="4470400" cy="698500"/>
+          </a:xfrm>
+          <a:prstGeom prst="rect">
+            <a:avLst/>
+          </a:prstGeom>
+        </p:spPr>
+      </p:pic>
     </p:spTree>
   </p:cSld>
   <p:clrMapOvr>
@@ -3962,49 +3869,6 @@
       </p:sp>
       <p:sp>
         <p:nvSpPr>
-          <p:cNvPr id="3" name="Punkte"/>
-          <p:cNvSpPr/>
-          <p:nvPr/>
-        </p:nvSpPr>
-        <p:spPr>
-          <a:xfrm>
-            <a:off x="9994392" y="457200"/>
-            <a:ext cx="1554480" cy="457200"/>
-          </a:xfrm>
-          <a:prstGeom prst="roundRect">
-            <a:avLst>
-              <a:gd name="adj" fmla="val 50000"/>
-            </a:avLst>
-          </a:prstGeom>
-          <a:solidFill>
-            <a:schemeClr val="accent1"/>
-          </a:solidFill>
-          <a:ln/>
-        </p:spPr>
-        <p:txBody>
-          <a:bodyPr wrap="square" lIns="0" tIns="0" rIns="0" bIns="0" rtlCol="0" anchor="ctr"/>
-          <a:lstStyle/>
-          <a:p>
-            <a:pPr marL="0" indent="0" algn="ctr">
-              <a:buNone/>
-            </a:pPr>
-            <a:r>
-              <a:rPr lang="en-US" sz="1600" b="1" dirty="0">
-                <a:solidFill>
-                  <a:srgbClr val="FFFFFF"/>
-                </a:solidFill>
-                <a:latin typeface="Calibri" pitchFamily="34" charset="0"/>
-                <a:ea typeface="Calibri" pitchFamily="34" charset="-122"/>
-                <a:cs typeface="Calibri" pitchFamily="34" charset="-120"/>
-              </a:rPr>
-              <a:t>10 Punkte</a:t>
-            </a:r>
-            <a:endParaRPr lang="en-US" sz="1600" dirty="0"/>
-          </a:p>
-        </p:txBody>
-      </p:sp>
-      <p:sp>
-        <p:nvSpPr>
           <p:cNvPr id="4" name="Kriterium"/>
           <p:cNvSpPr txBox="1"/>
           <p:nvPr/>
@@ -4621,7 +4485,7 @@
           </a:prstGeom>
           <a:extLst>
             <a:ext uri="{C572A759-6A51-4108-AA02-DFA0A04FC94B}">
-              <ma14:wrappingTextBoxFlag xmlns:ma14="http://schemas.microsoft.com/office/mac/drawingml/2011/main" xmlns="" val="0"/>
+              <ma14:wrappingTextBoxFlag xmlns="" xmlns:ma14="http://schemas.microsoft.com/office/mac/drawingml/2011/main" val="0"/>
             </a:ext>
           </a:extLst>
         </p:spPr>
@@ -4651,10 +4515,10 @@
       </p:sp>
       <p:pic>
         <p:nvPicPr>
-          <p:cNvPr id="23" name="Grafik 22">
+          <p:cNvPr id="22" name="Grafik 21">
             <a:extLst>
               <a:ext uri="{FF2B5EF4-FFF2-40B4-BE49-F238E27FC236}">
-                <a16:creationId xmlns:a16="http://schemas.microsoft.com/office/drawing/2014/main" id="{E69BF621-445A-D77F-15E2-6B5830110610}"/>
+                <a16:creationId xmlns:a16="http://schemas.microsoft.com/office/drawing/2014/main" id="{CB3672A6-F0C4-FED0-51C7-8CB747818631}"/>
               </a:ext>
             </a:extLst>
           </p:cNvPr>
@@ -4671,8 +4535,38 @@
         </p:blipFill>
         <p:spPr>
           <a:xfrm>
-            <a:off x="640080" y="1783080"/>
-            <a:ext cx="6766559" cy="4233337"/>
+            <a:off x="406401" y="6016417"/>
+            <a:ext cx="4470400" cy="698500"/>
+          </a:xfrm>
+          <a:prstGeom prst="rect">
+            <a:avLst/>
+          </a:prstGeom>
+        </p:spPr>
+      </p:pic>
+      <p:pic>
+        <p:nvPicPr>
+          <p:cNvPr id="26" name="Grafik 25">
+            <a:extLst>
+              <a:ext uri="{FF2B5EF4-FFF2-40B4-BE49-F238E27FC236}">
+                <a16:creationId xmlns:a16="http://schemas.microsoft.com/office/drawing/2014/main" id="{EDC45D07-905A-C930-18C1-735ABEB56AAC}"/>
+              </a:ext>
+            </a:extLst>
+          </p:cNvPr>
+          <p:cNvPicPr>
+            <a:picLocks noChangeAspect="1"/>
+          </p:cNvPicPr>
+          <p:nvPr/>
+        </p:nvPicPr>
+        <p:blipFill>
+          <a:blip r:embed="rId9"/>
+          <a:stretch>
+            <a:fillRect/>
+          </a:stretch>
+        </p:blipFill>
+        <p:spPr>
+          <a:xfrm>
+            <a:off x="560678" y="1543050"/>
+            <a:ext cx="6925364" cy="4723417"/>
           </a:xfrm>
           <a:prstGeom prst="rect">
             <a:avLst/>
@@ -4745,49 +4639,6 @@
       </p:sp>
       <p:sp>
         <p:nvSpPr>
-          <p:cNvPr id="3" name="Punkte"/>
-          <p:cNvSpPr/>
-          <p:nvPr/>
-        </p:nvSpPr>
-        <p:spPr>
-          <a:xfrm>
-            <a:off x="9994392" y="457200"/>
-            <a:ext cx="1554480" cy="457200"/>
-          </a:xfrm>
-          <a:prstGeom prst="roundRect">
-            <a:avLst>
-              <a:gd name="adj" fmla="val 50000"/>
-            </a:avLst>
-          </a:prstGeom>
-          <a:solidFill>
-            <a:schemeClr val="accent1"/>
-          </a:solidFill>
-          <a:ln/>
-        </p:spPr>
-        <p:txBody>
-          <a:bodyPr wrap="square" lIns="0" tIns="0" rIns="0" bIns="0" rtlCol="0" anchor="ctr"/>
-          <a:lstStyle/>
-          <a:p>
-            <a:pPr marL="0" indent="0" algn="ctr">
-              <a:buNone/>
-            </a:pPr>
-            <a:r>
-              <a:rPr lang="en-US" sz="1600" b="1" dirty="0">
-                <a:solidFill>
-                  <a:srgbClr val="FFFFFF"/>
-                </a:solidFill>
-                <a:latin typeface="Calibri" pitchFamily="34" charset="0"/>
-                <a:ea typeface="Calibri" pitchFamily="34" charset="-122"/>
-                <a:cs typeface="Calibri" pitchFamily="34" charset="-120"/>
-              </a:rPr>
-              <a:t>5 Punkte</a:t>
-            </a:r>
-            <a:endParaRPr lang="en-US" sz="1600" dirty="0"/>
-          </a:p>
-        </p:txBody>
-      </p:sp>
-      <p:sp>
-        <p:nvSpPr>
           <p:cNvPr id="4" name="Kriterium"/>
           <p:cNvSpPr txBox="1"/>
           <p:nvPr/>
@@ -5508,7 +5359,7 @@
           </a:prstGeom>
           <a:extLst>
             <a:ext uri="{C572A759-6A51-4108-AA02-DFA0A04FC94B}">
-              <ma14:wrappingTextBoxFlag xmlns:ma14="http://schemas.microsoft.com/office/mac/drawingml/2011/main" xmlns="" val="0"/>
+              <ma14:wrappingTextBoxFlag xmlns="" xmlns:ma14="http://schemas.microsoft.com/office/mac/drawingml/2011/main" val="0"/>
             </a:ext>
           </a:extLst>
         </p:spPr>
@@ -5536,6 +5387,36 @@
           </a:p>
         </p:txBody>
       </p:sp>
+      <p:pic>
+        <p:nvPicPr>
+          <p:cNvPr id="22" name="Grafik 21">
+            <a:extLst>
+              <a:ext uri="{FF2B5EF4-FFF2-40B4-BE49-F238E27FC236}">
+                <a16:creationId xmlns:a16="http://schemas.microsoft.com/office/drawing/2014/main" id="{EE776B42-F0FD-0F34-5B65-075F17A17786}"/>
+              </a:ext>
+            </a:extLst>
+          </p:cNvPr>
+          <p:cNvPicPr>
+            <a:picLocks noChangeAspect="1"/>
+          </p:cNvPicPr>
+          <p:nvPr/>
+        </p:nvPicPr>
+        <p:blipFill>
+          <a:blip r:embed="rId3"/>
+          <a:stretch>
+            <a:fillRect/>
+          </a:stretch>
+        </p:blipFill>
+        <p:spPr>
+          <a:xfrm>
+            <a:off x="480786" y="6051550"/>
+            <a:ext cx="4470400" cy="698500"/>
+          </a:xfrm>
+          <a:prstGeom prst="rect">
+            <a:avLst/>
+          </a:prstGeom>
+        </p:spPr>
+      </p:pic>
     </p:spTree>
   </p:cSld>
   <p:clrMapOvr>
@@ -6084,7 +5965,7 @@
                 <a:ea typeface="Calibri" pitchFamily="34" charset="-122"/>
                 <a:cs typeface="Calibri" pitchFamily="34" charset="-120"/>
               </a:rPr>
-              <a:t>Danke – Fragen?</a:t>
+              <a:t>Danke!</a:t>
             </a:r>
             <a:endParaRPr lang="en-US" sz="3600" dirty="0"/>
           </a:p>
@@ -6110,7 +5991,7 @@
           </a:prstGeom>
           <a:extLst>
             <a:ext uri="{C572A759-6A51-4108-AA02-DFA0A04FC94B}">
-              <ma14:wrappingTextBoxFlag xmlns:ma14="http://schemas.microsoft.com/office/mac/drawingml/2011/main" xmlns="" val="0"/>
+              <ma14:wrappingTextBoxFlag xmlns="" xmlns:ma14="http://schemas.microsoft.com/office/mac/drawingml/2011/main" val="0"/>
             </a:ext>
           </a:extLst>
         </p:spPr>
@@ -6138,6 +6019,36 @@
           </a:p>
         </p:txBody>
       </p:sp>
+      <p:pic>
+        <p:nvPicPr>
+          <p:cNvPr id="16" name="Grafik 15">
+            <a:extLst>
+              <a:ext uri="{FF2B5EF4-FFF2-40B4-BE49-F238E27FC236}">
+                <a16:creationId xmlns:a16="http://schemas.microsoft.com/office/drawing/2014/main" id="{91380333-5D34-79F1-94A4-4C7D12611105}"/>
+              </a:ext>
+            </a:extLst>
+          </p:cNvPr>
+          <p:cNvPicPr>
+            <a:picLocks noChangeAspect="1"/>
+          </p:cNvPicPr>
+          <p:nvPr/>
+        </p:nvPicPr>
+        <p:blipFill>
+          <a:blip r:embed="rId6"/>
+          <a:stretch>
+            <a:fillRect/>
+          </a:stretch>
+        </p:blipFill>
+        <p:spPr>
+          <a:xfrm>
+            <a:off x="244021" y="6051550"/>
+            <a:ext cx="4470400" cy="698500"/>
+          </a:xfrm>
+          <a:prstGeom prst="rect">
+            <a:avLst/>
+          </a:prstGeom>
+        </p:spPr>
+      </p:pic>
     </p:spTree>
   </p:cSld>
   <p:clrMapOvr>
@@ -6782,7 +6693,7 @@
                 <a:ea typeface="Calibri" pitchFamily="34" charset="-122"/>
                 <a:cs typeface="Calibri" pitchFamily="34" charset="-120"/>
               </a:rPr>
-              <a:t>Ziel: Daten automatisch in die Cloud – jederzeit, überall und als zweite Sicherung.</a:t>
+              <a:t>Ziel: Daten automatisch in die Cloud, jederzeit, überall und als zweite Sicherung.</a:t>
             </a:r>
             <a:endParaRPr lang="en-US" sz="2000" dirty="0"/>
           </a:p>
@@ -6808,7 +6719,7 @@
           </a:prstGeom>
           <a:extLst>
             <a:ext uri="{C572A759-6A51-4108-AA02-DFA0A04FC94B}">
-              <ma14:wrappingTextBoxFlag xmlns:ma14="http://schemas.microsoft.com/office/mac/drawingml/2011/main" xmlns="" val="0"/>
+              <ma14:wrappingTextBoxFlag xmlns="" xmlns:ma14="http://schemas.microsoft.com/office/mac/drawingml/2011/main" val="0"/>
             </a:ext>
           </a:extLst>
         </p:spPr>
@@ -6836,6 +6747,36 @@
           </a:p>
         </p:txBody>
       </p:sp>
+      <p:pic>
+        <p:nvPicPr>
+          <p:cNvPr id="21" name="Grafik 20">
+            <a:extLst>
+              <a:ext uri="{FF2B5EF4-FFF2-40B4-BE49-F238E27FC236}">
+                <a16:creationId xmlns:a16="http://schemas.microsoft.com/office/drawing/2014/main" id="{C1663880-C45C-08AE-F8C8-EB5D9DD6D0D9}"/>
+              </a:ext>
+            </a:extLst>
+          </p:cNvPr>
+          <p:cNvPicPr>
+            <a:picLocks noChangeAspect="1"/>
+          </p:cNvPicPr>
+          <p:nvPr/>
+        </p:nvPicPr>
+        <p:blipFill>
+          <a:blip r:embed="rId6"/>
+          <a:stretch>
+            <a:fillRect/>
+          </a:stretch>
+        </p:blipFill>
+        <p:spPr>
+          <a:xfrm>
+            <a:off x="480786" y="5989320"/>
+            <a:ext cx="4470400" cy="698500"/>
+          </a:xfrm>
+          <a:prstGeom prst="rect">
+            <a:avLst/>
+          </a:prstGeom>
+        </p:spPr>
+      </p:pic>
     </p:spTree>
   </p:cSld>
   <p:clrMapOvr>
@@ -8083,7 +8024,7 @@
           </a:prstGeom>
           <a:extLst>
             <a:ext uri="{C572A759-6A51-4108-AA02-DFA0A04FC94B}">
-              <ma14:wrappingTextBoxFlag xmlns:ma14="http://schemas.microsoft.com/office/mac/drawingml/2011/main" xmlns="" val="0"/>
+              <ma14:wrappingTextBoxFlag xmlns="" xmlns:ma14="http://schemas.microsoft.com/office/mac/drawingml/2011/main" val="0"/>
             </a:ext>
           </a:extLst>
         </p:spPr>
@@ -8111,6 +8052,36 @@
           </a:p>
         </p:txBody>
       </p:sp>
+      <p:pic>
+        <p:nvPicPr>
+          <p:cNvPr id="38" name="Grafik 37">
+            <a:extLst>
+              <a:ext uri="{FF2B5EF4-FFF2-40B4-BE49-F238E27FC236}">
+                <a16:creationId xmlns:a16="http://schemas.microsoft.com/office/drawing/2014/main" id="{8E151CF6-B5E2-7D2A-3871-2B2B7489909F}"/>
+              </a:ext>
+            </a:extLst>
+          </p:cNvPr>
+          <p:cNvPicPr>
+            <a:picLocks noChangeAspect="1"/>
+          </p:cNvPicPr>
+          <p:nvPr/>
+        </p:nvPicPr>
+        <p:blipFill>
+          <a:blip r:embed="rId8"/>
+          <a:stretch>
+            <a:fillRect/>
+          </a:stretch>
+        </p:blipFill>
+        <p:spPr>
+          <a:xfrm>
+            <a:off x="453136" y="5897880"/>
+            <a:ext cx="4470400" cy="698500"/>
+          </a:xfrm>
+          <a:prstGeom prst="rect">
+            <a:avLst/>
+          </a:prstGeom>
+        </p:spPr>
+      </p:pic>
     </p:spTree>
   </p:cSld>
   <p:clrMapOvr>
@@ -8212,7 +8183,7 @@
                 <a:ea typeface="Calibri" pitchFamily="34" charset="-122"/>
                 <a:cs typeface="Calibri" pitchFamily="34" charset="-120"/>
               </a:rPr>
-              <a:t>Wir folgen dem Bewertungsbogen</a:t>
+              <a:t>Agenda</a:t>
             </a:r>
             <a:endParaRPr lang="en-US" sz="3600" dirty="0"/>
           </a:p>
@@ -8227,14 +8198,14 @@
           <p:nvPr>
             <p:extLst>
               <p:ext uri="{D42A27DB-BD31-4B8C-83A1-F6EECF244321}">
-                <p14:modId xmlns:p14="http://schemas.microsoft.com/office/powerpoint/2010/main" val="1579011935"/>
+                <p14:modId xmlns:p14="http://schemas.microsoft.com/office/powerpoint/2010/main" val="3003269527"/>
               </p:ext>
             </p:extLst>
           </p:nvPr>
         </p:nvGraphicFramePr>
         <p:xfrm>
           <a:off x="640080" y="1783080"/>
-          <a:ext cx="10908792" cy="4114800"/>
+          <a:ext cx="7772400" cy="4114800"/>
         </p:xfrm>
         <a:graphic>
           <a:graphicData uri="http://schemas.openxmlformats.org/drawingml/2006/table">
@@ -8252,20 +8223,6 @@
                   <a:extLst>
                     <a:ext uri="{9D8B030D-6E8A-4147-A177-3AD203B41FA5}">
                       <a16:colId xmlns:a16="http://schemas.microsoft.com/office/drawing/2014/main" val="20001"/>
-                    </a:ext>
-                  </a:extLst>
-                </a:gridCol>
-                <a:gridCol w="1554480">
-                  <a:extLst>
-                    <a:ext uri="{9D8B030D-6E8A-4147-A177-3AD203B41FA5}">
-                      <a16:colId xmlns:a16="http://schemas.microsoft.com/office/drawing/2014/main" val="20002"/>
-                    </a:ext>
-                  </a:extLst>
-                </a:gridCol>
-                <a:gridCol w="1581912">
-                  <a:extLst>
-                    <a:ext uri="{9D8B030D-6E8A-4147-A177-3AD203B41FA5}">
-                      <a16:colId xmlns:a16="http://schemas.microsoft.com/office/drawing/2014/main" val="20003"/>
                     </a:ext>
                   </a:extLst>
                 </a:gridCol>
@@ -8357,142 +8314,6 @@
                           <a:cs typeface="Calibri" pitchFamily="34" charset="-120"/>
                         </a:rPr>
                         <a:t>Kriterium</a:t>
-                      </a:r>
-                      <a:endParaRPr lang="en-US" sz="1600" dirty="0">
-                        <a:latin typeface="Calibri" charset="0"/>
-                        <a:ea typeface="Calibri" charset="0"/>
-                        <a:cs typeface="Calibri" charset="0"/>
-                      </a:endParaRPr>
-                    </a:p>
-                  </a:txBody>
-                  <a:tcPr anchor="ctr">
-                    <a:lnL w="6350" cap="flat" cmpd="sng" algn="ctr">
-                      <a:solidFill>
-                        <a:srgbClr val="D3DEE6"/>
-                      </a:solidFill>
-                      <a:prstDash val="solid"/>
-                      <a:round/>
-                      <a:headEnd type="none" w="med" len="med"/>
-                      <a:tailEnd type="none" w="med" len="med"/>
-                    </a:lnL>
-                    <a:lnR w="6350" cap="flat" cmpd="sng" algn="ctr">
-                      <a:solidFill>
-                        <a:srgbClr val="D3DEE6"/>
-                      </a:solidFill>
-                      <a:prstDash val="solid"/>
-                      <a:round/>
-                      <a:headEnd type="none" w="med" len="med"/>
-                      <a:tailEnd type="none" w="med" len="med"/>
-                    </a:lnR>
-                    <a:lnT w="6350" cap="flat" cmpd="sng" algn="ctr">
-                      <a:solidFill>
-                        <a:srgbClr val="D3DEE6"/>
-                      </a:solidFill>
-                      <a:prstDash val="solid"/>
-                      <a:round/>
-                      <a:headEnd type="none" w="med" len="med"/>
-                      <a:tailEnd type="none" w="med" len="med"/>
-                    </a:lnT>
-                    <a:lnB w="6350" cap="flat" cmpd="sng" algn="ctr">
-                      <a:solidFill>
-                        <a:srgbClr val="D3DEE6"/>
-                      </a:solidFill>
-                      <a:prstDash val="solid"/>
-                      <a:round/>
-                      <a:headEnd type="none" w="med" len="med"/>
-                      <a:tailEnd type="none" w="med" len="med"/>
-                    </a:lnB>
-                    <a:solidFill>
-                      <a:srgbClr val="CBDAE4"/>
-                    </a:solidFill>
-                  </a:tcPr>
-                </a:tc>
-                <a:tc>
-                  <a:txBody>
-                    <a:bodyPr/>
-                    <a:lstStyle/>
-                    <a:p>
-                      <a:pPr marL="0" indent="0" algn="r">
-                        <a:buNone/>
-                      </a:pPr>
-                      <a:r>
-                        <a:rPr lang="en-US" sz="1600" b="1" dirty="0">
-                          <a:solidFill>
-                            <a:srgbClr val="0E1B2C"/>
-                          </a:solidFill>
-                          <a:latin typeface="Calibri" pitchFamily="34" charset="0"/>
-                          <a:ea typeface="Calibri" pitchFamily="34" charset="-122"/>
-                          <a:cs typeface="Calibri" pitchFamily="34" charset="-120"/>
-                        </a:rPr>
-                        <a:t>Punkte</a:t>
-                      </a:r>
-                      <a:endParaRPr lang="en-US" sz="1600" dirty="0">
-                        <a:latin typeface="Calibri" charset="0"/>
-                        <a:ea typeface="Calibri" charset="0"/>
-                        <a:cs typeface="Calibri" charset="0"/>
-                      </a:endParaRPr>
-                    </a:p>
-                  </a:txBody>
-                  <a:tcPr anchor="ctr">
-                    <a:lnL w="6350" cap="flat" cmpd="sng" algn="ctr">
-                      <a:solidFill>
-                        <a:srgbClr val="D3DEE6"/>
-                      </a:solidFill>
-                      <a:prstDash val="solid"/>
-                      <a:round/>
-                      <a:headEnd type="none" w="med" len="med"/>
-                      <a:tailEnd type="none" w="med" len="med"/>
-                    </a:lnL>
-                    <a:lnR w="6350" cap="flat" cmpd="sng" algn="ctr">
-                      <a:solidFill>
-                        <a:srgbClr val="D3DEE6"/>
-                      </a:solidFill>
-                      <a:prstDash val="solid"/>
-                      <a:round/>
-                      <a:headEnd type="none" w="med" len="med"/>
-                      <a:tailEnd type="none" w="med" len="med"/>
-                    </a:lnR>
-                    <a:lnT w="6350" cap="flat" cmpd="sng" algn="ctr">
-                      <a:solidFill>
-                        <a:srgbClr val="D3DEE6"/>
-                      </a:solidFill>
-                      <a:prstDash val="solid"/>
-                      <a:round/>
-                      <a:headEnd type="none" w="med" len="med"/>
-                      <a:tailEnd type="none" w="med" len="med"/>
-                    </a:lnT>
-                    <a:lnB w="6350" cap="flat" cmpd="sng" algn="ctr">
-                      <a:solidFill>
-                        <a:srgbClr val="D3DEE6"/>
-                      </a:solidFill>
-                      <a:prstDash val="solid"/>
-                      <a:round/>
-                      <a:headEnd type="none" w="med" len="med"/>
-                      <a:tailEnd type="none" w="med" len="med"/>
-                    </a:lnB>
-                    <a:solidFill>
-                      <a:srgbClr val="CBDAE4"/>
-                    </a:solidFill>
-                  </a:tcPr>
-                </a:tc>
-                <a:tc>
-                  <a:txBody>
-                    <a:bodyPr/>
-                    <a:lstStyle/>
-                    <a:p>
-                      <a:pPr marL="0" indent="0" algn="r">
-                        <a:buNone/>
-                      </a:pPr>
-                      <a:r>
-                        <a:rPr lang="en-US" sz="1600" b="1" dirty="0">
-                          <a:solidFill>
-                            <a:srgbClr val="0E1B2C"/>
-                          </a:solidFill>
-                          <a:latin typeface="Calibri" pitchFamily="34" charset="0"/>
-                          <a:ea typeface="Calibri" pitchFamily="34" charset="-122"/>
-                          <a:cs typeface="Calibri" pitchFamily="34" charset="-120"/>
-                        </a:rPr>
-                        <a:t>Folie</a:t>
                       </a:r>
                       <a:endParaRPr lang="en-US" sz="1600" dirty="0">
                         <a:latin typeface="Calibri" charset="0"/>
@@ -8686,142 +8507,6 @@
                     </a:solidFill>
                   </a:tcPr>
                 </a:tc>
-                <a:tc>
-                  <a:txBody>
-                    <a:bodyPr/>
-                    <a:lstStyle/>
-                    <a:p>
-                      <a:pPr marL="0" indent="0" algn="r">
-                        <a:buNone/>
-                      </a:pPr>
-                      <a:r>
-                        <a:rPr lang="en-US" sz="1600" dirty="0">
-                          <a:solidFill>
-                            <a:srgbClr val="3E4C5E"/>
-                          </a:solidFill>
-                          <a:latin typeface="Calibri" pitchFamily="34" charset="0"/>
-                          <a:ea typeface="Calibri" pitchFamily="34" charset="-122"/>
-                          <a:cs typeface="Calibri" pitchFamily="34" charset="-120"/>
-                        </a:rPr>
-                        <a:t>5</a:t>
-                      </a:r>
-                      <a:endParaRPr lang="en-US" sz="1600" dirty="0">
-                        <a:latin typeface="Calibri" charset="0"/>
-                        <a:ea typeface="Calibri" charset="0"/>
-                        <a:cs typeface="Calibri" charset="0"/>
-                      </a:endParaRPr>
-                    </a:p>
-                  </a:txBody>
-                  <a:tcPr anchor="ctr">
-                    <a:lnL w="6350" cap="flat" cmpd="sng" algn="ctr">
-                      <a:solidFill>
-                        <a:srgbClr val="D3DEE6"/>
-                      </a:solidFill>
-                      <a:prstDash val="solid"/>
-                      <a:round/>
-                      <a:headEnd type="none" w="med" len="med"/>
-                      <a:tailEnd type="none" w="med" len="med"/>
-                    </a:lnL>
-                    <a:lnR w="6350" cap="flat" cmpd="sng" algn="ctr">
-                      <a:solidFill>
-                        <a:srgbClr val="D3DEE6"/>
-                      </a:solidFill>
-                      <a:prstDash val="solid"/>
-                      <a:round/>
-                      <a:headEnd type="none" w="med" len="med"/>
-                      <a:tailEnd type="none" w="med" len="med"/>
-                    </a:lnR>
-                    <a:lnT w="6350" cap="flat" cmpd="sng" algn="ctr">
-                      <a:solidFill>
-                        <a:srgbClr val="D3DEE6"/>
-                      </a:solidFill>
-                      <a:prstDash val="solid"/>
-                      <a:round/>
-                      <a:headEnd type="none" w="med" len="med"/>
-                      <a:tailEnd type="none" w="med" len="med"/>
-                    </a:lnT>
-                    <a:lnB w="6350" cap="flat" cmpd="sng" algn="ctr">
-                      <a:solidFill>
-                        <a:srgbClr val="D3DEE6"/>
-                      </a:solidFill>
-                      <a:prstDash val="solid"/>
-                      <a:round/>
-                      <a:headEnd type="none" w="med" len="med"/>
-                      <a:tailEnd type="none" w="med" len="med"/>
-                    </a:lnB>
-                    <a:solidFill>
-                      <a:srgbClr val="FFFFFF"/>
-                    </a:solidFill>
-                  </a:tcPr>
-                </a:tc>
-                <a:tc>
-                  <a:txBody>
-                    <a:bodyPr/>
-                    <a:lstStyle/>
-                    <a:p>
-                      <a:pPr marL="0" indent="0" algn="r">
-                        <a:buNone/>
-                      </a:pPr>
-                      <a:r>
-                        <a:rPr lang="en-US" sz="1600" dirty="0">
-                          <a:solidFill>
-                            <a:srgbClr val="3E4C5E"/>
-                          </a:solidFill>
-                          <a:latin typeface="Calibri" pitchFamily="34" charset="0"/>
-                          <a:ea typeface="Calibri" pitchFamily="34" charset="-122"/>
-                          <a:cs typeface="Calibri" pitchFamily="34" charset="-120"/>
-                        </a:rPr>
-                        <a:t>5</a:t>
-                      </a:r>
-                      <a:endParaRPr lang="en-US" sz="1600" dirty="0">
-                        <a:latin typeface="Calibri" charset="0"/>
-                        <a:ea typeface="Calibri" charset="0"/>
-                        <a:cs typeface="Calibri" charset="0"/>
-                      </a:endParaRPr>
-                    </a:p>
-                  </a:txBody>
-                  <a:tcPr anchor="ctr">
-                    <a:lnL w="6350" cap="flat" cmpd="sng" algn="ctr">
-                      <a:solidFill>
-                        <a:srgbClr val="D3DEE6"/>
-                      </a:solidFill>
-                      <a:prstDash val="solid"/>
-                      <a:round/>
-                      <a:headEnd type="none" w="med" len="med"/>
-                      <a:tailEnd type="none" w="med" len="med"/>
-                    </a:lnL>
-                    <a:lnR w="6350" cap="flat" cmpd="sng" algn="ctr">
-                      <a:solidFill>
-                        <a:srgbClr val="D3DEE6"/>
-                      </a:solidFill>
-                      <a:prstDash val="solid"/>
-                      <a:round/>
-                      <a:headEnd type="none" w="med" len="med"/>
-                      <a:tailEnd type="none" w="med" len="med"/>
-                    </a:lnR>
-                    <a:lnT w="6350" cap="flat" cmpd="sng" algn="ctr">
-                      <a:solidFill>
-                        <a:srgbClr val="D3DEE6"/>
-                      </a:solidFill>
-                      <a:prstDash val="solid"/>
-                      <a:round/>
-                      <a:headEnd type="none" w="med" len="med"/>
-                      <a:tailEnd type="none" w="med" len="med"/>
-                    </a:lnT>
-                    <a:lnB w="6350" cap="flat" cmpd="sng" algn="ctr">
-                      <a:solidFill>
-                        <a:srgbClr val="D3DEE6"/>
-                      </a:solidFill>
-                      <a:prstDash val="solid"/>
-                      <a:round/>
-                      <a:headEnd type="none" w="med" len="med"/>
-                      <a:tailEnd type="none" w="med" len="med"/>
-                    </a:lnB>
-                    <a:solidFill>
-                      <a:srgbClr val="FFFFFF"/>
-                    </a:solidFill>
-                  </a:tcPr>
-                </a:tc>
                 <a:extLst>
                   <a:ext uri="{0D108BD9-81ED-4DB2-BD59-A6C34878D82A}">
                     <a16:rowId xmlns:a16="http://schemas.microsoft.com/office/drawing/2014/main" val="10001"/>
@@ -8915,142 +8600,6 @@
                           <a:cs typeface="Calibri" pitchFamily="34" charset="-120"/>
                         </a:rPr>
                         <a:t>Entscheidung technisch begründet</a:t>
-                      </a:r>
-                      <a:endParaRPr lang="en-US" sz="1600" dirty="0">
-                        <a:latin typeface="Calibri" charset="0"/>
-                        <a:ea typeface="Calibri" charset="0"/>
-                        <a:cs typeface="Calibri" charset="0"/>
-                      </a:endParaRPr>
-                    </a:p>
-                  </a:txBody>
-                  <a:tcPr anchor="ctr">
-                    <a:lnL w="6350" cap="flat" cmpd="sng" algn="ctr">
-                      <a:solidFill>
-                        <a:srgbClr val="D3DEE6"/>
-                      </a:solidFill>
-                      <a:prstDash val="solid"/>
-                      <a:round/>
-                      <a:headEnd type="none" w="med" len="med"/>
-                      <a:tailEnd type="none" w="med" len="med"/>
-                    </a:lnL>
-                    <a:lnR w="6350" cap="flat" cmpd="sng" algn="ctr">
-                      <a:solidFill>
-                        <a:srgbClr val="D3DEE6"/>
-                      </a:solidFill>
-                      <a:prstDash val="solid"/>
-                      <a:round/>
-                      <a:headEnd type="none" w="med" len="med"/>
-                      <a:tailEnd type="none" w="med" len="med"/>
-                    </a:lnR>
-                    <a:lnT w="6350" cap="flat" cmpd="sng" algn="ctr">
-                      <a:solidFill>
-                        <a:srgbClr val="D3DEE6"/>
-                      </a:solidFill>
-                      <a:prstDash val="solid"/>
-                      <a:round/>
-                      <a:headEnd type="none" w="med" len="med"/>
-                      <a:tailEnd type="none" w="med" len="med"/>
-                    </a:lnT>
-                    <a:lnB w="6350" cap="flat" cmpd="sng" algn="ctr">
-                      <a:solidFill>
-                        <a:srgbClr val="D3DEE6"/>
-                      </a:solidFill>
-                      <a:prstDash val="solid"/>
-                      <a:round/>
-                      <a:headEnd type="none" w="med" len="med"/>
-                      <a:tailEnd type="none" w="med" len="med"/>
-                    </a:lnB>
-                    <a:solidFill>
-                      <a:srgbClr val="F4F8FA"/>
-                    </a:solidFill>
-                  </a:tcPr>
-                </a:tc>
-                <a:tc>
-                  <a:txBody>
-                    <a:bodyPr/>
-                    <a:lstStyle/>
-                    <a:p>
-                      <a:pPr marL="0" indent="0" algn="r">
-                        <a:buNone/>
-                      </a:pPr>
-                      <a:r>
-                        <a:rPr lang="en-US" sz="1600" dirty="0">
-                          <a:solidFill>
-                            <a:srgbClr val="3E4C5E"/>
-                          </a:solidFill>
-                          <a:latin typeface="Calibri" pitchFamily="34" charset="0"/>
-                          <a:ea typeface="Calibri" pitchFamily="34" charset="-122"/>
-                          <a:cs typeface="Calibri" pitchFamily="34" charset="-120"/>
-                        </a:rPr>
-                        <a:t>5</a:t>
-                      </a:r>
-                      <a:endParaRPr lang="en-US" sz="1600" dirty="0">
-                        <a:latin typeface="Calibri" charset="0"/>
-                        <a:ea typeface="Calibri" charset="0"/>
-                        <a:cs typeface="Calibri" charset="0"/>
-                      </a:endParaRPr>
-                    </a:p>
-                  </a:txBody>
-                  <a:tcPr anchor="ctr">
-                    <a:lnL w="6350" cap="flat" cmpd="sng" algn="ctr">
-                      <a:solidFill>
-                        <a:srgbClr val="D3DEE6"/>
-                      </a:solidFill>
-                      <a:prstDash val="solid"/>
-                      <a:round/>
-                      <a:headEnd type="none" w="med" len="med"/>
-                      <a:tailEnd type="none" w="med" len="med"/>
-                    </a:lnL>
-                    <a:lnR w="6350" cap="flat" cmpd="sng" algn="ctr">
-                      <a:solidFill>
-                        <a:srgbClr val="D3DEE6"/>
-                      </a:solidFill>
-                      <a:prstDash val="solid"/>
-                      <a:round/>
-                      <a:headEnd type="none" w="med" len="med"/>
-                      <a:tailEnd type="none" w="med" len="med"/>
-                    </a:lnR>
-                    <a:lnT w="6350" cap="flat" cmpd="sng" algn="ctr">
-                      <a:solidFill>
-                        <a:srgbClr val="D3DEE6"/>
-                      </a:solidFill>
-                      <a:prstDash val="solid"/>
-                      <a:round/>
-                      <a:headEnd type="none" w="med" len="med"/>
-                      <a:tailEnd type="none" w="med" len="med"/>
-                    </a:lnT>
-                    <a:lnB w="6350" cap="flat" cmpd="sng" algn="ctr">
-                      <a:solidFill>
-                        <a:srgbClr val="D3DEE6"/>
-                      </a:solidFill>
-                      <a:prstDash val="solid"/>
-                      <a:round/>
-                      <a:headEnd type="none" w="med" len="med"/>
-                      <a:tailEnd type="none" w="med" len="med"/>
-                    </a:lnB>
-                    <a:solidFill>
-                      <a:srgbClr val="F4F8FA"/>
-                    </a:solidFill>
-                  </a:tcPr>
-                </a:tc>
-                <a:tc>
-                  <a:txBody>
-                    <a:bodyPr/>
-                    <a:lstStyle/>
-                    <a:p>
-                      <a:pPr marL="0" indent="0" algn="r">
-                        <a:buNone/>
-                      </a:pPr>
-                      <a:r>
-                        <a:rPr lang="en-US" sz="1600" dirty="0">
-                          <a:solidFill>
-                            <a:srgbClr val="3E4C5E"/>
-                          </a:solidFill>
-                          <a:latin typeface="Calibri" pitchFamily="34" charset="0"/>
-                          <a:ea typeface="Calibri" pitchFamily="34" charset="-122"/>
-                          <a:cs typeface="Calibri" pitchFamily="34" charset="-120"/>
-                        </a:rPr>
-                        <a:t>6</a:t>
                       </a:r>
                       <a:endParaRPr lang="en-US" sz="1600" dirty="0">
                         <a:latin typeface="Calibri" charset="0"/>
@@ -9244,142 +8793,6 @@
                     </a:solidFill>
                   </a:tcPr>
                 </a:tc>
-                <a:tc>
-                  <a:txBody>
-                    <a:bodyPr/>
-                    <a:lstStyle/>
-                    <a:p>
-                      <a:pPr marL="0" indent="0" algn="r">
-                        <a:buNone/>
-                      </a:pPr>
-                      <a:r>
-                        <a:rPr lang="en-US" sz="1600" dirty="0">
-                          <a:solidFill>
-                            <a:srgbClr val="3E4C5E"/>
-                          </a:solidFill>
-                          <a:latin typeface="Calibri" pitchFamily="34" charset="0"/>
-                          <a:ea typeface="Calibri" pitchFamily="34" charset="-122"/>
-                          <a:cs typeface="Calibri" pitchFamily="34" charset="-120"/>
-                        </a:rPr>
-                        <a:t>5</a:t>
-                      </a:r>
-                      <a:endParaRPr lang="en-US" sz="1600" dirty="0">
-                        <a:latin typeface="Calibri" charset="0"/>
-                        <a:ea typeface="Calibri" charset="0"/>
-                        <a:cs typeface="Calibri" charset="0"/>
-                      </a:endParaRPr>
-                    </a:p>
-                  </a:txBody>
-                  <a:tcPr anchor="ctr">
-                    <a:lnL w="6350" cap="flat" cmpd="sng" algn="ctr">
-                      <a:solidFill>
-                        <a:srgbClr val="D3DEE6"/>
-                      </a:solidFill>
-                      <a:prstDash val="solid"/>
-                      <a:round/>
-                      <a:headEnd type="none" w="med" len="med"/>
-                      <a:tailEnd type="none" w="med" len="med"/>
-                    </a:lnL>
-                    <a:lnR w="6350" cap="flat" cmpd="sng" algn="ctr">
-                      <a:solidFill>
-                        <a:srgbClr val="D3DEE6"/>
-                      </a:solidFill>
-                      <a:prstDash val="solid"/>
-                      <a:round/>
-                      <a:headEnd type="none" w="med" len="med"/>
-                      <a:tailEnd type="none" w="med" len="med"/>
-                    </a:lnR>
-                    <a:lnT w="6350" cap="flat" cmpd="sng" algn="ctr">
-                      <a:solidFill>
-                        <a:srgbClr val="D3DEE6"/>
-                      </a:solidFill>
-                      <a:prstDash val="solid"/>
-                      <a:round/>
-                      <a:headEnd type="none" w="med" len="med"/>
-                      <a:tailEnd type="none" w="med" len="med"/>
-                    </a:lnT>
-                    <a:lnB w="6350" cap="flat" cmpd="sng" algn="ctr">
-                      <a:solidFill>
-                        <a:srgbClr val="D3DEE6"/>
-                      </a:solidFill>
-                      <a:prstDash val="solid"/>
-                      <a:round/>
-                      <a:headEnd type="none" w="med" len="med"/>
-                      <a:tailEnd type="none" w="med" len="med"/>
-                    </a:lnB>
-                    <a:solidFill>
-                      <a:srgbClr val="FFFFFF"/>
-                    </a:solidFill>
-                  </a:tcPr>
-                </a:tc>
-                <a:tc>
-                  <a:txBody>
-                    <a:bodyPr/>
-                    <a:lstStyle/>
-                    <a:p>
-                      <a:pPr marL="0" indent="0" algn="r">
-                        <a:buNone/>
-                      </a:pPr>
-                      <a:r>
-                        <a:rPr lang="en-US" sz="1600" dirty="0">
-                          <a:solidFill>
-                            <a:srgbClr val="3E4C5E"/>
-                          </a:solidFill>
-                          <a:latin typeface="Calibri" pitchFamily="34" charset="0"/>
-                          <a:ea typeface="Calibri" pitchFamily="34" charset="-122"/>
-                          <a:cs typeface="Calibri" pitchFamily="34" charset="-120"/>
-                        </a:rPr>
-                        <a:t>7</a:t>
-                      </a:r>
-                      <a:endParaRPr lang="en-US" sz="1600" dirty="0">
-                        <a:latin typeface="Calibri" charset="0"/>
-                        <a:ea typeface="Calibri" charset="0"/>
-                        <a:cs typeface="Calibri" charset="0"/>
-                      </a:endParaRPr>
-                    </a:p>
-                  </a:txBody>
-                  <a:tcPr anchor="ctr">
-                    <a:lnL w="6350" cap="flat" cmpd="sng" algn="ctr">
-                      <a:solidFill>
-                        <a:srgbClr val="D3DEE6"/>
-                      </a:solidFill>
-                      <a:prstDash val="solid"/>
-                      <a:round/>
-                      <a:headEnd type="none" w="med" len="med"/>
-                      <a:tailEnd type="none" w="med" len="med"/>
-                    </a:lnL>
-                    <a:lnR w="6350" cap="flat" cmpd="sng" algn="ctr">
-                      <a:solidFill>
-                        <a:srgbClr val="D3DEE6"/>
-                      </a:solidFill>
-                      <a:prstDash val="solid"/>
-                      <a:round/>
-                      <a:headEnd type="none" w="med" len="med"/>
-                      <a:tailEnd type="none" w="med" len="med"/>
-                    </a:lnR>
-                    <a:lnT w="6350" cap="flat" cmpd="sng" algn="ctr">
-                      <a:solidFill>
-                        <a:srgbClr val="D3DEE6"/>
-                      </a:solidFill>
-                      <a:prstDash val="solid"/>
-                      <a:round/>
-                      <a:headEnd type="none" w="med" len="med"/>
-                      <a:tailEnd type="none" w="med" len="med"/>
-                    </a:lnT>
-                    <a:lnB w="6350" cap="flat" cmpd="sng" algn="ctr">
-                      <a:solidFill>
-                        <a:srgbClr val="D3DEE6"/>
-                      </a:solidFill>
-                      <a:prstDash val="solid"/>
-                      <a:round/>
-                      <a:headEnd type="none" w="med" len="med"/>
-                      <a:tailEnd type="none" w="med" len="med"/>
-                    </a:lnB>
-                    <a:solidFill>
-                      <a:srgbClr val="FFFFFF"/>
-                    </a:solidFill>
-                  </a:tcPr>
-                </a:tc>
                 <a:extLst>
                   <a:ext uri="{0D108BD9-81ED-4DB2-BD59-A6C34878D82A}">
                     <a16:rowId xmlns:a16="http://schemas.microsoft.com/office/drawing/2014/main" val="10003"/>
@@ -9473,142 +8886,6 @@
                           <a:cs typeface="Calibri" pitchFamily="34" charset="-120"/>
                         </a:rPr>
                         <a:t>Einordnung als IaaS, PaaS oder SaaS</a:t>
-                      </a:r>
-                      <a:endParaRPr lang="en-US" sz="1600" dirty="0">
-                        <a:latin typeface="Calibri" charset="0"/>
-                        <a:ea typeface="Calibri" charset="0"/>
-                        <a:cs typeface="Calibri" charset="0"/>
-                      </a:endParaRPr>
-                    </a:p>
-                  </a:txBody>
-                  <a:tcPr anchor="ctr">
-                    <a:lnL w="6350" cap="flat" cmpd="sng" algn="ctr">
-                      <a:solidFill>
-                        <a:srgbClr val="D3DEE6"/>
-                      </a:solidFill>
-                      <a:prstDash val="solid"/>
-                      <a:round/>
-                      <a:headEnd type="none" w="med" len="med"/>
-                      <a:tailEnd type="none" w="med" len="med"/>
-                    </a:lnL>
-                    <a:lnR w="6350" cap="flat" cmpd="sng" algn="ctr">
-                      <a:solidFill>
-                        <a:srgbClr val="D3DEE6"/>
-                      </a:solidFill>
-                      <a:prstDash val="solid"/>
-                      <a:round/>
-                      <a:headEnd type="none" w="med" len="med"/>
-                      <a:tailEnd type="none" w="med" len="med"/>
-                    </a:lnR>
-                    <a:lnT w="6350" cap="flat" cmpd="sng" algn="ctr">
-                      <a:solidFill>
-                        <a:srgbClr val="D3DEE6"/>
-                      </a:solidFill>
-                      <a:prstDash val="solid"/>
-                      <a:round/>
-                      <a:headEnd type="none" w="med" len="med"/>
-                      <a:tailEnd type="none" w="med" len="med"/>
-                    </a:lnT>
-                    <a:lnB w="6350" cap="flat" cmpd="sng" algn="ctr">
-                      <a:solidFill>
-                        <a:srgbClr val="D3DEE6"/>
-                      </a:solidFill>
-                      <a:prstDash val="solid"/>
-                      <a:round/>
-                      <a:headEnd type="none" w="med" len="med"/>
-                      <a:tailEnd type="none" w="med" len="med"/>
-                    </a:lnB>
-                    <a:solidFill>
-                      <a:srgbClr val="F4F8FA"/>
-                    </a:solidFill>
-                  </a:tcPr>
-                </a:tc>
-                <a:tc>
-                  <a:txBody>
-                    <a:bodyPr/>
-                    <a:lstStyle/>
-                    <a:p>
-                      <a:pPr marL="0" indent="0" algn="r">
-                        <a:buNone/>
-                      </a:pPr>
-                      <a:r>
-                        <a:rPr lang="en-US" sz="1600" dirty="0">
-                          <a:solidFill>
-                            <a:srgbClr val="3E4C5E"/>
-                          </a:solidFill>
-                          <a:latin typeface="Calibri" pitchFamily="34" charset="0"/>
-                          <a:ea typeface="Calibri" pitchFamily="34" charset="-122"/>
-                          <a:cs typeface="Calibri" pitchFamily="34" charset="-120"/>
-                        </a:rPr>
-                        <a:t>5</a:t>
-                      </a:r>
-                      <a:endParaRPr lang="en-US" sz="1600" dirty="0">
-                        <a:latin typeface="Calibri" charset="0"/>
-                        <a:ea typeface="Calibri" charset="0"/>
-                        <a:cs typeface="Calibri" charset="0"/>
-                      </a:endParaRPr>
-                    </a:p>
-                  </a:txBody>
-                  <a:tcPr anchor="ctr">
-                    <a:lnL w="6350" cap="flat" cmpd="sng" algn="ctr">
-                      <a:solidFill>
-                        <a:srgbClr val="D3DEE6"/>
-                      </a:solidFill>
-                      <a:prstDash val="solid"/>
-                      <a:round/>
-                      <a:headEnd type="none" w="med" len="med"/>
-                      <a:tailEnd type="none" w="med" len="med"/>
-                    </a:lnL>
-                    <a:lnR w="6350" cap="flat" cmpd="sng" algn="ctr">
-                      <a:solidFill>
-                        <a:srgbClr val="D3DEE6"/>
-                      </a:solidFill>
-                      <a:prstDash val="solid"/>
-                      <a:round/>
-                      <a:headEnd type="none" w="med" len="med"/>
-                      <a:tailEnd type="none" w="med" len="med"/>
-                    </a:lnR>
-                    <a:lnT w="6350" cap="flat" cmpd="sng" algn="ctr">
-                      <a:solidFill>
-                        <a:srgbClr val="D3DEE6"/>
-                      </a:solidFill>
-                      <a:prstDash val="solid"/>
-                      <a:round/>
-                      <a:headEnd type="none" w="med" len="med"/>
-                      <a:tailEnd type="none" w="med" len="med"/>
-                    </a:lnT>
-                    <a:lnB w="6350" cap="flat" cmpd="sng" algn="ctr">
-                      <a:solidFill>
-                        <a:srgbClr val="D3DEE6"/>
-                      </a:solidFill>
-                      <a:prstDash val="solid"/>
-                      <a:round/>
-                      <a:headEnd type="none" w="med" len="med"/>
-                      <a:tailEnd type="none" w="med" len="med"/>
-                    </a:lnB>
-                    <a:solidFill>
-                      <a:srgbClr val="F4F8FA"/>
-                    </a:solidFill>
-                  </a:tcPr>
-                </a:tc>
-                <a:tc>
-                  <a:txBody>
-                    <a:bodyPr/>
-                    <a:lstStyle/>
-                    <a:p>
-                      <a:pPr marL="0" indent="0" algn="r">
-                        <a:buNone/>
-                      </a:pPr>
-                      <a:r>
-                        <a:rPr lang="en-US" sz="1600" dirty="0">
-                          <a:solidFill>
-                            <a:srgbClr val="3E4C5E"/>
-                          </a:solidFill>
-                          <a:latin typeface="Calibri" pitchFamily="34" charset="0"/>
-                          <a:ea typeface="Calibri" pitchFamily="34" charset="-122"/>
-                          <a:cs typeface="Calibri" pitchFamily="34" charset="-120"/>
-                        </a:rPr>
-                        <a:t>8</a:t>
                       </a:r>
                       <a:endParaRPr lang="en-US" sz="1600" dirty="0">
                         <a:latin typeface="Calibri" charset="0"/>
@@ -9802,142 +9079,6 @@
                     </a:solidFill>
                   </a:tcPr>
                 </a:tc>
-                <a:tc>
-                  <a:txBody>
-                    <a:bodyPr/>
-                    <a:lstStyle/>
-                    <a:p>
-                      <a:pPr marL="0" indent="0" algn="r">
-                        <a:buNone/>
-                      </a:pPr>
-                      <a:r>
-                        <a:rPr lang="en-US" sz="1600" dirty="0">
-                          <a:solidFill>
-                            <a:srgbClr val="3E4C5E"/>
-                          </a:solidFill>
-                          <a:latin typeface="Calibri" pitchFamily="34" charset="0"/>
-                          <a:ea typeface="Calibri" pitchFamily="34" charset="-122"/>
-                          <a:cs typeface="Calibri" pitchFamily="34" charset="-120"/>
-                        </a:rPr>
-                        <a:t>5</a:t>
-                      </a:r>
-                      <a:endParaRPr lang="en-US" sz="1600" dirty="0">
-                        <a:latin typeface="Calibri" charset="0"/>
-                        <a:ea typeface="Calibri" charset="0"/>
-                        <a:cs typeface="Calibri" charset="0"/>
-                      </a:endParaRPr>
-                    </a:p>
-                  </a:txBody>
-                  <a:tcPr anchor="ctr">
-                    <a:lnL w="6350" cap="flat" cmpd="sng" algn="ctr">
-                      <a:solidFill>
-                        <a:srgbClr val="D3DEE6"/>
-                      </a:solidFill>
-                      <a:prstDash val="solid"/>
-                      <a:round/>
-                      <a:headEnd type="none" w="med" len="med"/>
-                      <a:tailEnd type="none" w="med" len="med"/>
-                    </a:lnL>
-                    <a:lnR w="6350" cap="flat" cmpd="sng" algn="ctr">
-                      <a:solidFill>
-                        <a:srgbClr val="D3DEE6"/>
-                      </a:solidFill>
-                      <a:prstDash val="solid"/>
-                      <a:round/>
-                      <a:headEnd type="none" w="med" len="med"/>
-                      <a:tailEnd type="none" w="med" len="med"/>
-                    </a:lnR>
-                    <a:lnT w="6350" cap="flat" cmpd="sng" algn="ctr">
-                      <a:solidFill>
-                        <a:srgbClr val="D3DEE6"/>
-                      </a:solidFill>
-                      <a:prstDash val="solid"/>
-                      <a:round/>
-                      <a:headEnd type="none" w="med" len="med"/>
-                      <a:tailEnd type="none" w="med" len="med"/>
-                    </a:lnT>
-                    <a:lnB w="6350" cap="flat" cmpd="sng" algn="ctr">
-                      <a:solidFill>
-                        <a:srgbClr val="D3DEE6"/>
-                      </a:solidFill>
-                      <a:prstDash val="solid"/>
-                      <a:round/>
-                      <a:headEnd type="none" w="med" len="med"/>
-                      <a:tailEnd type="none" w="med" len="med"/>
-                    </a:lnB>
-                    <a:solidFill>
-                      <a:srgbClr val="FFFFFF"/>
-                    </a:solidFill>
-                  </a:tcPr>
-                </a:tc>
-                <a:tc>
-                  <a:txBody>
-                    <a:bodyPr/>
-                    <a:lstStyle/>
-                    <a:p>
-                      <a:pPr marL="0" indent="0" algn="r">
-                        <a:buNone/>
-                      </a:pPr>
-                      <a:r>
-                        <a:rPr lang="en-US" sz="1600" dirty="0">
-                          <a:solidFill>
-                            <a:srgbClr val="3E4C5E"/>
-                          </a:solidFill>
-                          <a:latin typeface="Calibri" pitchFamily="34" charset="0"/>
-                          <a:ea typeface="Calibri" pitchFamily="34" charset="-122"/>
-                          <a:cs typeface="Calibri" pitchFamily="34" charset="-120"/>
-                        </a:rPr>
-                        <a:t>9</a:t>
-                      </a:r>
-                      <a:endParaRPr lang="en-US" sz="1600" dirty="0">
-                        <a:latin typeface="Calibri" charset="0"/>
-                        <a:ea typeface="Calibri" charset="0"/>
-                        <a:cs typeface="Calibri" charset="0"/>
-                      </a:endParaRPr>
-                    </a:p>
-                  </a:txBody>
-                  <a:tcPr anchor="ctr">
-                    <a:lnL w="6350" cap="flat" cmpd="sng" algn="ctr">
-                      <a:solidFill>
-                        <a:srgbClr val="D3DEE6"/>
-                      </a:solidFill>
-                      <a:prstDash val="solid"/>
-                      <a:round/>
-                      <a:headEnd type="none" w="med" len="med"/>
-                      <a:tailEnd type="none" w="med" len="med"/>
-                    </a:lnL>
-                    <a:lnR w="6350" cap="flat" cmpd="sng" algn="ctr">
-                      <a:solidFill>
-                        <a:srgbClr val="D3DEE6"/>
-                      </a:solidFill>
-                      <a:prstDash val="solid"/>
-                      <a:round/>
-                      <a:headEnd type="none" w="med" len="med"/>
-                      <a:tailEnd type="none" w="med" len="med"/>
-                    </a:lnR>
-                    <a:lnT w="6350" cap="flat" cmpd="sng" algn="ctr">
-                      <a:solidFill>
-                        <a:srgbClr val="D3DEE6"/>
-                      </a:solidFill>
-                      <a:prstDash val="solid"/>
-                      <a:round/>
-                      <a:headEnd type="none" w="med" len="med"/>
-                      <a:tailEnd type="none" w="med" len="med"/>
-                    </a:lnT>
-                    <a:lnB w="6350" cap="flat" cmpd="sng" algn="ctr">
-                      <a:solidFill>
-                        <a:srgbClr val="D3DEE6"/>
-                      </a:solidFill>
-                      <a:prstDash val="solid"/>
-                      <a:round/>
-                      <a:headEnd type="none" w="med" len="med"/>
-                      <a:tailEnd type="none" w="med" len="med"/>
-                    </a:lnB>
-                    <a:solidFill>
-                      <a:srgbClr val="FFFFFF"/>
-                    </a:solidFill>
-                  </a:tcPr>
-                </a:tc>
                 <a:extLst>
                   <a:ext uri="{0D108BD9-81ED-4DB2-BD59-A6C34878D82A}">
                     <a16:rowId xmlns:a16="http://schemas.microsoft.com/office/drawing/2014/main" val="10005"/>
@@ -10031,142 +9172,6 @@
                           <a:cs typeface="Calibri" pitchFamily="34" charset="-120"/>
                         </a:rPr>
                         <a:t>Konzept zur sicheren Datenübertragung</a:t>
-                      </a:r>
-                      <a:endParaRPr lang="en-US" sz="1600" dirty="0">
-                        <a:latin typeface="Calibri" charset="0"/>
-                        <a:ea typeface="Calibri" charset="0"/>
-                        <a:cs typeface="Calibri" charset="0"/>
-                      </a:endParaRPr>
-                    </a:p>
-                  </a:txBody>
-                  <a:tcPr anchor="ctr">
-                    <a:lnL w="6350" cap="flat" cmpd="sng" algn="ctr">
-                      <a:solidFill>
-                        <a:srgbClr val="D3DEE6"/>
-                      </a:solidFill>
-                      <a:prstDash val="solid"/>
-                      <a:round/>
-                      <a:headEnd type="none" w="med" len="med"/>
-                      <a:tailEnd type="none" w="med" len="med"/>
-                    </a:lnL>
-                    <a:lnR w="6350" cap="flat" cmpd="sng" algn="ctr">
-                      <a:solidFill>
-                        <a:srgbClr val="D3DEE6"/>
-                      </a:solidFill>
-                      <a:prstDash val="solid"/>
-                      <a:round/>
-                      <a:headEnd type="none" w="med" len="med"/>
-                      <a:tailEnd type="none" w="med" len="med"/>
-                    </a:lnR>
-                    <a:lnT w="6350" cap="flat" cmpd="sng" algn="ctr">
-                      <a:solidFill>
-                        <a:srgbClr val="D3DEE6"/>
-                      </a:solidFill>
-                      <a:prstDash val="solid"/>
-                      <a:round/>
-                      <a:headEnd type="none" w="med" len="med"/>
-                      <a:tailEnd type="none" w="med" len="med"/>
-                    </a:lnT>
-                    <a:lnB w="6350" cap="flat" cmpd="sng" algn="ctr">
-                      <a:solidFill>
-                        <a:srgbClr val="D3DEE6"/>
-                      </a:solidFill>
-                      <a:prstDash val="solid"/>
-                      <a:round/>
-                      <a:headEnd type="none" w="med" len="med"/>
-                      <a:tailEnd type="none" w="med" len="med"/>
-                    </a:lnB>
-                    <a:solidFill>
-                      <a:srgbClr val="F4F8FA"/>
-                    </a:solidFill>
-                  </a:tcPr>
-                </a:tc>
-                <a:tc>
-                  <a:txBody>
-                    <a:bodyPr/>
-                    <a:lstStyle/>
-                    <a:p>
-                      <a:pPr marL="0" indent="0" algn="r">
-                        <a:buNone/>
-                      </a:pPr>
-                      <a:r>
-                        <a:rPr lang="en-US" sz="1600" dirty="0">
-                          <a:solidFill>
-                            <a:srgbClr val="3E4C5E"/>
-                          </a:solidFill>
-                          <a:latin typeface="Calibri" pitchFamily="34" charset="0"/>
-                          <a:ea typeface="Calibri" pitchFamily="34" charset="-122"/>
-                          <a:cs typeface="Calibri" pitchFamily="34" charset="-120"/>
-                        </a:rPr>
-                        <a:t>10</a:t>
-                      </a:r>
-                      <a:endParaRPr lang="en-US" sz="1600" dirty="0">
-                        <a:latin typeface="Calibri" charset="0"/>
-                        <a:ea typeface="Calibri" charset="0"/>
-                        <a:cs typeface="Calibri" charset="0"/>
-                      </a:endParaRPr>
-                    </a:p>
-                  </a:txBody>
-                  <a:tcPr anchor="ctr">
-                    <a:lnL w="6350" cap="flat" cmpd="sng" algn="ctr">
-                      <a:solidFill>
-                        <a:srgbClr val="D3DEE6"/>
-                      </a:solidFill>
-                      <a:prstDash val="solid"/>
-                      <a:round/>
-                      <a:headEnd type="none" w="med" len="med"/>
-                      <a:tailEnd type="none" w="med" len="med"/>
-                    </a:lnL>
-                    <a:lnR w="6350" cap="flat" cmpd="sng" algn="ctr">
-                      <a:solidFill>
-                        <a:srgbClr val="D3DEE6"/>
-                      </a:solidFill>
-                      <a:prstDash val="solid"/>
-                      <a:round/>
-                      <a:headEnd type="none" w="med" len="med"/>
-                      <a:tailEnd type="none" w="med" len="med"/>
-                    </a:lnR>
-                    <a:lnT w="6350" cap="flat" cmpd="sng" algn="ctr">
-                      <a:solidFill>
-                        <a:srgbClr val="D3DEE6"/>
-                      </a:solidFill>
-                      <a:prstDash val="solid"/>
-                      <a:round/>
-                      <a:headEnd type="none" w="med" len="med"/>
-                      <a:tailEnd type="none" w="med" len="med"/>
-                    </a:lnT>
-                    <a:lnB w="6350" cap="flat" cmpd="sng" algn="ctr">
-                      <a:solidFill>
-                        <a:srgbClr val="D3DEE6"/>
-                      </a:solidFill>
-                      <a:prstDash val="solid"/>
-                      <a:round/>
-                      <a:headEnd type="none" w="med" len="med"/>
-                      <a:tailEnd type="none" w="med" len="med"/>
-                    </a:lnB>
-                    <a:solidFill>
-                      <a:srgbClr val="F4F8FA"/>
-                    </a:solidFill>
-                  </a:tcPr>
-                </a:tc>
-                <a:tc>
-                  <a:txBody>
-                    <a:bodyPr/>
-                    <a:lstStyle/>
-                    <a:p>
-                      <a:pPr marL="0" indent="0" algn="r">
-                        <a:buNone/>
-                      </a:pPr>
-                      <a:r>
-                        <a:rPr lang="en-US" sz="1600" dirty="0">
-                          <a:solidFill>
-                            <a:srgbClr val="3E4C5E"/>
-                          </a:solidFill>
-                          <a:latin typeface="Calibri" pitchFamily="34" charset="0"/>
-                          <a:ea typeface="Calibri" pitchFamily="34" charset="-122"/>
-                          <a:cs typeface="Calibri" pitchFamily="34" charset="-120"/>
-                        </a:rPr>
-                        <a:t>10</a:t>
                       </a:r>
                       <a:endParaRPr lang="en-US" sz="1600" dirty="0">
                         <a:latin typeface="Calibri" charset="0"/>
@@ -10360,142 +9365,6 @@
                     </a:solidFill>
                   </a:tcPr>
                 </a:tc>
-                <a:tc>
-                  <a:txBody>
-                    <a:bodyPr/>
-                    <a:lstStyle/>
-                    <a:p>
-                      <a:pPr marL="0" indent="0" algn="r">
-                        <a:buNone/>
-                      </a:pPr>
-                      <a:r>
-                        <a:rPr lang="en-US" sz="1600" dirty="0">
-                          <a:solidFill>
-                            <a:srgbClr val="3E4C5E"/>
-                          </a:solidFill>
-                          <a:latin typeface="Calibri" pitchFamily="34" charset="0"/>
-                          <a:ea typeface="Calibri" pitchFamily="34" charset="-122"/>
-                          <a:cs typeface="Calibri" pitchFamily="34" charset="-120"/>
-                        </a:rPr>
-                        <a:t>10</a:t>
-                      </a:r>
-                      <a:endParaRPr lang="en-US" sz="1600" dirty="0">
-                        <a:latin typeface="Calibri" charset="0"/>
-                        <a:ea typeface="Calibri" charset="0"/>
-                        <a:cs typeface="Calibri" charset="0"/>
-                      </a:endParaRPr>
-                    </a:p>
-                  </a:txBody>
-                  <a:tcPr anchor="ctr">
-                    <a:lnL w="6350" cap="flat" cmpd="sng" algn="ctr">
-                      <a:solidFill>
-                        <a:srgbClr val="D3DEE6"/>
-                      </a:solidFill>
-                      <a:prstDash val="solid"/>
-                      <a:round/>
-                      <a:headEnd type="none" w="med" len="med"/>
-                      <a:tailEnd type="none" w="med" len="med"/>
-                    </a:lnL>
-                    <a:lnR w="6350" cap="flat" cmpd="sng" algn="ctr">
-                      <a:solidFill>
-                        <a:srgbClr val="D3DEE6"/>
-                      </a:solidFill>
-                      <a:prstDash val="solid"/>
-                      <a:round/>
-                      <a:headEnd type="none" w="med" len="med"/>
-                      <a:tailEnd type="none" w="med" len="med"/>
-                    </a:lnR>
-                    <a:lnT w="6350" cap="flat" cmpd="sng" algn="ctr">
-                      <a:solidFill>
-                        <a:srgbClr val="D3DEE6"/>
-                      </a:solidFill>
-                      <a:prstDash val="solid"/>
-                      <a:round/>
-                      <a:headEnd type="none" w="med" len="med"/>
-                      <a:tailEnd type="none" w="med" len="med"/>
-                    </a:lnT>
-                    <a:lnB w="6350" cap="flat" cmpd="sng" algn="ctr">
-                      <a:solidFill>
-                        <a:srgbClr val="D3DEE6"/>
-                      </a:solidFill>
-                      <a:prstDash val="solid"/>
-                      <a:round/>
-                      <a:headEnd type="none" w="med" len="med"/>
-                      <a:tailEnd type="none" w="med" len="med"/>
-                    </a:lnB>
-                    <a:solidFill>
-                      <a:srgbClr val="FFFFFF"/>
-                    </a:solidFill>
-                  </a:tcPr>
-                </a:tc>
-                <a:tc>
-                  <a:txBody>
-                    <a:bodyPr/>
-                    <a:lstStyle/>
-                    <a:p>
-                      <a:pPr marL="0" indent="0" algn="r">
-                        <a:buNone/>
-                      </a:pPr>
-                      <a:r>
-                        <a:rPr lang="en-US" sz="1600" dirty="0">
-                          <a:solidFill>
-                            <a:srgbClr val="3E4C5E"/>
-                          </a:solidFill>
-                          <a:latin typeface="Calibri" pitchFamily="34" charset="0"/>
-                          <a:ea typeface="Calibri" pitchFamily="34" charset="-122"/>
-                          <a:cs typeface="Calibri" pitchFamily="34" charset="-120"/>
-                        </a:rPr>
-                        <a:t>11</a:t>
-                      </a:r>
-                      <a:endParaRPr lang="en-US" sz="1600" dirty="0">
-                        <a:latin typeface="Calibri" charset="0"/>
-                        <a:ea typeface="Calibri" charset="0"/>
-                        <a:cs typeface="Calibri" charset="0"/>
-                      </a:endParaRPr>
-                    </a:p>
-                  </a:txBody>
-                  <a:tcPr anchor="ctr">
-                    <a:lnL w="6350" cap="flat" cmpd="sng" algn="ctr">
-                      <a:solidFill>
-                        <a:srgbClr val="D3DEE6"/>
-                      </a:solidFill>
-                      <a:prstDash val="solid"/>
-                      <a:round/>
-                      <a:headEnd type="none" w="med" len="med"/>
-                      <a:tailEnd type="none" w="med" len="med"/>
-                    </a:lnL>
-                    <a:lnR w="6350" cap="flat" cmpd="sng" algn="ctr">
-                      <a:solidFill>
-                        <a:srgbClr val="D3DEE6"/>
-                      </a:solidFill>
-                      <a:prstDash val="solid"/>
-                      <a:round/>
-                      <a:headEnd type="none" w="med" len="med"/>
-                      <a:tailEnd type="none" w="med" len="med"/>
-                    </a:lnR>
-                    <a:lnT w="6350" cap="flat" cmpd="sng" algn="ctr">
-                      <a:solidFill>
-                        <a:srgbClr val="D3DEE6"/>
-                      </a:solidFill>
-                      <a:prstDash val="solid"/>
-                      <a:round/>
-                      <a:headEnd type="none" w="med" len="med"/>
-                      <a:tailEnd type="none" w="med" len="med"/>
-                    </a:lnT>
-                    <a:lnB w="6350" cap="flat" cmpd="sng" algn="ctr">
-                      <a:solidFill>
-                        <a:srgbClr val="D3DEE6"/>
-                      </a:solidFill>
-                      <a:prstDash val="solid"/>
-                      <a:round/>
-                      <a:headEnd type="none" w="med" len="med"/>
-                      <a:tailEnd type="none" w="med" len="med"/>
-                    </a:lnB>
-                    <a:solidFill>
-                      <a:srgbClr val="FFFFFF"/>
-                    </a:solidFill>
-                  </a:tcPr>
-                </a:tc>
                 <a:extLst>
                   <a:ext uri="{0D108BD9-81ED-4DB2-BD59-A6C34878D82A}">
                     <a16:rowId xmlns:a16="http://schemas.microsoft.com/office/drawing/2014/main" val="10007"/>
@@ -10639,142 +9508,6 @@
                     </a:solidFill>
                   </a:tcPr>
                 </a:tc>
-                <a:tc>
-                  <a:txBody>
-                    <a:bodyPr/>
-                    <a:lstStyle/>
-                    <a:p>
-                      <a:pPr marL="0" indent="0" algn="r">
-                        <a:buNone/>
-                      </a:pPr>
-                      <a:r>
-                        <a:rPr lang="en-US" sz="1600" dirty="0">
-                          <a:solidFill>
-                            <a:srgbClr val="3E4C5E"/>
-                          </a:solidFill>
-                          <a:latin typeface="Calibri" pitchFamily="34" charset="0"/>
-                          <a:ea typeface="Calibri" pitchFamily="34" charset="-122"/>
-                          <a:cs typeface="Calibri" pitchFamily="34" charset="-120"/>
-                        </a:rPr>
-                        <a:t>5</a:t>
-                      </a:r>
-                      <a:endParaRPr lang="en-US" sz="1600" dirty="0">
-                        <a:latin typeface="Calibri" charset="0"/>
-                        <a:ea typeface="Calibri" charset="0"/>
-                        <a:cs typeface="Calibri" charset="0"/>
-                      </a:endParaRPr>
-                    </a:p>
-                  </a:txBody>
-                  <a:tcPr anchor="ctr">
-                    <a:lnL w="6350" cap="flat" cmpd="sng" algn="ctr">
-                      <a:solidFill>
-                        <a:srgbClr val="D3DEE6"/>
-                      </a:solidFill>
-                      <a:prstDash val="solid"/>
-                      <a:round/>
-                      <a:headEnd type="none" w="med" len="med"/>
-                      <a:tailEnd type="none" w="med" len="med"/>
-                    </a:lnL>
-                    <a:lnR w="6350" cap="flat" cmpd="sng" algn="ctr">
-                      <a:solidFill>
-                        <a:srgbClr val="D3DEE6"/>
-                      </a:solidFill>
-                      <a:prstDash val="solid"/>
-                      <a:round/>
-                      <a:headEnd type="none" w="med" len="med"/>
-                      <a:tailEnd type="none" w="med" len="med"/>
-                    </a:lnR>
-                    <a:lnT w="6350" cap="flat" cmpd="sng" algn="ctr">
-                      <a:solidFill>
-                        <a:srgbClr val="D3DEE6"/>
-                      </a:solidFill>
-                      <a:prstDash val="solid"/>
-                      <a:round/>
-                      <a:headEnd type="none" w="med" len="med"/>
-                      <a:tailEnd type="none" w="med" len="med"/>
-                    </a:lnT>
-                    <a:lnB w="6350" cap="flat" cmpd="sng" algn="ctr">
-                      <a:solidFill>
-                        <a:srgbClr val="D3DEE6"/>
-                      </a:solidFill>
-                      <a:prstDash val="solid"/>
-                      <a:round/>
-                      <a:headEnd type="none" w="med" len="med"/>
-                      <a:tailEnd type="none" w="med" len="med"/>
-                    </a:lnB>
-                    <a:solidFill>
-                      <a:srgbClr val="F4F8FA"/>
-                    </a:solidFill>
-                  </a:tcPr>
-                </a:tc>
-                <a:tc>
-                  <a:txBody>
-                    <a:bodyPr/>
-                    <a:lstStyle/>
-                    <a:p>
-                      <a:pPr marL="0" indent="0" algn="r">
-                        <a:buNone/>
-                      </a:pPr>
-                      <a:r>
-                        <a:rPr lang="en-US" sz="1600" dirty="0">
-                          <a:solidFill>
-                            <a:srgbClr val="3E4C5E"/>
-                          </a:solidFill>
-                          <a:latin typeface="Calibri" pitchFamily="34" charset="0"/>
-                          <a:ea typeface="Calibri" pitchFamily="34" charset="-122"/>
-                          <a:cs typeface="Calibri" pitchFamily="34" charset="-120"/>
-                        </a:rPr>
-                        <a:t>12</a:t>
-                      </a:r>
-                      <a:endParaRPr lang="en-US" sz="1600" dirty="0">
-                        <a:latin typeface="Calibri" charset="0"/>
-                        <a:ea typeface="Calibri" charset="0"/>
-                        <a:cs typeface="Calibri" charset="0"/>
-                      </a:endParaRPr>
-                    </a:p>
-                  </a:txBody>
-                  <a:tcPr anchor="ctr">
-                    <a:lnL w="6350" cap="flat" cmpd="sng" algn="ctr">
-                      <a:solidFill>
-                        <a:srgbClr val="D3DEE6"/>
-                      </a:solidFill>
-                      <a:prstDash val="solid"/>
-                      <a:round/>
-                      <a:headEnd type="none" w="med" len="med"/>
-                      <a:tailEnd type="none" w="med" len="med"/>
-                    </a:lnL>
-                    <a:lnR w="6350" cap="flat" cmpd="sng" algn="ctr">
-                      <a:solidFill>
-                        <a:srgbClr val="D3DEE6"/>
-                      </a:solidFill>
-                      <a:prstDash val="solid"/>
-                      <a:round/>
-                      <a:headEnd type="none" w="med" len="med"/>
-                      <a:tailEnd type="none" w="med" len="med"/>
-                    </a:lnR>
-                    <a:lnT w="6350" cap="flat" cmpd="sng" algn="ctr">
-                      <a:solidFill>
-                        <a:srgbClr val="D3DEE6"/>
-                      </a:solidFill>
-                      <a:prstDash val="solid"/>
-                      <a:round/>
-                      <a:headEnd type="none" w="med" len="med"/>
-                      <a:tailEnd type="none" w="med" len="med"/>
-                    </a:lnT>
-                    <a:lnB w="6350" cap="flat" cmpd="sng" algn="ctr">
-                      <a:solidFill>
-                        <a:srgbClr val="D3DEE6"/>
-                      </a:solidFill>
-                      <a:prstDash val="solid"/>
-                      <a:round/>
-                      <a:headEnd type="none" w="med" len="med"/>
-                      <a:tailEnd type="none" w="med" len="med"/>
-                    </a:lnB>
-                    <a:solidFill>
-                      <a:srgbClr val="F4F8FA"/>
-                    </a:solidFill>
-                  </a:tcPr>
-                </a:tc>
                 <a:extLst>
                   <a:ext uri="{0D108BD9-81ED-4DB2-BD59-A6C34878D82A}">
                     <a16:rowId xmlns:a16="http://schemas.microsoft.com/office/drawing/2014/main" val="10008"/>
@@ -10805,7 +9538,7 @@
           </a:prstGeom>
           <a:extLst>
             <a:ext uri="{C572A759-6A51-4108-AA02-DFA0A04FC94B}">
-              <ma14:wrappingTextBoxFlag xmlns:ma14="http://schemas.microsoft.com/office/mac/drawingml/2011/main" xmlns="" val="0"/>
+              <ma14:wrappingTextBoxFlag xmlns="" xmlns:ma14="http://schemas.microsoft.com/office/mac/drawingml/2011/main" val="0"/>
             </a:ext>
           </a:extLst>
         </p:spPr>
@@ -10833,6 +9566,36 @@
           </a:p>
         </p:txBody>
       </p:sp>
+      <p:pic>
+        <p:nvPicPr>
+          <p:cNvPr id="4" name="Grafik 3">
+            <a:extLst>
+              <a:ext uri="{FF2B5EF4-FFF2-40B4-BE49-F238E27FC236}">
+                <a16:creationId xmlns:a16="http://schemas.microsoft.com/office/drawing/2014/main" id="{88E89417-271D-3DB2-4977-E036CA03C7AB}"/>
+              </a:ext>
+            </a:extLst>
+          </p:cNvPr>
+          <p:cNvPicPr>
+            <a:picLocks noChangeAspect="1"/>
+          </p:cNvPicPr>
+          <p:nvPr/>
+        </p:nvPicPr>
+        <p:blipFill>
+          <a:blip r:embed="rId3"/>
+          <a:stretch>
+            <a:fillRect/>
+          </a:stretch>
+        </p:blipFill>
+        <p:spPr>
+          <a:xfrm>
+            <a:off x="444972" y="6051550"/>
+            <a:ext cx="4470400" cy="698500"/>
+          </a:xfrm>
+          <a:prstGeom prst="rect">
+            <a:avLst/>
+          </a:prstGeom>
+        </p:spPr>
+      </p:pic>
     </p:spTree>
   </p:cSld>
   <p:clrMapOvr>
@@ -10894,49 +9657,6 @@
               <a:t>KRITERIUM 1 · MINDESTENS ZWEI CLOUDDIENSTE</a:t>
             </a:r>
             <a:endParaRPr lang="en-US" sz="1200" dirty="0"/>
-          </a:p>
-        </p:txBody>
-      </p:sp>
-      <p:sp>
-        <p:nvSpPr>
-          <p:cNvPr id="3" name="Punkte"/>
-          <p:cNvSpPr/>
-          <p:nvPr/>
-        </p:nvSpPr>
-        <p:spPr>
-          <a:xfrm>
-            <a:off x="9994392" y="457200"/>
-            <a:ext cx="1554480" cy="457200"/>
-          </a:xfrm>
-          <a:prstGeom prst="roundRect">
-            <a:avLst>
-              <a:gd name="adj" fmla="val 50000"/>
-            </a:avLst>
-          </a:prstGeom>
-          <a:solidFill>
-            <a:schemeClr val="accent1"/>
-          </a:solidFill>
-          <a:ln/>
-        </p:spPr>
-        <p:txBody>
-          <a:bodyPr wrap="square" lIns="0" tIns="0" rIns="0" bIns="0" rtlCol="0" anchor="ctr"/>
-          <a:lstStyle/>
-          <a:p>
-            <a:pPr marL="0" indent="0" algn="ctr">
-              <a:buNone/>
-            </a:pPr>
-            <a:r>
-              <a:rPr lang="en-US" sz="1600" b="1" dirty="0">
-                <a:solidFill>
-                  <a:srgbClr val="FFFFFF"/>
-                </a:solidFill>
-                <a:latin typeface="Calibri" pitchFamily="34" charset="0"/>
-                <a:ea typeface="Calibri" pitchFamily="34" charset="-122"/>
-                <a:cs typeface="Calibri" pitchFamily="34" charset="-120"/>
-              </a:rPr>
-              <a:t>5 Punkte</a:t>
-            </a:r>
-            <a:endParaRPr lang="en-US" sz="1600" dirty="0"/>
           </a:p>
         </p:txBody>
       </p:sp>
@@ -12396,7 +11116,7 @@
           </a:prstGeom>
           <a:extLst>
             <a:ext uri="{C572A759-6A51-4108-AA02-DFA0A04FC94B}">
-              <ma14:wrappingTextBoxFlag xmlns:ma14="http://schemas.microsoft.com/office/mac/drawingml/2011/main" xmlns="" val="0"/>
+              <ma14:wrappingTextBoxFlag xmlns="" xmlns:ma14="http://schemas.microsoft.com/office/mac/drawingml/2011/main" val="0"/>
             </a:ext>
           </a:extLst>
         </p:spPr>
@@ -12424,6 +11144,36 @@
           </a:p>
         </p:txBody>
       </p:sp>
+      <p:pic>
+        <p:nvPicPr>
+          <p:cNvPr id="9" name="Grafik 8">
+            <a:extLst>
+              <a:ext uri="{FF2B5EF4-FFF2-40B4-BE49-F238E27FC236}">
+                <a16:creationId xmlns:a16="http://schemas.microsoft.com/office/drawing/2014/main" id="{8BFD1305-3E00-7DE9-5858-8522511B2C01}"/>
+              </a:ext>
+            </a:extLst>
+          </p:cNvPr>
+          <p:cNvPicPr>
+            <a:picLocks noChangeAspect="1"/>
+          </p:cNvPicPr>
+          <p:nvPr/>
+        </p:nvPicPr>
+        <p:blipFill>
+          <a:blip r:embed="rId3"/>
+          <a:stretch>
+            <a:fillRect/>
+          </a:stretch>
+        </p:blipFill>
+        <p:spPr>
+          <a:xfrm>
+            <a:off x="480786" y="5989320"/>
+            <a:ext cx="4470400" cy="698500"/>
+          </a:xfrm>
+          <a:prstGeom prst="rect">
+            <a:avLst/>
+          </a:prstGeom>
+        </p:spPr>
+      </p:pic>
     </p:spTree>
   </p:cSld>
   <p:clrMapOvr>
@@ -12490,49 +11240,6 @@
       </p:sp>
       <p:sp>
         <p:nvSpPr>
-          <p:cNvPr id="3" name="Punkte"/>
-          <p:cNvSpPr/>
-          <p:nvPr/>
-        </p:nvSpPr>
-        <p:spPr>
-          <a:xfrm>
-            <a:off x="9994392" y="457200"/>
-            <a:ext cx="1554480" cy="457200"/>
-          </a:xfrm>
-          <a:prstGeom prst="roundRect">
-            <a:avLst>
-              <a:gd name="adj" fmla="val 50000"/>
-            </a:avLst>
-          </a:prstGeom>
-          <a:solidFill>
-            <a:schemeClr val="accent2"/>
-          </a:solidFill>
-          <a:ln/>
-        </p:spPr>
-        <p:txBody>
-          <a:bodyPr wrap="square" lIns="0" tIns="0" rIns="0" bIns="0" rtlCol="0" anchor="ctr"/>
-          <a:lstStyle/>
-          <a:p>
-            <a:pPr marL="0" indent="0" algn="ctr">
-              <a:buNone/>
-            </a:pPr>
-            <a:r>
-              <a:rPr lang="en-US" sz="1600" b="1" dirty="0">
-                <a:solidFill>
-                  <a:schemeClr val="tx1"/>
-                </a:solidFill>
-                <a:latin typeface="Calibri" pitchFamily="34" charset="0"/>
-                <a:ea typeface="Calibri" pitchFamily="34" charset="-122"/>
-                <a:cs typeface="Calibri" pitchFamily="34" charset="-120"/>
-              </a:rPr>
-              <a:t>5 Punkte</a:t>
-            </a:r>
-            <a:endParaRPr lang="en-US" sz="1600" dirty="0"/>
-          </a:p>
-        </p:txBody>
-      </p:sp>
-      <p:sp>
-        <p:nvSpPr>
           <p:cNvPr id="4" name="Kriterium"/>
           <p:cNvSpPr txBox="1"/>
           <p:nvPr/>
@@ -13312,7 +12019,7 @@
           </a:prstGeom>
           <a:extLst>
             <a:ext uri="{C572A759-6A51-4108-AA02-DFA0A04FC94B}">
-              <ma14:wrappingTextBoxFlag xmlns:ma14="http://schemas.microsoft.com/office/mac/drawingml/2011/main" xmlns="" val="0"/>
+              <ma14:wrappingTextBoxFlag xmlns="" xmlns:ma14="http://schemas.microsoft.com/office/mac/drawingml/2011/main" val="0"/>
             </a:ext>
           </a:extLst>
         </p:spPr>
@@ -13340,6 +12047,36 @@
           </a:p>
         </p:txBody>
       </p:sp>
+      <p:pic>
+        <p:nvPicPr>
+          <p:cNvPr id="24" name="Grafik 23">
+            <a:extLst>
+              <a:ext uri="{FF2B5EF4-FFF2-40B4-BE49-F238E27FC236}">
+                <a16:creationId xmlns:a16="http://schemas.microsoft.com/office/drawing/2014/main" id="{2EA0B00A-08B8-078F-142C-A6A27F5AA9A2}"/>
+              </a:ext>
+            </a:extLst>
+          </p:cNvPr>
+          <p:cNvPicPr>
+            <a:picLocks noChangeAspect="1"/>
+          </p:cNvPicPr>
+          <p:nvPr/>
+        </p:nvPicPr>
+        <p:blipFill>
+          <a:blip r:embed="rId4"/>
+          <a:stretch>
+            <a:fillRect/>
+          </a:stretch>
+        </p:blipFill>
+        <p:spPr>
+          <a:xfrm>
+            <a:off x="219529" y="6142990"/>
+            <a:ext cx="4470400" cy="698500"/>
+          </a:xfrm>
+          <a:prstGeom prst="rect">
+            <a:avLst/>
+          </a:prstGeom>
+        </p:spPr>
+      </p:pic>
     </p:spTree>
   </p:cSld>
   <p:clrMapOvr>
@@ -13401,49 +12138,6 @@
               <a:t>KRITERIUM 3 · NIST-KRITERIEN (SP 800-145)</a:t>
             </a:r>
             <a:endParaRPr lang="en-US" sz="1200" dirty="0"/>
-          </a:p>
-        </p:txBody>
-      </p:sp>
-      <p:sp>
-        <p:nvSpPr>
-          <p:cNvPr id="3" name="Punkte"/>
-          <p:cNvSpPr/>
-          <p:nvPr/>
-        </p:nvSpPr>
-        <p:spPr>
-          <a:xfrm>
-            <a:off x="9994392" y="457200"/>
-            <a:ext cx="1554480" cy="457200"/>
-          </a:xfrm>
-          <a:prstGeom prst="roundRect">
-            <a:avLst>
-              <a:gd name="adj" fmla="val 50000"/>
-            </a:avLst>
-          </a:prstGeom>
-          <a:solidFill>
-            <a:schemeClr val="accent1"/>
-          </a:solidFill>
-          <a:ln/>
-        </p:spPr>
-        <p:txBody>
-          <a:bodyPr wrap="square" lIns="0" tIns="0" rIns="0" bIns="0" rtlCol="0" anchor="ctr"/>
-          <a:lstStyle/>
-          <a:p>
-            <a:pPr marL="0" indent="0" algn="ctr">
-              <a:buNone/>
-            </a:pPr>
-            <a:r>
-              <a:rPr lang="en-US" sz="1600" b="1" dirty="0">
-                <a:solidFill>
-                  <a:srgbClr val="FFFFFF"/>
-                </a:solidFill>
-                <a:latin typeface="Calibri" pitchFamily="34" charset="0"/>
-                <a:ea typeface="Calibri" pitchFamily="34" charset="-122"/>
-                <a:cs typeface="Calibri" pitchFamily="34" charset="-120"/>
-              </a:rPr>
-              <a:t>5 Punkte</a:t>
-            </a:r>
-            <a:endParaRPr lang="en-US" sz="1600" dirty="0"/>
           </a:p>
         </p:txBody>
       </p:sp>
@@ -14864,7 +13558,7 @@
           </a:prstGeom>
           <a:extLst>
             <a:ext uri="{C572A759-6A51-4108-AA02-DFA0A04FC94B}">
-              <ma14:wrappingTextBoxFlag xmlns:ma14="http://schemas.microsoft.com/office/mac/drawingml/2011/main" xmlns="" val="0"/>
+              <ma14:wrappingTextBoxFlag xmlns="" xmlns:ma14="http://schemas.microsoft.com/office/mac/drawingml/2011/main" val="0"/>
             </a:ext>
           </a:extLst>
         </p:spPr>
@@ -14892,6 +13586,36 @@
           </a:p>
         </p:txBody>
       </p:sp>
+      <p:pic>
+        <p:nvPicPr>
+          <p:cNvPr id="7" name="Grafik 6">
+            <a:extLst>
+              <a:ext uri="{FF2B5EF4-FFF2-40B4-BE49-F238E27FC236}">
+                <a16:creationId xmlns:a16="http://schemas.microsoft.com/office/drawing/2014/main" id="{4440E93E-6CC7-694E-2069-C8491488D5B0}"/>
+              </a:ext>
+            </a:extLst>
+          </p:cNvPr>
+          <p:cNvPicPr>
+            <a:picLocks noChangeAspect="1"/>
+          </p:cNvPicPr>
+          <p:nvPr/>
+        </p:nvPicPr>
+        <p:blipFill>
+          <a:blip r:embed="rId3"/>
+          <a:stretch>
+            <a:fillRect/>
+          </a:stretch>
+        </p:blipFill>
+        <p:spPr>
+          <a:xfrm>
+            <a:off x="453136" y="5897880"/>
+            <a:ext cx="4470400" cy="698500"/>
+          </a:xfrm>
+          <a:prstGeom prst="rect">
+            <a:avLst/>
+          </a:prstGeom>
+        </p:spPr>
+      </p:pic>
     </p:spTree>
   </p:cSld>
   <p:clrMapOvr>
@@ -14958,49 +13682,6 @@
       </p:sp>
       <p:sp>
         <p:nvSpPr>
-          <p:cNvPr id="3" name="Punkte"/>
-          <p:cNvSpPr/>
-          <p:nvPr/>
-        </p:nvSpPr>
-        <p:spPr>
-          <a:xfrm>
-            <a:off x="9994392" y="457200"/>
-            <a:ext cx="1554480" cy="457200"/>
-          </a:xfrm>
-          <a:prstGeom prst="roundRect">
-            <a:avLst>
-              <a:gd name="adj" fmla="val 50000"/>
-            </a:avLst>
-          </a:prstGeom>
-          <a:solidFill>
-            <a:schemeClr val="accent1"/>
-          </a:solidFill>
-          <a:ln/>
-        </p:spPr>
-        <p:txBody>
-          <a:bodyPr wrap="square" lIns="0" tIns="0" rIns="0" bIns="0" rtlCol="0" anchor="ctr"/>
-          <a:lstStyle/>
-          <a:p>
-            <a:pPr marL="0" indent="0" algn="ctr">
-              <a:buNone/>
-            </a:pPr>
-            <a:r>
-              <a:rPr lang="en-US" sz="1600" b="1" dirty="0">
-                <a:solidFill>
-                  <a:srgbClr val="FFFFFF"/>
-                </a:solidFill>
-                <a:latin typeface="Calibri" pitchFamily="34" charset="0"/>
-                <a:ea typeface="Calibri" pitchFamily="34" charset="-122"/>
-                <a:cs typeface="Calibri" pitchFamily="34" charset="-120"/>
-              </a:rPr>
-              <a:t>5 Punkte</a:t>
-            </a:r>
-            <a:endParaRPr lang="en-US" sz="1600" dirty="0"/>
-          </a:p>
-        </p:txBody>
-      </p:sp>
-      <p:sp>
-        <p:nvSpPr>
           <p:cNvPr id="4" name="Kriterium"/>
           <p:cNvSpPr txBox="1"/>
           <p:nvPr/>
@@ -15916,7 +14597,7 @@
           </a:prstGeom>
           <a:extLst>
             <a:ext uri="{C572A759-6A51-4108-AA02-DFA0A04FC94B}">
-              <ma14:wrappingTextBoxFlag xmlns:ma14="http://schemas.microsoft.com/office/mac/drawingml/2011/main" xmlns="" val="0"/>
+              <ma14:wrappingTextBoxFlag xmlns="" xmlns:ma14="http://schemas.microsoft.com/office/mac/drawingml/2011/main" val="0"/>
             </a:ext>
           </a:extLst>
         </p:spPr>
@@ -15944,6 +14625,36 @@
           </a:p>
         </p:txBody>
       </p:sp>
+      <p:pic>
+        <p:nvPicPr>
+          <p:cNvPr id="26" name="Grafik 25">
+            <a:extLst>
+              <a:ext uri="{FF2B5EF4-FFF2-40B4-BE49-F238E27FC236}">
+                <a16:creationId xmlns:a16="http://schemas.microsoft.com/office/drawing/2014/main" id="{732B3586-53A1-51EE-9821-07A529324253}"/>
+              </a:ext>
+            </a:extLst>
+          </p:cNvPr>
+          <p:cNvPicPr>
+            <a:picLocks noChangeAspect="1"/>
+          </p:cNvPicPr>
+          <p:nvPr/>
+        </p:nvPicPr>
+        <p:blipFill>
+          <a:blip r:embed="rId3"/>
+          <a:stretch>
+            <a:fillRect/>
+          </a:stretch>
+        </p:blipFill>
+        <p:spPr>
+          <a:xfrm>
+            <a:off x="480786" y="5989320"/>
+            <a:ext cx="4470400" cy="698500"/>
+          </a:xfrm>
+          <a:prstGeom prst="rect">
+            <a:avLst/>
+          </a:prstGeom>
+        </p:spPr>
+      </p:pic>
     </p:spTree>
   </p:cSld>
   <p:clrMapOvr>
@@ -16010,49 +14721,6 @@
       </p:sp>
       <p:sp>
         <p:nvSpPr>
-          <p:cNvPr id="3" name="Punkte"/>
-          <p:cNvSpPr/>
-          <p:nvPr/>
-        </p:nvSpPr>
-        <p:spPr>
-          <a:xfrm>
-            <a:off x="9994392" y="457200"/>
-            <a:ext cx="1554480" cy="457200"/>
-          </a:xfrm>
-          <a:prstGeom prst="roundRect">
-            <a:avLst>
-              <a:gd name="adj" fmla="val 50000"/>
-            </a:avLst>
-          </a:prstGeom>
-          <a:solidFill>
-            <a:schemeClr val="accent1"/>
-          </a:solidFill>
-          <a:ln/>
-        </p:spPr>
-        <p:txBody>
-          <a:bodyPr wrap="square" lIns="0" tIns="0" rIns="0" bIns="0" rtlCol="0" anchor="ctr"/>
-          <a:lstStyle/>
-          <a:p>
-            <a:pPr marL="0" indent="0" algn="ctr">
-              <a:buNone/>
-            </a:pPr>
-            <a:r>
-              <a:rPr lang="en-US" sz="1600" b="1" dirty="0">
-                <a:solidFill>
-                  <a:srgbClr val="FFFFFF"/>
-                </a:solidFill>
-                <a:latin typeface="Calibri" pitchFamily="34" charset="0"/>
-                <a:ea typeface="Calibri" pitchFamily="34" charset="-122"/>
-                <a:cs typeface="Calibri" pitchFamily="34" charset="-120"/>
-              </a:rPr>
-              <a:t>5 Punkte</a:t>
-            </a:r>
-            <a:endParaRPr lang="en-US" sz="1600" dirty="0"/>
-          </a:p>
-        </p:txBody>
-      </p:sp>
-      <p:sp>
-        <p:nvSpPr>
           <p:cNvPr id="4" name="Kriterium"/>
           <p:cNvSpPr txBox="1"/>
           <p:nvPr/>
@@ -16958,7 +15626,7 @@
           </a:prstGeom>
           <a:extLst>
             <a:ext uri="{C572A759-6A51-4108-AA02-DFA0A04FC94B}">
-              <ma14:wrappingTextBoxFlag xmlns:ma14="http://schemas.microsoft.com/office/mac/drawingml/2011/main" xmlns="" val="0"/>
+              <ma14:wrappingTextBoxFlag xmlns="" xmlns:ma14="http://schemas.microsoft.com/office/mac/drawingml/2011/main" val="0"/>
             </a:ext>
           </a:extLst>
         </p:spPr>
@@ -16986,6 +15654,36 @@
           </a:p>
         </p:txBody>
       </p:sp>
+      <p:pic>
+        <p:nvPicPr>
+          <p:cNvPr id="23" name="Grafik 22">
+            <a:extLst>
+              <a:ext uri="{FF2B5EF4-FFF2-40B4-BE49-F238E27FC236}">
+                <a16:creationId xmlns:a16="http://schemas.microsoft.com/office/drawing/2014/main" id="{25A3BD74-BDB2-BA78-48A7-4C0727D5A1C6}"/>
+              </a:ext>
+            </a:extLst>
+          </p:cNvPr>
+          <p:cNvPicPr>
+            <a:picLocks noChangeAspect="1"/>
+          </p:cNvPicPr>
+          <p:nvPr/>
+        </p:nvPicPr>
+        <p:blipFill>
+          <a:blip r:embed="rId6"/>
+          <a:stretch>
+            <a:fillRect/>
+          </a:stretch>
+        </p:blipFill>
+        <p:spPr>
+          <a:xfrm>
+            <a:off x="480786" y="5989320"/>
+            <a:ext cx="4470400" cy="698500"/>
+          </a:xfrm>
+          <a:prstGeom prst="rect">
+            <a:avLst/>
+          </a:prstGeom>
+        </p:spPr>
+      </p:pic>
     </p:spTree>
   </p:cSld>
   <p:clrMapOvr>

--- a/Challenge-III-Ice-Truck-Cloud/Praesentation/ice-truck-in-der-cloud.pptx
+++ b/Challenge-III-Ice-Truck-Cloud/Praesentation/ice-truck-in-der-cloud.pptx
@@ -502,7 +502,7 @@
           <a:p>
             <a:r>
               <a:rPr lang="en-US" dirty="0"/>
-              <a:t>SPRECHER: Felix · RICHTZEIT: 1:30 min — Hier zeigen wir die Ergebnisse. LIVE-DEMO oder Screenshot: ThingSpeak-Kanal mit Temperaturverlauf, Lüfter und Ventil. Die Messung läuft alle 5 Sekunden. Der Upload wird wegen der Free-Grenze alle 15 Sekunden gebündelt, jede Messung behält ihre eigene Uhrzeit. Es gibt 8 Felder, und der CSV-Export dient als Nachweis für Kontrollen. Der Kanal ist öffentlich, deshalb kann jeder ohne Anmeldung zuschauen. VOR DEM VORTRAG: Den Platzhalter durch einen echten Screenshot ersetzen und prüfen, dass die Punkte im 5-Sekunden-Abstand ankommen. ÜBERGABE: Weiter mit den Zusatzfunktionen (Felix bleibt).</a:t>
+              <a:t>SPRECHER: Felix · RICHTZEIT: 1:30 min — Hier zeigen wir die Ergebnisse. LIVE-DEMO oder Screenshot: ThingSpeak-Kanal mit Temperaturverlauf, Lüfter und Ventil. Die Messung läuft alle 5 Sekunden. Der Upload wird wegen der Free-Grenze alle 15 Sekunden gebündelt, jede Messung behält ihre eigene Uhrzeit. Es gibt 8 Felder, und der CSV-Export dient als Nachweis für Kontrollen. Der Kanal ist öffentlich, deshalb kann jeder ohne Anmeldung zuschauen. VOR DEM VORTRAG: Pi vorher durchlaufen lassen und prüfen, dass die Punkte im 5-Sekunden-Abstand ankommen. ÜBERGABE: Weiter mit den Zusatzfunktionen (Felix bleibt).</a:t>
             </a:r>
           </a:p>
         </p:txBody>
@@ -589,7 +589,7 @@
           <a:p>
             <a:r>
               <a:rPr lang="en-US" dirty="0"/>
-              <a:t>SPRECHER: Felix · RICHTZEIT: 1:00 min — Store and Forward: Bei einem Funkloch werden fehlende Messungen später mit ihrer Originalzeit nachgeliefert. Health-Flags: Die Bridge warnt schon am Truck bei zu hoher Temperatur, abweichenden Sensoren oder einem eingefrorenen Sensor. Alarm: Sobald Field 3 über 30 Grad steigt, startet ThingSpeak React eine MATLAB-Analyse, die eine Nachricht an unseren Discord-Server und eine E-Mail schickt. Die Zugangsdaten liegen nur in ThingSpeak. Laut My Account sind 800 Alarm-Mails im Jahr erlaubt. Als Nächstes das Sensor-Drift-Diagramm als Beispiel für Predictive Maintenance. VOR DEM VORTRAG: Wenn das Diagramm läuft, die Karte auf UMGESETZT setzen, sonst die Karte löschen. ÜBERGABE: Weiter mit dem Fazit (Felix bleibt).</a:t>
+              <a:t>SPRECHER: Felix · RICHTZEIT: 1:00 min — Store and Forward: Bei einem Funkloch werden fehlende Messungen später mit ihrer Originalzeit nachgeliefert. Health-Flags: Die Bridge warnt schon am Truck bei zu hoher Temperatur, abweichenden Sensoren oder einem eingefrorenen Sensor. Alarm: Sobald Field 3 über 30 Grad steigt, startet ThingSpeak React eine MATLAB-Analyse, die eine Nachricht an unseren Discord-Server und eine E-Mail schickt. Die Zugangsdaten liegen nur in ThingSpeak. Laut My Account sind 800 Alarm-Mails im Jahr erlaubt. Sensor-Drift: Ein MATLAB-Diagramm in ThingSpeak zeigt pro Minute, wie weit die beiden Temperatursensoren auseinanderliegen, mit gleitendem Mittelwert und Warnschwelle bei 3 Grad. Wächst die Abweichung stetig, deutet das auf einen defekten Sensor oder Wackelkontakt hin, und die Wartung lässt sich planen, bevor der Truck ausfällt. VOR DEM VORTRAG: Pi vorher durchlaufen lassen, damit das Diagramm frische Minutenwerte zeigt. ÜBERGABE: Weiter mit dem Fazit (Felix bleibt).</a:t>
             </a:r>
           </a:p>
         </p:txBody>
@@ -676,7 +676,7 @@
           <a:p>
             <a:r>
               <a:rPr lang="en-US" dirty="0"/>
-              <a:t>SPRECHER: Felix · RICHTZEIT: 1:00 min — Wir erfüllen die Nachweispflicht deutlich besser: Die Daten kommen automatisch und zeitnah in die Cloud und sind von überall abrufbar. Sie sind doppelt gesichert, lokal im Pi und in der Cloud. Ausblick: Für den echten Flottenbetrieb würden wir Azure IoT Hub mit EU-Region wählen, die Alarme ausbauen und die Sensor-Drift für Predictive Maintenance nutzen. Gelernt: Unsere Bridge trennt Logik und Sender, der Anbieter lässt sich austauschen. ThingSpeak jetzt, Azure für die Flotte. Vielen Dank, wir freuen uns auf eure Fragen. ÜBERGABE: Fragen beantwortet, wer fachlich dran ist (siehe Rückfragen im Redemanuskript).</a:t>
+              <a:t>SPRECHER: Felix · RICHTZEIT: 1:00 min — Wir erfüllen die Nachweispflicht deutlich besser: Die Daten kommen automatisch und zeitnah in die Cloud und sind von überall abrufbar. Sie sind doppelt gesichert, lokal im Pi und in der Cloud. Ausblick: Für den echten Flottenbetrieb würden wir Azure IoT Hub mit EU-Region wählen, die Alarme ausbauen und die Sensor-Drift-Auswertung zur Wartungsplanung der ganzen Flotte nutzen. Gelernt: Unsere Bridge trennt Logik und Sender, der Anbieter lässt sich austauschen. ThingSpeak jetzt, Azure für die Flotte. Vielen Dank, wir freuen uns auf eure Fragen. ÜBERGABE: Fragen beantwortet, wer fachlich dran ist (siehe Rückfragen im Redemanuskript).</a:t>
             </a:r>
           </a:p>
         </p:txBody>
@@ -5227,7 +5227,7 @@
         <p:spPr>
           <a:xfrm>
             <a:off x="6519672" y="4206240"/>
-            <a:ext cx="1188720" cy="310896"/>
+            <a:ext cx="1371600" cy="310896"/>
           </a:xfrm>
           <a:prstGeom prst="roundRect">
             <a:avLst>
@@ -5235,7 +5235,7 @@
             </a:avLst>
           </a:prstGeom>
           <a:solidFill>
-            <a:srgbClr val="FDE9CF"/>
+            <a:srgbClr val="D9F2E3"/>
           </a:solidFill>
           <a:ln/>
         </p:spPr>
@@ -5249,13 +5249,13 @@
             <a:r>
               <a:rPr lang="en-US" sz="1200" b="1" dirty="0">
                 <a:solidFill>
-                  <a:srgbClr val="8A4B05"/>
+                  <a:srgbClr val="1B6B3A"/>
                 </a:solidFill>
                 <a:latin typeface="Calibri" pitchFamily="34" charset="0"/>
                 <a:ea typeface="Calibri" pitchFamily="34" charset="-122"/>
                 <a:cs typeface="Calibri" pitchFamily="34" charset="-120"/>
               </a:rPr>
-              <a:t>IN ARBEIT</a:t>
+              <a:t>UMGESETZT</a:t>
             </a:r>
             <a:endParaRPr lang="en-US" sz="1200" dirty="0"/>
           </a:p>
@@ -5333,7 +5333,7 @@
                 <a:ea typeface="Calibri" pitchFamily="34" charset="-122"/>
                 <a:cs typeface="Calibri" pitchFamily="34" charset="-120"/>
               </a:rPr>
-              <a:t>MATLAB-Diagramm: Wandert ein Sensor vom anderen weg? So lässt sich Wartung planen.</a:t>
+              <a:t>MATLAB-Diagramm: Wandert ein Sensor vom anderen weg? Abweichung pro Minute, Warnschwelle 3 °C.</a:t>
             </a:r>
             <a:endParaRPr lang="en-US" sz="1500" dirty="0"/>
           </a:p>

--- a/Challenge-III-Ice-Truck-Cloud/Praesentation/ice-truck-in-der-cloud.pptx
+++ b/Challenge-III-Ice-Truck-Cloud/Praesentation/ice-truck-in-der-cloud.pptx
@@ -502,7 +502,7 @@
           <a:p>
             <a:r>
               <a:rPr lang="en-US" dirty="0"/>
-              <a:t>SPRECHER: Felix · RICHTZEIT: 1:30 min — Hier zeigen wir die Ergebnisse. LIVE-DEMO oder Screenshot: ThingSpeak-Kanal mit Temperaturverlauf, Lüfter und Ventil. Die Messung läuft alle 5 Sekunden. Der Upload wird wegen der Free-Grenze alle 15 Sekunden gebündelt, jede Messung behält ihre eigene Uhrzeit. Es gibt 8 Felder, und der CSV-Export dient als Nachweis für Kontrollen. Der Kanal ist öffentlich, deshalb kann jeder ohne Anmeldung zuschauen. VOR DEM VORTRAG: Pi vorher durchlaufen lassen und prüfen, dass die Punkte im 5-Sekunden-Abstand ankommen. ÜBERGABE: Weiter mit den Zusatzfunktionen (Felix bleibt).</a:t>
+              <a:t>SPRECHER: Felix · RICHTZEIT: 1:30 min — Hier zeigen wir die Ergebnisse. LIVE-DEMO oder Screenshot: ThingSpeak-Kanal mit Temperaturverlauf, Lüfter und Ventil. Die Messung läuft alle 5 Sekunden. Der Upload wird gebündelt und läuft einmal pro Minute, die Free-Grenze von 15 Sekunden unterschreiten wir damit deutlich. Jede Messung behält ihre eigene Uhrzeit, das Diagramm zeigt also trotzdem das 5-Sekunden-Raster. Die Diagramme in ThingSpeak aktualisieren sich im Minutentakt. Es gibt 8 Felder, und der CSV-Export dient als Nachweis für Kontrollen. Der Kanal ist öffentlich, deshalb kann jeder ohne Anmeldung zuschauen. VOR DEM VORTRAG: Pi vorher durchlaufen lassen und prüfen, dass die Punkte im 5-Sekunden-Abstand ankommen. ÜBERGABE: Weiter mit den Zusatzfunktionen (Felix bleibt).</a:t>
             </a:r>
           </a:p>
         </p:txBody>
@@ -4174,7 +4174,7 @@
                 <a:ea typeface="Calibri" pitchFamily="34" charset="-122"/>
                 <a:cs typeface="Calibri" pitchFamily="34" charset="-120"/>
               </a:rPr>
-              <a:t>Messung alle 5 s, Upload gebündelt im 15-s-Takt</a:t>
+              <a:t>Messung alle 5 s, Upload gebündelt einmal pro Minute</a:t>
             </a:r>
             <a:endParaRPr lang="en-US" sz="1600" dirty="0"/>
           </a:p>

--- a/Challenge-III-Ice-Truck-Cloud/Praesentation/ice-truck-in-der-cloud.pptx
+++ b/Challenge-III-Ice-Truck-Cloud/Praesentation/ice-truck-in-der-cloud.pptx
@@ -502,7 +502,7 @@
           <a:p>
             <a:r>
               <a:rPr lang="en-US" dirty="0"/>
-              <a:t>SPRECHER: Felix · RICHTZEIT: 1:30 min — Hier zeigen wir die Ergebnisse. LIVE-DEMO oder Screenshot: ThingSpeak-Kanal mit Temperaturverlauf, Lüfter und Ventil. Die Messung läuft alle 5 Sekunden. Der Upload wird gebündelt und läuft einmal pro Minute, die Free-Grenze von 15 Sekunden unterschreiten wir damit deutlich. Jede Messung behält ihre eigene Uhrzeit, das Diagramm zeigt also trotzdem das 5-Sekunden-Raster. Die Diagramme in ThingSpeak aktualisieren sich im Minutentakt. Es gibt 8 Felder, und der CSV-Export dient als Nachweis für Kontrollen. Der Kanal ist öffentlich, deshalb kann jeder ohne Anmeldung zuschauen. VOR DEM VORTRAG: Pi vorher durchlaufen lassen und prüfen, dass die Punkte im 5-Sekunden-Abstand ankommen. ÜBERGABE: Weiter mit den Zusatzfunktionen (Felix bleibt).</a:t>
+              <a:t>SPRECHER: Felix · RICHTZEIT: 1:30 min — Hier zeigen wir die Ergebnisse. LIVE-DEMO oder Screenshot: ThingSpeak-Kanal mit Temperaturverlauf, Lüfter und Ventil. Die Werte kommen alle 5 Sekunden, jeder Punkt im Diagramm ist eine Messung. Hochgeladen wird gebündelt einmal pro Minute, deshalb aktualisieren sich die Diagramme in ThingSpeak im Minutentakt. Jede Messung behält ihre eigene Uhrzeit. Nach einem Funkloch die Seite neu laden, dann ist die Lücke gefüllt. Es gibt 8 Felder, und der CSV-Export dient als Nachweis für Kontrollen. Der Kanal ist öffentlich, deshalb kann jeder ohne Anmeldung zuschauen. VOR DEM VORTRAG: Pi vorher durchlaufen lassen und prüfen, dass die Punkte im 5-Sekunden-Abstand ankommen. ÜBERGABE: Weiter mit den Zusatzfunktionen (Felix bleibt).</a:t>
             </a:r>
           </a:p>
         </p:txBody>
@@ -589,7 +589,7 @@
           <a:p>
             <a:r>
               <a:rPr lang="en-US" dirty="0"/>
-              <a:t>SPRECHER: Felix · RICHTZEIT: 1:00 min — Store and Forward: Bei einem Funkloch werden fehlende Messungen später mit ihrer Originalzeit nachgeliefert. Health-Flags: Die Bridge warnt schon am Truck bei zu hoher Temperatur, abweichenden Sensoren oder einem eingefrorenen Sensor. Alarm: Sobald Field 3 über 30 Grad steigt, startet ThingSpeak React eine MATLAB-Analyse, die eine Nachricht an unseren Discord-Server und eine E-Mail schickt. Die Zugangsdaten liegen nur in ThingSpeak. Laut My Account sind 800 Alarm-Mails im Jahr erlaubt. Sensor-Drift: Ein MATLAB-Diagramm in ThingSpeak zeigt pro Minute, wie weit die beiden Temperatursensoren auseinanderliegen, mit gleitendem Mittelwert und Warnschwelle bei 3 Grad. Wächst die Abweichung stetig, deutet das auf einen defekten Sensor oder Wackelkontakt hin, und die Wartung lässt sich planen, bevor der Truck ausfällt. VOR DEM VORTRAG: Pi vorher durchlaufen lassen, damit das Diagramm frische Minutenwerte zeigt. ÜBERGABE: Weiter mit dem Fazit (Felix bleibt).</a:t>
+              <a:t>SPRECHER: Felix · RICHTZEIT: 1:00 min — Store and Forward: Bei einem Funkloch werden fehlende Messungen später mit ihrer Originalzeit nachgeliefert. Warnmarker im Datensatz: Der Pi prüft jedes Minutenpaket und vermerkt zu hohe Temperatur, abweichende oder eingefrorene Sensoren im Statusfeld, sichtbar im CSV-Export. Der Alarm per Discord und Mail hängt nicht daran, sondern an Field 3. Alarm: Sobald Field 3 über 30 Grad steigt, startet ThingSpeak React eine MATLAB-Analyse, die eine Nachricht an unseren Discord-Server und eine E-Mail schickt. Die Zugangsdaten liegen nur in ThingSpeak. Laut My Account sind 800 Alarm-Mails im Jahr erlaubt. Sensor-Drift: Ein MATLAB-Diagramm in ThingSpeak zeigt pro Minute, wie weit die beiden Temperatursensoren auseinanderliegen, mit gleitendem Mittelwert und Warnschwelle bei 3 Grad. Wächst die Abweichung stetig, deutet das auf einen defekten Sensor oder Wackelkontakt hin, und die Wartung lässt sich planen, bevor der Truck ausfällt. VOR DEM VORTRAG: Pi vorher durchlaufen lassen, damit das Diagramm frische Minutenwerte zeigt. ÜBERGABE: Weiter mit dem Fazit (Felix bleibt).</a:t>
             </a:r>
           </a:p>
         </p:txBody>
@@ -4174,7 +4174,7 @@
                 <a:ea typeface="Calibri" pitchFamily="34" charset="-122"/>
                 <a:cs typeface="Calibri" pitchFamily="34" charset="-120"/>
               </a:rPr>
-              <a:t>Messung alle 5 s, Upload gebündelt einmal pro Minute</a:t>
+              <a:t>Werte alle 5 s, Diagramm aktualisiert sich jede Minute</a:t>
             </a:r>
             <a:endParaRPr lang="en-US" sz="1600" dirty="0"/>
           </a:p>
@@ -4984,7 +4984,7 @@
                 <a:ea typeface="Calibri" pitchFamily="34" charset="-122"/>
                 <a:cs typeface="Calibri" pitchFamily="34" charset="-120"/>
               </a:rPr>
-              <a:t>Health-Flags am Edge</a:t>
+              <a:t>Warnmarker im Datensatz</a:t>
             </a:r>
             <a:endParaRPr lang="en-US" sz="2200" dirty="0"/>
           </a:p>
@@ -5023,7 +5023,7 @@
                 <a:ea typeface="Calibri" pitchFamily="34" charset="-122"/>
                 <a:cs typeface="Calibri" pitchFamily="34" charset="-120"/>
               </a:rPr>
-              <a:t>Warnung bei zu hoher Temperatur, abweichenden Sensoren oder eingefrorenem Sensor.</a:t>
+              <a:t>Der Pi vermerkt zu warm, abweichende oder eingefrorene Sensoren im Statusfeld, sichtbar im CSV-Export.</a:t>
             </a:r>
             <a:endParaRPr lang="en-US" sz="1500" dirty="0"/>
           </a:p>
